--- a/slides/CSC270-Lecture-27-MongoDB-and-the-Document-Model.pptx
+++ b/slides/CSC270-Lecture-27-MongoDB-and-the-Document-Model.pptx
@@ -7,6 +7,7 @@
   <p:sldIdLst>
     <p:sldId id="256" r:id="rId2"/>
     <p:sldId id="257" r:id="rId3"/>
+    <p:sldId id="272" r:id="rId23"/>
     <p:sldId id="258" r:id="rId4"/>
     <p:sldId id="259" r:id="rId5"/>
     <p:sldId id="260" r:id="rId6"/>
@@ -17,8 +18,11 @@
     <p:sldId id="265" r:id="rId11"/>
     <p:sldId id="266" r:id="rId12"/>
     <p:sldId id="267" r:id="rId13"/>
+    <p:sldId id="273" r:id="rId24"/>
     <p:sldId id="268" r:id="rId14"/>
+    <p:sldId id="274" r:id="rId25"/>
     <p:sldId id="269" r:id="rId15"/>
+    <p:sldId id="275" r:id="rId26"/>
     <p:sldId id="270" r:id="rId16"/>
     <p:sldId id="271" r:id="rId17"/>
   </p:sldIdLst>
@@ -2311,7 +2315,7 @@
               </a:rPr>
               <a:t>CSC270 · DATABASE SYSTEMS · LECTURE 27</a:t>
             </a:r>
-            <a:endParaRPr lang="en-US" sz="1400" dirty="0"/>
+            <a:endParaRPr lang="en-US" sz="1800" dirty="0"/>
           </a:p>
         </p:txBody>
       </p:sp>
@@ -2350,7 +2354,7 @@
               </a:rPr>
               <a:t>Hands-On Document Databases</a:t>
             </a:r>
-            <a:endParaRPr lang="en-US" sz="1400" dirty="0"/>
+            <a:endParaRPr lang="en-US" sz="1800" dirty="0"/>
           </a:p>
         </p:txBody>
       </p:sp>
@@ -2418,7 +2422,7 @@
               <a:buNone/>
             </a:pPr>
             <a:r>
-              <a:rPr lang="en-US" sz="1600" dirty="0">
+              <a:rPr lang="en-US" sz="1800" dirty="0">
                 <a:solidFill>
                   <a:srgbClr val="8A939B"/>
                 </a:solidFill>
@@ -2428,7 +2432,7 @@
               </a:rPr>
               <a:t>CSC270 · Database Systems — COMSATS University Islamabad, Lahore Campus</a:t>
             </a:r>
-            <a:endParaRPr lang="en-US" sz="1600" dirty="0"/>
+            <a:endParaRPr lang="en-US" sz="1800" dirty="0"/>
           </a:p>
         </p:txBody>
       </p:sp>
@@ -2457,7 +2461,7 @@
               <a:buNone/>
             </a:pPr>
             <a:r>
-              <a:rPr lang="en-US" sz="1000" u="sng" dirty="0">
+              <a:rPr lang="en-US" sz="1200" u="sng" dirty="0">
                 <a:solidFill>
                   <a:srgbClr val="8A939B"/>
                 </a:solidFill>
@@ -2478,7 +2482,7 @@
               <a:buNone/>
             </a:pPr>
             <a:r>
-              <a:rPr lang="en-US" sz="1000" dirty="0">
+              <a:rPr lang="en-US" sz="1200" dirty="0">
                 <a:solidFill>
                   <a:srgbClr val="8A939B"/>
                 </a:solidFill>
@@ -2488,7 +2492,7 @@
               </a:rPr>
               <a:t>  ·  1</a:t>
             </a:r>
-            <a:endParaRPr lang="en-US" sz="1000" dirty="0"/>
+            <a:endParaRPr lang="en-US" sz="1200" dirty="0"/>
           </a:p>
         </p:txBody>
       </p:sp>
@@ -2627,7 +2631,7 @@
               <a:buNone/>
             </a:pPr>
             <a:r>
-              <a:rPr lang="en-US" sz="1000" u="sng" dirty="0">
+              <a:rPr lang="en-US" sz="1200" u="sng" dirty="0">
                 <a:solidFill>
                   <a:srgbClr val="8A939B"/>
                 </a:solidFill>
@@ -2648,7 +2652,7 @@
               <a:buNone/>
             </a:pPr>
             <a:r>
-              <a:rPr lang="en-US" sz="1000" dirty="0">
+              <a:rPr lang="en-US" sz="1200" dirty="0">
                 <a:solidFill>
                   <a:srgbClr val="8A939B"/>
                 </a:solidFill>
@@ -2656,9 +2660,9 @@
                 <a:ea typeface="Calibri" pitchFamily="34" charset="-122"/>
                 <a:cs typeface="Calibri" pitchFamily="34" charset="-120"/>
               </a:rPr>
-              <a:t>  ·  10</a:t>
-            </a:r>
-            <a:endParaRPr lang="en-US" sz="1000" dirty="0"/>
+              <a:t>  ·  11</a:t>
+            </a:r>
+            <a:endParaRPr lang="en-US" sz="1200" dirty="0"/>
           </a:p>
         </p:txBody>
       </p:sp>
@@ -2690,7 +2694,7 @@
               <a:buNone/>
             </a:pPr>
             <a:r>
-              <a:rPr lang="en-US" sz="1300" dirty="0">
+              <a:rPr lang="en-US" sz="1400" dirty="0">
                 <a:solidFill>
                   <a:srgbClr val="1F2429"/>
                 </a:solidFill>
@@ -2700,7 +2704,7 @@
               </a:rPr>
               <a:t>Embedding isn't always right. When related data is large, unbounded, or queried independently of its “parent” — many students sharing the same course — documents can instead reference each other by ObjectId, much closer to a relational foreign key:</a:t>
             </a:r>
-            <a:endParaRPr lang="en-US" sz="1300" dirty="0"/>
+            <a:endParaRPr lang="en-US" sz="1800" dirty="0"/>
           </a:p>
         </p:txBody>
       </p:sp>
@@ -2823,7 +2827,7 @@
               <a:buNone/>
             </a:pPr>
             <a:r>
-              <a:rPr lang="en-US" sz="1000" dirty="0">
+              <a:rPr lang="en-US" sz="1200" dirty="0">
                 <a:solidFill>
                   <a:srgbClr val="8A939B"/>
                 </a:solidFill>
@@ -2833,7 +2837,7 @@
               </a:rPr>
               <a:t>mongosh</a:t>
             </a:r>
-            <a:endParaRPr lang="en-US" sz="1000" dirty="0"/>
+            <a:endParaRPr lang="en-US" sz="1200" dirty="0"/>
           </a:p>
         </p:txBody>
       </p:sp>
@@ -2865,17 +2869,17 @@
               <a:buNone/>
             </a:pPr>
             <a:r>
-              <a:rPr lang="en-US" sz="1300" dirty="0">
-                <a:solidFill>
-                  <a:srgbClr val="7C8792"/>
+              <a:rPr lang="en-US" sz="1400" dirty="0">
+                <a:solidFill>
+                  <a:srgbClr val="E8EDF0"/>
                 </a:solidFill>
                 <a:latin typeface="Courier New" pitchFamily="34" charset="0"/>
                 <a:ea typeface="Courier New" pitchFamily="34" charset="-122"/>
                 <a:cs typeface="Courier New" pitchFamily="34" charset="-120"/>
               </a:rPr>
-              <a:t>// Referencing instead of embedding -- closer to a relational foreign key</a:t>
-            </a:r>
-            <a:endParaRPr lang="en-US" sz="1300" dirty="0"/>
+              <a:t>db.students.insertOne({</a:t>
+            </a:r>
+            <a:endParaRPr lang="en-US" sz="1800" dirty="0"/>
           </a:p>
           <a:p>
             <a:pPr indent="0" marL="0">
@@ -2885,7 +2889,7 @@
               <a:buNone/>
             </a:pPr>
             <a:r>
-              <a:rPr lang="en-US" sz="1300" dirty="0">
+              <a:rPr lang="en-US" sz="1400" dirty="0">
                 <a:solidFill>
                   <a:srgbClr val="E8EDF0"/>
                 </a:solidFill>
@@ -2893,9 +2897,9 @@
                 <a:ea typeface="Courier New" pitchFamily="34" charset="-122"/>
                 <a:cs typeface="Courier New" pitchFamily="34" charset="-120"/>
               </a:rPr>
-              <a:t>db.students.insertOne({</a:t>
-            </a:r>
-            <a:endParaRPr lang="en-US" sz="1300" dirty="0"/>
+              <a:t>  regNo: "FA21-BCS-045",</a:t>
+            </a:r>
+            <a:endParaRPr lang="en-US" sz="1800" dirty="0"/>
           </a:p>
           <a:p>
             <a:pPr indent="0" marL="0">
@@ -2905,7 +2909,7 @@
               <a:buNone/>
             </a:pPr>
             <a:r>
-              <a:rPr lang="en-US" sz="1300" dirty="0">
+              <a:rPr lang="en-US" sz="1400" dirty="0">
                 <a:solidFill>
                   <a:srgbClr val="E8EDF0"/>
                 </a:solidFill>
@@ -2913,9 +2917,9 @@
                 <a:ea typeface="Courier New" pitchFamily="34" charset="-122"/>
                 <a:cs typeface="Courier New" pitchFamily="34" charset="-120"/>
               </a:rPr>
-              <a:t>  regNo: "FA21-BCS-045",</a:t>
-            </a:r>
-            <a:endParaRPr lang="en-US" sz="1300" dirty="0"/>
+              <a:t>  name: "Ayesha Khan",</a:t>
+            </a:r>
+            <a:endParaRPr lang="en-US" sz="1800" dirty="0"/>
           </a:p>
           <a:p>
             <a:pPr indent="0" marL="0">
@@ -2925,7 +2929,7 @@
               <a:buNone/>
             </a:pPr>
             <a:r>
-              <a:rPr lang="en-US" sz="1300" dirty="0">
+              <a:rPr lang="en-US" sz="1400" dirty="0">
                 <a:solidFill>
                   <a:srgbClr val="E8EDF0"/>
                 </a:solidFill>
@@ -2933,9 +2937,9 @@
                 <a:ea typeface="Courier New" pitchFamily="34" charset="-122"/>
                 <a:cs typeface="Courier New" pitchFamily="34" charset="-120"/>
               </a:rPr>
-              <a:t>  name: "Ayesha Khan",</a:t>
-            </a:r>
-            <a:endParaRPr lang="en-US" sz="1300" dirty="0"/>
+              <a:t>  enrolledCourseIds: [ ObjectId("66f2b1c0..."), ObjectId("66f2b1c1...") ]</a:t>
+            </a:r>
+            <a:endParaRPr lang="en-US" sz="1800" dirty="0"/>
           </a:p>
           <a:p>
             <a:pPr indent="0" marL="0">
@@ -2945,7 +2949,7 @@
               <a:buNone/>
             </a:pPr>
             <a:r>
-              <a:rPr lang="en-US" sz="1300" dirty="0">
+              <a:rPr lang="en-US" sz="1400" dirty="0">
                 <a:solidFill>
                   <a:srgbClr val="E8EDF0"/>
                 </a:solidFill>
@@ -2953,29 +2957,9 @@
                 <a:ea typeface="Courier New" pitchFamily="34" charset="-122"/>
                 <a:cs typeface="Courier New" pitchFamily="34" charset="-120"/>
               </a:rPr>
-              <a:t>  enrolledCourseIds: [ ObjectId("66f2b1c0..."), ObjectId("66f2b1c1...") ]</a:t>
-            </a:r>
-            <a:endParaRPr lang="en-US" sz="1300" dirty="0"/>
-          </a:p>
-          <a:p>
-            <a:pPr indent="0" marL="0">
-              <a:lnSpc>
-                <a:spcPct val="128000"/>
-              </a:lnSpc>
-              <a:buNone/>
-            </a:pPr>
-            <a:r>
-              <a:rPr lang="en-US" sz="1300" dirty="0">
-                <a:solidFill>
-                  <a:srgbClr val="E8EDF0"/>
-                </a:solidFill>
-                <a:latin typeface="Courier New" pitchFamily="34" charset="0"/>
-                <a:ea typeface="Courier New" pitchFamily="34" charset="-122"/>
-                <a:cs typeface="Courier New" pitchFamily="34" charset="-120"/>
-              </a:rPr>
               <a:t>});</a:t>
             </a:r>
-            <a:endParaRPr lang="en-US" sz="1300" dirty="0"/>
+            <a:endParaRPr lang="en-US" sz="1800" dirty="0"/>
           </a:p>
         </p:txBody>
       </p:sp>
@@ -3058,7 +3042,7 @@
               <a:buNone/>
             </a:pPr>
             <a:r>
-              <a:rPr lang="en-US" sz="1050" b="1" spc="100" kern="0" dirty="0">
+              <a:rPr lang="en-US" sz="1200" b="1" spc="100" kern="0" dirty="0">
                 <a:solidFill>
                   <a:srgbClr val="2FE6C4"/>
                 </a:solidFill>
@@ -3068,7 +3052,7 @@
               </a:rPr>
               <a:t>EMBED FOR TOGETHER, REFERENCE FOR INDEPENDENT</a:t>
             </a:r>
-            <a:endParaRPr lang="en-US" sz="1050" dirty="0"/>
+            <a:endParaRPr lang="en-US" sz="1200" dirty="0"/>
           </a:p>
         </p:txBody>
       </p:sp>
@@ -3249,7 +3233,7 @@
               <a:buNone/>
             </a:pPr>
             <a:r>
-              <a:rPr lang="en-US" sz="1000" u="sng" dirty="0">
+              <a:rPr lang="en-US" sz="1200" u="sng" dirty="0">
                 <a:solidFill>
                   <a:srgbClr val="8A939B"/>
                 </a:solidFill>
@@ -3270,7 +3254,7 @@
               <a:buNone/>
             </a:pPr>
             <a:r>
-              <a:rPr lang="en-US" sz="1000" dirty="0">
+              <a:rPr lang="en-US" sz="1200" dirty="0">
                 <a:solidFill>
                   <a:srgbClr val="8A939B"/>
                 </a:solidFill>
@@ -3278,9 +3262,9 @@
                 <a:ea typeface="Calibri" pitchFamily="34" charset="-122"/>
                 <a:cs typeface="Calibri" pitchFamily="34" charset="-120"/>
               </a:rPr>
-              <a:t>  ·  11</a:t>
-            </a:r>
-            <a:endParaRPr lang="en-US" sz="1000" dirty="0"/>
+              <a:t>  ·  12</a:t>
+            </a:r>
+            <a:endParaRPr lang="en-US" sz="1200" dirty="0"/>
           </a:p>
         </p:txBody>
       </p:sp>
@@ -3403,7 +3387,7 @@
               <a:buNone/>
             </a:pPr>
             <a:r>
-              <a:rPr lang="en-US" sz="1000" dirty="0">
+              <a:rPr lang="en-US" sz="1200" dirty="0">
                 <a:solidFill>
                   <a:srgbClr val="8A939B"/>
                 </a:solidFill>
@@ -3413,7 +3397,7 @@
               </a:rPr>
               <a:t>mongosh</a:t>
             </a:r>
-            <a:endParaRPr lang="en-US" sz="1000" dirty="0"/>
+            <a:endParaRPr lang="en-US" sz="1200" dirty="0"/>
           </a:p>
         </p:txBody>
       </p:sp>
@@ -3445,7 +3429,7 @@
               <a:buNone/>
             </a:pPr>
             <a:r>
-              <a:rPr lang="en-US" sz="1300" dirty="0">
+              <a:rPr lang="en-US" sz="1400" dirty="0">
                 <a:solidFill>
                   <a:srgbClr val="E8EDF0"/>
                 </a:solidFill>
@@ -3455,7 +3439,7 @@
               </a:rPr>
               <a:t>db.students.insertOne({</a:t>
             </a:r>
-            <a:endParaRPr lang="en-US" sz="1300" dirty="0"/>
+            <a:endParaRPr lang="en-US" sz="1800" dirty="0"/>
           </a:p>
           <a:p>
             <a:pPr indent="0" marL="0">
@@ -3465,7 +3449,7 @@
               <a:buNone/>
             </a:pPr>
             <a:r>
-              <a:rPr lang="en-US" sz="1300" dirty="0">
+              <a:rPr lang="en-US" sz="1400" dirty="0">
                 <a:solidFill>
                   <a:srgbClr val="E8EDF0"/>
                 </a:solidFill>
@@ -3475,7 +3459,7 @@
               </a:rPr>
               <a:t>  regNo: "FA21-BCS-046",</a:t>
             </a:r>
-            <a:endParaRPr lang="en-US" sz="1300" dirty="0"/>
+            <a:endParaRPr lang="en-US" sz="1800" dirty="0"/>
           </a:p>
           <a:p>
             <a:pPr indent="0" marL="0">
@@ -3485,7 +3469,7 @@
               <a:buNone/>
             </a:pPr>
             <a:r>
-              <a:rPr lang="en-US" sz="1300" dirty="0">
+              <a:rPr lang="en-US" sz="1400" dirty="0">
                 <a:solidFill>
                   <a:srgbClr val="E8EDF0"/>
                 </a:solidFill>
@@ -3495,7 +3479,7 @@
               </a:rPr>
               <a:t>  name: "Bilal Ahmed",</a:t>
             </a:r>
-            <a:endParaRPr lang="en-US" sz="1300" dirty="0"/>
+            <a:endParaRPr lang="en-US" sz="1800" dirty="0"/>
           </a:p>
           <a:p>
             <a:pPr indent="0" marL="0">
@@ -3505,7 +3489,7 @@
               <a:buNone/>
             </a:pPr>
             <a:r>
-              <a:rPr lang="en-US" sz="1300" dirty="0">
+              <a:rPr lang="en-US" sz="1400" dirty="0">
                 <a:solidFill>
                   <a:srgbClr val="E8EDF0"/>
                 </a:solidFill>
@@ -3515,7 +3499,7 @@
               </a:rPr>
               <a:t>  gpa: 3.15,</a:t>
             </a:r>
-            <a:endParaRPr lang="en-US" sz="1300" dirty="0"/>
+            <a:endParaRPr lang="en-US" sz="1800" dirty="0"/>
           </a:p>
           <a:p>
             <a:pPr indent="0" marL="0">
@@ -3525,7 +3509,7 @@
               <a:buNone/>
             </a:pPr>
             <a:r>
-              <a:rPr lang="en-US" sz="1300" dirty="0">
+              <a:rPr lang="en-US" sz="1400" dirty="0">
                 <a:solidFill>
                   <a:srgbClr val="E8EDF0"/>
                 </a:solidFill>
@@ -3535,7 +3519,7 @@
               </a:rPr>
               <a:t>  department: "Computer Science",</a:t>
             </a:r>
-            <a:endParaRPr lang="en-US" sz="1300" dirty="0"/>
+            <a:endParaRPr lang="en-US" sz="1800" dirty="0"/>
           </a:p>
           <a:p>
             <a:pPr indent="0" marL="0">
@@ -3545,7 +3529,7 @@
               <a:buNone/>
             </a:pPr>
             <a:r>
-              <a:rPr lang="en-US" sz="1300" dirty="0">
+              <a:rPr lang="en-US" sz="1400" dirty="0">
                 <a:solidFill>
                   <a:srgbClr val="E8EDF0"/>
                 </a:solidFill>
@@ -3555,7 +3539,7 @@
               </a:rPr>
               <a:t>  isActive: true</a:t>
             </a:r>
-            <a:endParaRPr lang="en-US" sz="1300" dirty="0"/>
+            <a:endParaRPr lang="en-US" sz="1800" dirty="0"/>
           </a:p>
           <a:p>
             <a:pPr indent="0" marL="0">
@@ -3565,7 +3549,7 @@
               <a:buNone/>
             </a:pPr>
             <a:r>
-              <a:rPr lang="en-US" sz="1300" dirty="0">
+              <a:rPr lang="en-US" sz="1400" dirty="0">
                 <a:solidFill>
                   <a:srgbClr val="E8EDF0"/>
                 </a:solidFill>
@@ -3575,7 +3559,7 @@
               </a:rPr>
               <a:t>});</a:t>
             </a:r>
-            <a:endParaRPr lang="en-US" sz="1300" dirty="0"/>
+            <a:endParaRPr lang="en-US" sz="1800" dirty="0"/>
           </a:p>
           <a:p>
             <a:pPr indent="0" marL="0">
@@ -3585,7 +3569,7 @@
               <a:buNone/>
             </a:pPr>
             <a:r>
-              <a:rPr lang="en-US" sz="1300" dirty="0">
+              <a:rPr lang="en-US" sz="1400" dirty="0">
                 <a:solidFill>
                   <a:srgbClr val="E8EDF0"/>
                 </a:solidFill>
@@ -3595,7 +3579,7 @@
               </a:rPr>
               <a:t> </a:t>
             </a:r>
-            <a:endParaRPr lang="en-US" sz="1300" dirty="0"/>
+            <a:endParaRPr lang="en-US" sz="1800" dirty="0"/>
           </a:p>
           <a:p>
             <a:pPr indent="0" marL="0">
@@ -3605,7 +3589,7 @@
               <a:buNone/>
             </a:pPr>
             <a:r>
-              <a:rPr lang="en-US" sz="1300" dirty="0">
+              <a:rPr lang="en-US" sz="1400" dirty="0">
                 <a:solidFill>
                   <a:srgbClr val="E8EDF0"/>
                 </a:solidFill>
@@ -3615,7 +3599,7 @@
               </a:rPr>
               <a:t>db.students.insertMany([</a:t>
             </a:r>
-            <a:endParaRPr lang="en-US" sz="1300" dirty="0"/>
+            <a:endParaRPr lang="en-US" sz="1800" dirty="0"/>
           </a:p>
           <a:p>
             <a:pPr indent="0" marL="0">
@@ -3625,7 +3609,7 @@
               <a:buNone/>
             </a:pPr>
             <a:r>
-              <a:rPr lang="en-US" sz="1300" dirty="0">
+              <a:rPr lang="en-US" sz="1400" dirty="0">
                 <a:solidFill>
                   <a:srgbClr val="E8EDF0"/>
                 </a:solidFill>
@@ -3635,7 +3619,7 @@
               </a:rPr>
               <a:t>  { regNo: "FA21-BCS-047", name: "Sara Malik", gpa: 3.90,</a:t>
             </a:r>
-            <a:endParaRPr lang="en-US" sz="1300" dirty="0"/>
+            <a:endParaRPr lang="en-US" sz="1800" dirty="0"/>
           </a:p>
           <a:p>
             <a:pPr indent="0" marL="0">
@@ -3645,7 +3629,7 @@
               <a:buNone/>
             </a:pPr>
             <a:r>
-              <a:rPr lang="en-US" sz="1300" dirty="0">
+              <a:rPr lang="en-US" sz="1400" dirty="0">
                 <a:solidFill>
                   <a:srgbClr val="E8EDF0"/>
                 </a:solidFill>
@@ -3655,7 +3639,7 @@
               </a:rPr>
               <a:t>    department: "Software Engineering", isActive: true },</a:t>
             </a:r>
-            <a:endParaRPr lang="en-US" sz="1300" dirty="0"/>
+            <a:endParaRPr lang="en-US" sz="1800" dirty="0"/>
           </a:p>
           <a:p>
             <a:pPr indent="0" marL="0">
@@ -3665,7 +3649,7 @@
               <a:buNone/>
             </a:pPr>
             <a:r>
-              <a:rPr lang="en-US" sz="1300" dirty="0">
+              <a:rPr lang="en-US" sz="1400" dirty="0">
                 <a:solidFill>
                   <a:srgbClr val="E8EDF0"/>
                 </a:solidFill>
@@ -3675,7 +3659,7 @@
               </a:rPr>
               <a:t>  { regNo: "FA21-BCS-048", name: "Hamza Tariq", gpa: 2.85,</a:t>
             </a:r>
-            <a:endParaRPr lang="en-US" sz="1300" dirty="0"/>
+            <a:endParaRPr lang="en-US" sz="1800" dirty="0"/>
           </a:p>
           <a:p>
             <a:pPr indent="0" marL="0">
@@ -3685,7 +3669,7 @@
               <a:buNone/>
             </a:pPr>
             <a:r>
-              <a:rPr lang="en-US" sz="1300" dirty="0">
+              <a:rPr lang="en-US" sz="1400" dirty="0">
                 <a:solidFill>
                   <a:srgbClr val="E8EDF0"/>
                 </a:solidFill>
@@ -3695,7 +3679,7 @@
               </a:rPr>
               <a:t>    department: "Computer Science", isActive: false }</a:t>
             </a:r>
-            <a:endParaRPr lang="en-US" sz="1300" dirty="0"/>
+            <a:endParaRPr lang="en-US" sz="1800" dirty="0"/>
           </a:p>
           <a:p>
             <a:pPr indent="0" marL="0">
@@ -3705,7 +3689,7 @@
               <a:buNone/>
             </a:pPr>
             <a:r>
-              <a:rPr lang="en-US" sz="1300" dirty="0">
+              <a:rPr lang="en-US" sz="1400" dirty="0">
                 <a:solidFill>
                   <a:srgbClr val="E8EDF0"/>
                 </a:solidFill>
@@ -3715,7 +3699,7 @@
               </a:rPr>
               <a:t>]);</a:t>
             </a:r>
-            <a:endParaRPr lang="en-US" sz="1300" dirty="0"/>
+            <a:endParaRPr lang="en-US" sz="1800" dirty="0"/>
           </a:p>
         </p:txBody>
       </p:sp>
@@ -3854,7 +3838,7 @@
               <a:buNone/>
             </a:pPr>
             <a:r>
-              <a:rPr lang="en-US" sz="1000" u="sng" dirty="0">
+              <a:rPr lang="en-US" sz="1200" u="sng" dirty="0">
                 <a:solidFill>
                   <a:srgbClr val="8A939B"/>
                 </a:solidFill>
@@ -3875,7 +3859,7 @@
               <a:buNone/>
             </a:pPr>
             <a:r>
-              <a:rPr lang="en-US" sz="1000" dirty="0">
+              <a:rPr lang="en-US" sz="1200" dirty="0">
                 <a:solidFill>
                   <a:srgbClr val="8A939B"/>
                 </a:solidFill>
@@ -3883,9 +3867,9 @@
                 <a:ea typeface="Calibri" pitchFamily="34" charset="-122"/>
                 <a:cs typeface="Calibri" pitchFamily="34" charset="-120"/>
               </a:rPr>
-              <a:t>  ·  12</a:t>
-            </a:r>
-            <a:endParaRPr lang="en-US" sz="1000" dirty="0"/>
+              <a:t>  ·  13</a:t>
+            </a:r>
+            <a:endParaRPr lang="en-US" sz="1200" dirty="0"/>
           </a:p>
         </p:txBody>
       </p:sp>
@@ -4008,7 +3992,7 @@
               <a:buNone/>
             </a:pPr>
             <a:r>
-              <a:rPr lang="en-US" sz="1000" dirty="0">
+              <a:rPr lang="en-US" sz="1200" dirty="0">
                 <a:solidFill>
                   <a:srgbClr val="8A939B"/>
                 </a:solidFill>
@@ -4018,7 +4002,7 @@
               </a:rPr>
               <a:t>mongosh</a:t>
             </a:r>
-            <a:endParaRPr lang="en-US" sz="1000" dirty="0"/>
+            <a:endParaRPr lang="en-US" sz="1200" dirty="0"/>
           </a:p>
         </p:txBody>
       </p:sp>
@@ -4050,7 +4034,7 @@
               <a:buNone/>
             </a:pPr>
             <a:r>
-              <a:rPr lang="en-US" sz="1300" dirty="0">
+              <a:rPr lang="en-US" sz="1400" dirty="0">
                 <a:solidFill>
                   <a:srgbClr val="7C8792"/>
                 </a:solidFill>
@@ -4060,7 +4044,7 @@
               </a:rPr>
               <a:t>// Every document in the collection</a:t>
             </a:r>
-            <a:endParaRPr lang="en-US" sz="1300" dirty="0"/>
+            <a:endParaRPr lang="en-US" sz="1800" dirty="0"/>
           </a:p>
           <a:p>
             <a:pPr indent="0" marL="0">
@@ -4070,7 +4054,7 @@
               <a:buNone/>
             </a:pPr>
             <a:r>
-              <a:rPr lang="en-US" sz="1300" dirty="0">
+              <a:rPr lang="en-US" sz="1400" dirty="0">
                 <a:solidFill>
                   <a:srgbClr val="E8EDF0"/>
                 </a:solidFill>
@@ -4080,7 +4064,7 @@
               </a:rPr>
               <a:t>db.students.find();</a:t>
             </a:r>
-            <a:endParaRPr lang="en-US" sz="1300" dirty="0"/>
+            <a:endParaRPr lang="en-US" sz="1800" dirty="0"/>
           </a:p>
           <a:p>
             <a:pPr indent="0" marL="0">
@@ -4090,7 +4074,7 @@
               <a:buNone/>
             </a:pPr>
             <a:r>
-              <a:rPr lang="en-US" sz="1300" dirty="0">
+              <a:rPr lang="en-US" sz="1400" dirty="0">
                 <a:solidFill>
                   <a:srgbClr val="E8EDF0"/>
                 </a:solidFill>
@@ -4100,7 +4084,7 @@
               </a:rPr>
               <a:t> </a:t>
             </a:r>
-            <a:endParaRPr lang="en-US" sz="1300" dirty="0"/>
+            <a:endParaRPr lang="en-US" sz="1800" dirty="0"/>
           </a:p>
           <a:p>
             <a:pPr indent="0" marL="0">
@@ -4110,7 +4094,7 @@
               <a:buNone/>
             </a:pPr>
             <a:r>
-              <a:rPr lang="en-US" sz="1300" dirty="0">
+              <a:rPr lang="en-US" sz="1400" dirty="0">
                 <a:solidFill>
                   <a:srgbClr val="7C8792"/>
                 </a:solidFill>
@@ -4120,7 +4104,7 @@
               </a:rPr>
               <a:t>// Documents matching an exact value</a:t>
             </a:r>
-            <a:endParaRPr lang="en-US" sz="1300" dirty="0"/>
+            <a:endParaRPr lang="en-US" sz="1800" dirty="0"/>
           </a:p>
           <a:p>
             <a:pPr indent="0" marL="0">
@@ -4130,7 +4114,7 @@
               <a:buNone/>
             </a:pPr>
             <a:r>
-              <a:rPr lang="en-US" sz="1300" dirty="0">
+              <a:rPr lang="en-US" sz="1400" dirty="0">
                 <a:solidFill>
                   <a:srgbClr val="E8EDF0"/>
                 </a:solidFill>
@@ -4140,7 +4124,7 @@
               </a:rPr>
               <a:t>db.students.find({ department: "Computer Science" });</a:t>
             </a:r>
-            <a:endParaRPr lang="en-US" sz="1300" dirty="0"/>
+            <a:endParaRPr lang="en-US" sz="1800" dirty="0"/>
           </a:p>
           <a:p>
             <a:pPr indent="0" marL="0">
@@ -4150,7 +4134,7 @@
               <a:buNone/>
             </a:pPr>
             <a:r>
-              <a:rPr lang="en-US" sz="1300" dirty="0">
+              <a:rPr lang="en-US" sz="1400" dirty="0">
                 <a:solidFill>
                   <a:srgbClr val="E8EDF0"/>
                 </a:solidFill>
@@ -4160,7 +4144,7 @@
               </a:rPr>
               <a:t> </a:t>
             </a:r>
-            <a:endParaRPr lang="en-US" sz="1300" dirty="0"/>
+            <a:endParaRPr lang="en-US" sz="1800" dirty="0"/>
           </a:p>
           <a:p>
             <a:pPr indent="0" marL="0">
@@ -4170,7 +4154,7 @@
               <a:buNone/>
             </a:pPr>
             <a:r>
-              <a:rPr lang="en-US" sz="1300" dirty="0">
+              <a:rPr lang="en-US" sz="1400" dirty="0">
                 <a:solidFill>
                   <a:srgbClr val="7C8792"/>
                 </a:solidFill>
@@ -4180,7 +4164,7 @@
               </a:rPr>
               <a:t>// Just the first match</a:t>
             </a:r>
-            <a:endParaRPr lang="en-US" sz="1300" dirty="0"/>
+            <a:endParaRPr lang="en-US" sz="1800" dirty="0"/>
           </a:p>
           <a:p>
             <a:pPr indent="0" marL="0">
@@ -4190,7 +4174,7 @@
               <a:buNone/>
             </a:pPr>
             <a:r>
-              <a:rPr lang="en-US" sz="1300" dirty="0">
+              <a:rPr lang="en-US" sz="1400" dirty="0">
                 <a:solidFill>
                   <a:srgbClr val="E8EDF0"/>
                 </a:solidFill>
@@ -4200,7 +4184,7 @@
               </a:rPr>
               <a:t>db.students.findOne({ regNo: "FA21-BCS-045" });</a:t>
             </a:r>
-            <a:endParaRPr lang="en-US" sz="1300" dirty="0"/>
+            <a:endParaRPr lang="en-US" sz="1800" dirty="0"/>
           </a:p>
         </p:txBody>
       </p:sp>
@@ -4378,7 +4362,7 @@
               <a:buNone/>
             </a:pPr>
             <a:r>
-              <a:rPr lang="en-US" sz="1000" u="sng" dirty="0">
+              <a:rPr lang="en-US" sz="1200" u="sng" dirty="0">
                 <a:solidFill>
                   <a:srgbClr val="8A939B"/>
                 </a:solidFill>
@@ -4399,7 +4383,7 @@
               <a:buNone/>
             </a:pPr>
             <a:r>
-              <a:rPr lang="en-US" sz="1000" dirty="0">
+              <a:rPr lang="en-US" sz="1200" dirty="0">
                 <a:solidFill>
                   <a:srgbClr val="8A939B"/>
                 </a:solidFill>
@@ -4407,9 +4391,9 @@
                 <a:ea typeface="Calibri" pitchFamily="34" charset="-122"/>
                 <a:cs typeface="Calibri" pitchFamily="34" charset="-120"/>
               </a:rPr>
-              <a:t>  ·  13</a:t>
-            </a:r>
-            <a:endParaRPr lang="en-US" sz="1000" dirty="0"/>
+              <a:t>  ·  15</a:t>
+            </a:r>
+            <a:endParaRPr lang="en-US" sz="1200" dirty="0"/>
           </a:p>
         </p:txBody>
       </p:sp>
@@ -4532,7 +4516,7 @@
               <a:buNone/>
             </a:pPr>
             <a:r>
-              <a:rPr lang="en-US" sz="1000" dirty="0">
+              <a:rPr lang="en-US" sz="1200" dirty="0">
                 <a:solidFill>
                   <a:srgbClr val="8A939B"/>
                 </a:solidFill>
@@ -4542,7 +4526,7 @@
               </a:rPr>
               <a:t>mongosh</a:t>
             </a:r>
-            <a:endParaRPr lang="en-US" sz="1000" dirty="0"/>
+            <a:endParaRPr lang="en-US" sz="1200" dirty="0"/>
           </a:p>
         </p:txBody>
       </p:sp>
@@ -4574,7 +4558,7 @@
               <a:buNone/>
             </a:pPr>
             <a:r>
-              <a:rPr lang="en-US" sz="1300" dirty="0">
+              <a:rPr lang="en-US" sz="1400" dirty="0">
                 <a:solidFill>
                   <a:srgbClr val="E8EDF0"/>
                 </a:solidFill>
@@ -4584,7 +4568,7 @@
               </a:rPr>
               <a:t>db.students.updateOne(</a:t>
             </a:r>
-            <a:endParaRPr lang="en-US" sz="1300" dirty="0"/>
+            <a:endParaRPr lang="en-US" sz="1800" dirty="0"/>
           </a:p>
           <a:p>
             <a:pPr indent="0" marL="0">
@@ -4594,7 +4578,7 @@
               <a:buNone/>
             </a:pPr>
             <a:r>
-              <a:rPr lang="en-US" sz="1300" dirty="0">
+              <a:rPr lang="en-US" sz="1400" dirty="0">
                 <a:solidFill>
                   <a:srgbClr val="E8EDF0"/>
                 </a:solidFill>
@@ -4604,7 +4588,7 @@
               </a:rPr>
               <a:t>  { regNo: "FA21-BCS-045" },</a:t>
             </a:r>
-            <a:endParaRPr lang="en-US" sz="1300" dirty="0"/>
+            <a:endParaRPr lang="en-US" sz="1800" dirty="0"/>
           </a:p>
           <a:p>
             <a:pPr indent="0" marL="0">
@@ -4614,7 +4598,7 @@
               <a:buNone/>
             </a:pPr>
             <a:r>
-              <a:rPr lang="en-US" sz="1300" dirty="0">
+              <a:rPr lang="en-US" sz="1400" dirty="0">
                 <a:solidFill>
                   <a:srgbClr val="E8EDF0"/>
                 </a:solidFill>
@@ -4624,7 +4608,7 @@
               </a:rPr>
               <a:t>  { $set: { gpa: 3.80 } }</a:t>
             </a:r>
-            <a:endParaRPr lang="en-US" sz="1300" dirty="0"/>
+            <a:endParaRPr lang="en-US" sz="1800" dirty="0"/>
           </a:p>
           <a:p>
             <a:pPr indent="0" marL="0">
@@ -4634,7 +4618,7 @@
               <a:buNone/>
             </a:pPr>
             <a:r>
-              <a:rPr lang="en-US" sz="1300" dirty="0">
+              <a:rPr lang="en-US" sz="1400" dirty="0">
                 <a:solidFill>
                   <a:srgbClr val="E8EDF0"/>
                 </a:solidFill>
@@ -4644,7 +4628,7 @@
               </a:rPr>
               <a:t>);</a:t>
             </a:r>
-            <a:endParaRPr lang="en-US" sz="1300" dirty="0"/>
+            <a:endParaRPr lang="en-US" sz="1800" dirty="0"/>
           </a:p>
           <a:p>
             <a:pPr indent="0" marL="0">
@@ -4654,7 +4638,7 @@
               <a:buNone/>
             </a:pPr>
             <a:r>
-              <a:rPr lang="en-US" sz="1300" dirty="0">
+              <a:rPr lang="en-US" sz="1400" dirty="0">
                 <a:solidFill>
                   <a:srgbClr val="E8EDF0"/>
                 </a:solidFill>
@@ -4664,7 +4648,7 @@
               </a:rPr>
               <a:t> </a:t>
             </a:r>
-            <a:endParaRPr lang="en-US" sz="1300" dirty="0"/>
+            <a:endParaRPr lang="en-US" sz="1800" dirty="0"/>
           </a:p>
           <a:p>
             <a:pPr indent="0" marL="0">
@@ -4674,7 +4658,7 @@
               <a:buNone/>
             </a:pPr>
             <a:r>
-              <a:rPr lang="en-US" sz="1300" dirty="0">
+              <a:rPr lang="en-US" sz="1400" dirty="0">
                 <a:solidFill>
                   <a:srgbClr val="E8EDF0"/>
                 </a:solidFill>
@@ -4684,7 +4668,7 @@
               </a:rPr>
               <a:t>db.students.deleteOne({ regNo: "FA21-BCS-048" });</a:t>
             </a:r>
-            <a:endParaRPr lang="en-US" sz="1300" dirty="0"/>
+            <a:endParaRPr lang="en-US" sz="1800" dirty="0"/>
           </a:p>
           <a:p>
             <a:pPr indent="0" marL="0">
@@ -4694,7 +4678,7 @@
               <a:buNone/>
             </a:pPr>
             <a:r>
-              <a:rPr lang="en-US" sz="1300" dirty="0">
+              <a:rPr lang="en-US" sz="1400" dirty="0">
                 <a:solidFill>
                   <a:srgbClr val="E8EDF0"/>
                 </a:solidFill>
@@ -4704,7 +4688,7 @@
               </a:rPr>
               <a:t>db.students.deleteMany({ isActive: false });</a:t>
             </a:r>
-            <a:endParaRPr lang="en-US" sz="1300" dirty="0"/>
+            <a:endParaRPr lang="en-US" sz="1800" dirty="0"/>
           </a:p>
         </p:txBody>
       </p:sp>
@@ -4787,7 +4771,7 @@
               <a:buNone/>
             </a:pPr>
             <a:r>
-              <a:rPr lang="en-US" sz="1050" b="1" spc="100" kern="0" dirty="0">
+              <a:rPr lang="en-US" sz="1200" b="1" spc="100" kern="0" dirty="0">
                 <a:solidFill>
                   <a:srgbClr val="E8A33D"/>
                 </a:solidFill>
@@ -4797,7 +4781,7 @@
               </a:rPr>
               <a:t>UPDATEONE/DELETEONE WITHOUT A UNIQUE FILTER IS A SILENT TRAP</a:t>
             </a:r>
-            <a:endParaRPr lang="en-US" sz="1050" dirty="0"/>
+            <a:endParaRPr lang="en-US" sz="1200" dirty="0"/>
           </a:p>
         </p:txBody>
       </p:sp>
@@ -4978,7 +4962,7 @@
               <a:buNone/>
             </a:pPr>
             <a:r>
-              <a:rPr lang="en-US" sz="1000" u="sng" dirty="0">
+              <a:rPr lang="en-US" sz="1200" u="sng" dirty="0">
                 <a:solidFill>
                   <a:srgbClr val="8A939B"/>
                 </a:solidFill>
@@ -4999,7 +4983,7 @@
               <a:buNone/>
             </a:pPr>
             <a:r>
-              <a:rPr lang="en-US" sz="1000" dirty="0">
+              <a:rPr lang="en-US" sz="1200" dirty="0">
                 <a:solidFill>
                   <a:srgbClr val="8A939B"/>
                 </a:solidFill>
@@ -5007,9 +4991,9 @@
                 <a:ea typeface="Calibri" pitchFamily="34" charset="-122"/>
                 <a:cs typeface="Calibri" pitchFamily="34" charset="-120"/>
               </a:rPr>
-              <a:t>  ·  14</a:t>
-            </a:r>
-            <a:endParaRPr lang="en-US" sz="1000" dirty="0"/>
+              <a:t>  ·  17</a:t>
+            </a:r>
+            <a:endParaRPr lang="en-US" sz="1200" dirty="0"/>
           </a:p>
         </p:txBody>
       </p:sp>
@@ -5132,7 +5116,7 @@
               <a:buNone/>
             </a:pPr>
             <a:r>
-              <a:rPr lang="en-US" sz="1000" dirty="0">
+              <a:rPr lang="en-US" sz="1200" dirty="0">
                 <a:solidFill>
                   <a:srgbClr val="8A939B"/>
                 </a:solidFill>
@@ -5142,7 +5126,7 @@
               </a:rPr>
               <a:t>mongosh</a:t>
             </a:r>
-            <a:endParaRPr lang="en-US" sz="1000" dirty="0"/>
+            <a:endParaRPr lang="en-US" sz="1200" dirty="0"/>
           </a:p>
         </p:txBody>
       </p:sp>
@@ -5174,7 +5158,7 @@
               <a:buNone/>
             </a:pPr>
             <a:r>
-              <a:rPr lang="en-US" sz="1100" dirty="0">
+              <a:rPr lang="en-US" sz="1400" dirty="0">
                 <a:solidFill>
                   <a:srgbClr val="7C8792"/>
                 </a:solidFill>
@@ -5184,7 +5168,7 @@
               </a:rPr>
               <a:t>// $gt: greater than</a:t>
             </a:r>
-            <a:endParaRPr lang="en-US" sz="1100" dirty="0"/>
+            <a:endParaRPr lang="en-US" sz="1200" dirty="0"/>
           </a:p>
           <a:p>
             <a:pPr indent="0" marL="0">
@@ -5194,7 +5178,7 @@
               <a:buNone/>
             </a:pPr>
             <a:r>
-              <a:rPr lang="en-US" sz="1100" dirty="0">
+              <a:rPr lang="en-US" sz="1400" dirty="0">
                 <a:solidFill>
                   <a:srgbClr val="E8EDF0"/>
                 </a:solidFill>
@@ -5204,7 +5188,7 @@
               </a:rPr>
               <a:t>db.students.find({ gpa: { $gt: 3.5 } });</a:t>
             </a:r>
-            <a:endParaRPr lang="en-US" sz="1100" dirty="0"/>
+            <a:endParaRPr lang="en-US" sz="1200" dirty="0"/>
           </a:p>
           <a:p>
             <a:pPr indent="0" marL="0">
@@ -5214,7 +5198,7 @@
               <a:buNone/>
             </a:pPr>
             <a:r>
-              <a:rPr lang="en-US" sz="1100" dirty="0">
+              <a:rPr lang="en-US" sz="1400" dirty="0">
                 <a:solidFill>
                   <a:srgbClr val="E8EDF0"/>
                 </a:solidFill>
@@ -5224,7 +5208,7 @@
               </a:rPr>
               <a:t> </a:t>
             </a:r>
-            <a:endParaRPr lang="en-US" sz="1100" dirty="0"/>
+            <a:endParaRPr lang="en-US" sz="1200" dirty="0"/>
           </a:p>
           <a:p>
             <a:pPr indent="0" marL="0">
@@ -5234,7 +5218,7 @@
               <a:buNone/>
             </a:pPr>
             <a:r>
-              <a:rPr lang="en-US" sz="1100" dirty="0">
+              <a:rPr lang="en-US" sz="1400" dirty="0">
                 <a:solidFill>
                   <a:srgbClr val="7C8792"/>
                 </a:solidFill>
@@ -5244,7 +5228,7 @@
               </a:rPr>
               <a:t>// $in: value is one of a given set</a:t>
             </a:r>
-            <a:endParaRPr lang="en-US" sz="1100" dirty="0"/>
+            <a:endParaRPr lang="en-US" sz="1200" dirty="0"/>
           </a:p>
           <a:p>
             <a:pPr indent="0" marL="0">
@@ -5254,7 +5238,7 @@
               <a:buNone/>
             </a:pPr>
             <a:r>
-              <a:rPr lang="en-US" sz="1100" dirty="0">
+              <a:rPr lang="en-US" sz="1400" dirty="0">
                 <a:solidFill>
                   <a:srgbClr val="E8EDF0"/>
                 </a:solidFill>
@@ -5262,109 +5246,9 @@
                 <a:ea typeface="Courier New" pitchFamily="34" charset="-122"/>
                 <a:cs typeface="Courier New" pitchFamily="34" charset="-120"/>
               </a:rPr>
-              <a:t>db.students.find({ department:</a:t>
-            </a:r>
-            <a:endParaRPr lang="en-US" sz="1100" dirty="0"/>
-          </a:p>
-          <a:p>
-            <a:pPr indent="0" marL="0">
-              <a:lnSpc>
-                <a:spcPct val="128000"/>
-              </a:lnSpc>
-              <a:buNone/>
-            </a:pPr>
-            <a:r>
-              <a:rPr lang="en-US" sz="1100" dirty="0">
-                <a:solidFill>
-                  <a:srgbClr val="E8EDF0"/>
-                </a:solidFill>
-                <a:latin typeface="Courier New" pitchFamily="34" charset="0"/>
-                <a:ea typeface="Courier New" pitchFamily="34" charset="-122"/>
-                <a:cs typeface="Courier New" pitchFamily="34" charset="-120"/>
-              </a:rPr>
-              <a:t>  { $in: ["Computer Science", "Software Engineering"] } });</a:t>
-            </a:r>
-            <a:endParaRPr lang="en-US" sz="1100" dirty="0"/>
-          </a:p>
-          <a:p>
-            <a:pPr indent="0" marL="0">
-              <a:lnSpc>
-                <a:spcPct val="128000"/>
-              </a:lnSpc>
-              <a:buNone/>
-            </a:pPr>
-            <a:r>
-              <a:rPr lang="en-US" sz="1100" dirty="0">
-                <a:solidFill>
-                  <a:srgbClr val="E8EDF0"/>
-                </a:solidFill>
-                <a:latin typeface="Courier New" pitchFamily="34" charset="0"/>
-                <a:ea typeface="Courier New" pitchFamily="34" charset="-122"/>
-                <a:cs typeface="Courier New" pitchFamily="34" charset="-120"/>
-              </a:rPr>
-              <a:t> </a:t>
-            </a:r>
-            <a:endParaRPr lang="en-US" sz="1100" dirty="0"/>
-          </a:p>
-          <a:p>
-            <a:pPr indent="0" marL="0">
-              <a:lnSpc>
-                <a:spcPct val="128000"/>
-              </a:lnSpc>
-              <a:buNone/>
-            </a:pPr>
-            <a:r>
-              <a:rPr lang="en-US" sz="1100" dirty="0">
-                <a:solidFill>
-                  <a:srgbClr val="7C8792"/>
-                </a:solidFill>
-                <a:latin typeface="Courier New" pitchFamily="34" charset="0"/>
-                <a:ea typeface="Courier New" pitchFamily="34" charset="-122"/>
-                <a:cs typeface="Courier New" pitchFamily="34" charset="-120"/>
-              </a:rPr>
-              <a:t>// $and: every condition must hold</a:t>
-            </a:r>
-            <a:endParaRPr lang="en-US" sz="1100" dirty="0"/>
-          </a:p>
-          <a:p>
-            <a:pPr indent="0" marL="0">
-              <a:lnSpc>
-                <a:spcPct val="128000"/>
-              </a:lnSpc>
-              <a:buNone/>
-            </a:pPr>
-            <a:r>
-              <a:rPr lang="en-US" sz="1100" dirty="0">
-                <a:solidFill>
-                  <a:srgbClr val="E8EDF0"/>
-                </a:solidFill>
-                <a:latin typeface="Courier New" pitchFamily="34" charset="0"/>
-                <a:ea typeface="Courier New" pitchFamily="34" charset="-122"/>
-                <a:cs typeface="Courier New" pitchFamily="34" charset="-120"/>
-              </a:rPr>
-              <a:t>db.students.find({ $and: [</a:t>
-            </a:r>
-            <a:endParaRPr lang="en-US" sz="1100" dirty="0"/>
-          </a:p>
-          <a:p>
-            <a:pPr indent="0" marL="0">
-              <a:lnSpc>
-                <a:spcPct val="128000"/>
-              </a:lnSpc>
-              <a:buNone/>
-            </a:pPr>
-            <a:r>
-              <a:rPr lang="en-US" sz="1100" dirty="0">
-                <a:solidFill>
-                  <a:srgbClr val="E8EDF0"/>
-                </a:solidFill>
-                <a:latin typeface="Courier New" pitchFamily="34" charset="0"/>
-                <a:ea typeface="Courier New" pitchFamily="34" charset="-122"/>
-                <a:cs typeface="Courier New" pitchFamily="34" charset="-120"/>
-              </a:rPr>
-              <a:t>  { gpa: { $gte: 3.0 } }, { isActive: true } ] });</a:t>
-            </a:r>
-            <a:endParaRPr lang="en-US" sz="1100" dirty="0"/>
+              <a:t>db.students.find({ gpa: { $in: [3.5, 3.9] } });</a:t>
+            </a:r>
+            <a:endParaRPr lang="en-US" sz="1200" dirty="0"/>
           </a:p>
         </p:txBody>
       </p:sp>
@@ -5405,7 +5289,7 @@
                         <a:buNone/>
                       </a:pPr>
                       <a:r>
-                        <a:rPr lang="en-US" sz="1050" b="1" dirty="0">
+                        <a:rPr lang="en-US" sz="1400" b="1" dirty="0">
                           <a:solidFill>
                             <a:srgbClr val="FFFFFF"/>
                           </a:solidFill>
@@ -5415,7 +5299,7 @@
                         </a:rPr>
                         <a:t>Operator</a:t>
                       </a:r>
-                      <a:endParaRPr lang="en-US" sz="1050" dirty="0">
+                      <a:endParaRPr lang="en-US" sz="1400" dirty="0">
                         <a:latin typeface="Calibri" charset="0"/>
                         <a:ea typeface="Calibri" charset="0"/>
                         <a:cs typeface="Calibri" charset="0"/>
@@ -5473,7 +5357,7 @@
                         <a:buNone/>
                       </a:pPr>
                       <a:r>
-                        <a:rPr lang="en-US" sz="1050" b="1" dirty="0">
+                        <a:rPr lang="en-US" sz="1400" b="1" dirty="0">
                           <a:solidFill>
                             <a:srgbClr val="FFFFFF"/>
                           </a:solidFill>
@@ -5483,7 +5367,7 @@
                         </a:rPr>
                         <a:t>Meaning</a:t>
                       </a:r>
-                      <a:endParaRPr lang="en-US" sz="1050" dirty="0">
+                      <a:endParaRPr lang="en-US" sz="1400" dirty="0">
                         <a:latin typeface="Calibri" charset="0"/>
                         <a:ea typeface="Calibri" charset="0"/>
                         <a:cs typeface="Calibri" charset="0"/>
@@ -5541,7 +5425,7 @@
                         <a:buNone/>
                       </a:pPr>
                       <a:r>
-                        <a:rPr lang="en-US" sz="1050" b="1" dirty="0">
+                        <a:rPr lang="en-US" sz="1400" b="1" dirty="0">
                           <a:solidFill>
                             <a:srgbClr val="FFFFFF"/>
                           </a:solidFill>
@@ -5551,7 +5435,7 @@
                         </a:rPr>
                         <a:t>SQL equivalent</a:t>
                       </a:r>
-                      <a:endParaRPr lang="en-US" sz="1050" dirty="0">
+                      <a:endParaRPr lang="en-US" sz="1400" dirty="0">
                         <a:latin typeface="Calibri" charset="0"/>
                         <a:ea typeface="Calibri" charset="0"/>
                         <a:cs typeface="Calibri" charset="0"/>
@@ -5611,7 +5495,7 @@
                         <a:buNone/>
                       </a:pPr>
                       <a:r>
-                        <a:rPr lang="en-US" sz="1050" dirty="0">
+                        <a:rPr lang="en-US" sz="1400" dirty="0">
                           <a:solidFill>
                             <a:srgbClr val="1F2429"/>
                           </a:solidFill>
@@ -5621,7 +5505,7 @@
                         </a:rPr>
                         <a:t>$eq</a:t>
                       </a:r>
-                      <a:endParaRPr lang="en-US" sz="1050" dirty="0">
+                      <a:endParaRPr lang="en-US" sz="1400" dirty="0">
                         <a:latin typeface="Calibri" charset="0"/>
                         <a:ea typeface="Calibri" charset="0"/>
                         <a:cs typeface="Calibri" charset="0"/>
@@ -5679,7 +5563,7 @@
                         <a:buNone/>
                       </a:pPr>
                       <a:r>
-                        <a:rPr lang="en-US" sz="1050" dirty="0">
+                        <a:rPr lang="en-US" sz="1400" dirty="0">
                           <a:solidFill>
                             <a:srgbClr val="1F2429"/>
                           </a:solidFill>
@@ -5689,7 +5573,7 @@
                         </a:rPr>
                         <a:t>Equal to</a:t>
                       </a:r>
-                      <a:endParaRPr lang="en-US" sz="1050" dirty="0">
+                      <a:endParaRPr lang="en-US" sz="1400" dirty="0">
                         <a:latin typeface="Calibri" charset="0"/>
                         <a:ea typeface="Calibri" charset="0"/>
                         <a:cs typeface="Calibri" charset="0"/>
@@ -5747,7 +5631,7 @@
                         <a:buNone/>
                       </a:pPr>
                       <a:r>
-                        <a:rPr lang="en-US" sz="1050" dirty="0">
+                        <a:rPr lang="en-US" sz="1400" dirty="0">
                           <a:solidFill>
                             <a:srgbClr val="1F2429"/>
                           </a:solidFill>
@@ -5757,7 +5641,7 @@
                         </a:rPr>
                         <a:t>=</a:t>
                       </a:r>
-                      <a:endParaRPr lang="en-US" sz="1050" dirty="0">
+                      <a:endParaRPr lang="en-US" sz="1400" dirty="0">
                         <a:latin typeface="Calibri" charset="0"/>
                         <a:ea typeface="Calibri" charset="0"/>
                         <a:cs typeface="Calibri" charset="0"/>
@@ -5817,7 +5701,7 @@
                         <a:buNone/>
                       </a:pPr>
                       <a:r>
-                        <a:rPr lang="en-US" sz="1050" dirty="0">
+                        <a:rPr lang="en-US" sz="1400" dirty="0">
                           <a:solidFill>
                             <a:srgbClr val="1F2429"/>
                           </a:solidFill>
@@ -5827,7 +5711,7 @@
                         </a:rPr>
                         <a:t>$gt / $gte</a:t>
                       </a:r>
-                      <a:endParaRPr lang="en-US" sz="1050" dirty="0">
+                      <a:endParaRPr lang="en-US" sz="1400" dirty="0">
                         <a:latin typeface="Calibri" charset="0"/>
                         <a:ea typeface="Calibri" charset="0"/>
                         <a:cs typeface="Calibri" charset="0"/>
@@ -5885,7 +5769,7 @@
                         <a:buNone/>
                       </a:pPr>
                       <a:r>
-                        <a:rPr lang="en-US" sz="1050" dirty="0">
+                        <a:rPr lang="en-US" sz="1400" dirty="0">
                           <a:solidFill>
                             <a:srgbClr val="1F2429"/>
                           </a:solidFill>
@@ -5895,7 +5779,7 @@
                         </a:rPr>
                         <a:t>Greater than / or equal</a:t>
                       </a:r>
-                      <a:endParaRPr lang="en-US" sz="1050" dirty="0">
+                      <a:endParaRPr lang="en-US" sz="1400" dirty="0">
                         <a:latin typeface="Calibri" charset="0"/>
                         <a:ea typeface="Calibri" charset="0"/>
                         <a:cs typeface="Calibri" charset="0"/>
@@ -5953,7 +5837,7 @@
                         <a:buNone/>
                       </a:pPr>
                       <a:r>
-                        <a:rPr lang="en-US" sz="1050" dirty="0">
+                        <a:rPr lang="en-US" sz="1400" dirty="0">
                           <a:solidFill>
                             <a:srgbClr val="1F2429"/>
                           </a:solidFill>
@@ -5963,7 +5847,7 @@
                         </a:rPr>
                         <a:t>&gt; / &gt;=</a:t>
                       </a:r>
-                      <a:endParaRPr lang="en-US" sz="1050" dirty="0">
+                      <a:endParaRPr lang="en-US" sz="1400" dirty="0">
                         <a:latin typeface="Calibri" charset="0"/>
                         <a:ea typeface="Calibri" charset="0"/>
                         <a:cs typeface="Calibri" charset="0"/>
@@ -6023,7 +5907,7 @@
                         <a:buNone/>
                       </a:pPr>
                       <a:r>
-                        <a:rPr lang="en-US" sz="1050" dirty="0">
+                        <a:rPr lang="en-US" sz="1400" dirty="0">
                           <a:solidFill>
                             <a:srgbClr val="1F2429"/>
                           </a:solidFill>
@@ -6033,7 +5917,7 @@
                         </a:rPr>
                         <a:t>$lt / $lte</a:t>
                       </a:r>
-                      <a:endParaRPr lang="en-US" sz="1050" dirty="0">
+                      <a:endParaRPr lang="en-US" sz="1400" dirty="0">
                         <a:latin typeface="Calibri" charset="0"/>
                         <a:ea typeface="Calibri" charset="0"/>
                         <a:cs typeface="Calibri" charset="0"/>
@@ -6091,7 +5975,7 @@
                         <a:buNone/>
                       </a:pPr>
                       <a:r>
-                        <a:rPr lang="en-US" sz="1050" dirty="0">
+                        <a:rPr lang="en-US" sz="1400" dirty="0">
                           <a:solidFill>
                             <a:srgbClr val="1F2429"/>
                           </a:solidFill>
@@ -6101,7 +5985,7 @@
                         </a:rPr>
                         <a:t>Less than / or equal</a:t>
                       </a:r>
-                      <a:endParaRPr lang="en-US" sz="1050" dirty="0">
+                      <a:endParaRPr lang="en-US" sz="1400" dirty="0">
                         <a:latin typeface="Calibri" charset="0"/>
                         <a:ea typeface="Calibri" charset="0"/>
                         <a:cs typeface="Calibri" charset="0"/>
@@ -6159,7 +6043,7 @@
                         <a:buNone/>
                       </a:pPr>
                       <a:r>
-                        <a:rPr lang="en-US" sz="1050" dirty="0">
+                        <a:rPr lang="en-US" sz="1400" dirty="0">
                           <a:solidFill>
                             <a:srgbClr val="1F2429"/>
                           </a:solidFill>
@@ -6169,7 +6053,7 @@
                         </a:rPr>
                         <a:t>&lt; / &lt;=</a:t>
                       </a:r>
-                      <a:endParaRPr lang="en-US" sz="1050" dirty="0">
+                      <a:endParaRPr lang="en-US" sz="1400" dirty="0">
                         <a:latin typeface="Calibri" charset="0"/>
                         <a:ea typeface="Calibri" charset="0"/>
                         <a:cs typeface="Calibri" charset="0"/>
@@ -6229,7 +6113,7 @@
                         <a:buNone/>
                       </a:pPr>
                       <a:r>
-                        <a:rPr lang="en-US" sz="1050" dirty="0">
+                        <a:rPr lang="en-US" sz="1400" dirty="0">
                           <a:solidFill>
                             <a:srgbClr val="1F2429"/>
                           </a:solidFill>
@@ -6239,7 +6123,7 @@
                         </a:rPr>
                         <a:t>$in</a:t>
                       </a:r>
-                      <a:endParaRPr lang="en-US" sz="1050" dirty="0">
+                      <a:endParaRPr lang="en-US" sz="1400" dirty="0">
                         <a:latin typeface="Calibri" charset="0"/>
                         <a:ea typeface="Calibri" charset="0"/>
                         <a:cs typeface="Calibri" charset="0"/>
@@ -6297,7 +6181,7 @@
                         <a:buNone/>
                       </a:pPr>
                       <a:r>
-                        <a:rPr lang="en-US" sz="1050" dirty="0">
+                        <a:rPr lang="en-US" sz="1400" dirty="0">
                           <a:solidFill>
                             <a:srgbClr val="1F2429"/>
                           </a:solidFill>
@@ -6307,7 +6191,7 @@
                         </a:rPr>
                         <a:t>Value is in a given list</a:t>
                       </a:r>
-                      <a:endParaRPr lang="en-US" sz="1050" dirty="0">
+                      <a:endParaRPr lang="en-US" sz="1400" dirty="0">
                         <a:latin typeface="Calibri" charset="0"/>
                         <a:ea typeface="Calibri" charset="0"/>
                         <a:cs typeface="Calibri" charset="0"/>
@@ -6365,7 +6249,7 @@
                         <a:buNone/>
                       </a:pPr>
                       <a:r>
-                        <a:rPr lang="en-US" sz="1050" dirty="0">
+                        <a:rPr lang="en-US" sz="1400" dirty="0">
                           <a:solidFill>
                             <a:srgbClr val="1F2429"/>
                           </a:solidFill>
@@ -6375,7 +6259,7 @@
                         </a:rPr>
                         <a:t>IN (...)</a:t>
                       </a:r>
-                      <a:endParaRPr lang="en-US" sz="1050" dirty="0">
+                      <a:endParaRPr lang="en-US" sz="1400" dirty="0">
                         <a:latin typeface="Calibri" charset="0"/>
                         <a:ea typeface="Calibri" charset="0"/>
                         <a:cs typeface="Calibri" charset="0"/>
@@ -6435,7 +6319,7 @@
                         <a:buNone/>
                       </a:pPr>
                       <a:r>
-                        <a:rPr lang="en-US" sz="1050" dirty="0">
+                        <a:rPr lang="en-US" sz="1400" dirty="0">
                           <a:solidFill>
                             <a:srgbClr val="1F2429"/>
                           </a:solidFill>
@@ -6445,7 +6329,7 @@
                         </a:rPr>
                         <a:t>$and / $or</a:t>
                       </a:r>
-                      <a:endParaRPr lang="en-US" sz="1050" dirty="0">
+                      <a:endParaRPr lang="en-US" sz="1400" dirty="0">
                         <a:latin typeface="Calibri" charset="0"/>
                         <a:ea typeface="Calibri" charset="0"/>
                         <a:cs typeface="Calibri" charset="0"/>
@@ -6503,7 +6387,7 @@
                         <a:buNone/>
                       </a:pPr>
                       <a:r>
-                        <a:rPr lang="en-US" sz="1050" dirty="0">
+                        <a:rPr lang="en-US" sz="1400" dirty="0">
                           <a:solidFill>
                             <a:srgbClr val="1F2429"/>
                           </a:solidFill>
@@ -6513,7 +6397,7 @@
                         </a:rPr>
                         <a:t>Combine conditions</a:t>
                       </a:r>
-                      <a:endParaRPr lang="en-US" sz="1050" dirty="0">
+                      <a:endParaRPr lang="en-US" sz="1400" dirty="0">
                         <a:latin typeface="Calibri" charset="0"/>
                         <a:ea typeface="Calibri" charset="0"/>
                         <a:cs typeface="Calibri" charset="0"/>
@@ -6571,7 +6455,7 @@
                         <a:buNone/>
                       </a:pPr>
                       <a:r>
-                        <a:rPr lang="en-US" sz="1050" dirty="0">
+                        <a:rPr lang="en-US" sz="1400" dirty="0">
                           <a:solidFill>
                             <a:srgbClr val="1F2429"/>
                           </a:solidFill>
@@ -6581,7 +6465,7 @@
                         </a:rPr>
                         <a:t>AND / OR</a:t>
                       </a:r>
-                      <a:endParaRPr lang="en-US" sz="1050" dirty="0">
+                      <a:endParaRPr lang="en-US" sz="1400" dirty="0">
                         <a:latin typeface="Calibri" charset="0"/>
                         <a:ea typeface="Calibri" charset="0"/>
                         <a:cs typeface="Calibri" charset="0"/>
@@ -6754,7 +6638,7 @@
               <a:buNone/>
             </a:pPr>
             <a:r>
-              <a:rPr lang="en-US" sz="1000" dirty="0">
+              <a:rPr lang="en-US" sz="1200" dirty="0">
                 <a:solidFill>
                   <a:srgbClr val="8A939B"/>
                 </a:solidFill>
@@ -6764,7 +6648,7 @@
               </a:rPr>
               <a:t>mongosh</a:t>
             </a:r>
-            <a:endParaRPr lang="en-US" sz="1000" dirty="0"/>
+            <a:endParaRPr lang="en-US" sz="1200" dirty="0"/>
           </a:p>
         </p:txBody>
       </p:sp>
@@ -6796,7 +6680,7 @@
               <a:buNone/>
             </a:pPr>
             <a:r>
-              <a:rPr lang="en-US" sz="1300" dirty="0">
+              <a:rPr lang="en-US" sz="1400" dirty="0">
                 <a:solidFill>
                   <a:srgbClr val="7C8792"/>
                 </a:solidFill>
@@ -6806,7 +6690,7 @@
               </a:rPr>
               <a:t>// Projection: return only name and gpa (suppress _id)</a:t>
             </a:r>
-            <a:endParaRPr lang="en-US" sz="1300" dirty="0"/>
+            <a:endParaRPr lang="en-US" sz="1800" dirty="0"/>
           </a:p>
           <a:p>
             <a:pPr indent="0" marL="0">
@@ -6816,7 +6700,7 @@
               <a:buNone/>
             </a:pPr>
             <a:r>
-              <a:rPr lang="en-US" sz="1300" dirty="0">
+              <a:rPr lang="en-US" sz="1400" dirty="0">
                 <a:solidFill>
                   <a:srgbClr val="E8EDF0"/>
                 </a:solidFill>
@@ -6826,7 +6710,7 @@
               </a:rPr>
               <a:t>db.students.find({ gpa: { $gt: 3.5 } }, { name: 1, gpa: 1, _id: 0 });</a:t>
             </a:r>
-            <a:endParaRPr lang="en-US" sz="1300" dirty="0"/>
+            <a:endParaRPr lang="en-US" sz="1800" dirty="0"/>
           </a:p>
         </p:txBody>
       </p:sp>
@@ -6965,7 +6849,7 @@
               <a:buNone/>
             </a:pPr>
             <a:r>
-              <a:rPr lang="en-US" sz="1000" u="sng" dirty="0">
+              <a:rPr lang="en-US" sz="1200" u="sng" dirty="0">
                 <a:solidFill>
                   <a:srgbClr val="8A939B"/>
                 </a:solidFill>
@@ -6986,7 +6870,7 @@
               <a:buNone/>
             </a:pPr>
             <a:r>
-              <a:rPr lang="en-US" sz="1000" dirty="0">
+              <a:rPr lang="en-US" sz="1200" dirty="0">
                 <a:solidFill>
                   <a:srgbClr val="8A939B"/>
                 </a:solidFill>
@@ -6994,9 +6878,9 @@
                 <a:ea typeface="Calibri" pitchFamily="34" charset="-122"/>
                 <a:cs typeface="Calibri" pitchFamily="34" charset="-120"/>
               </a:rPr>
-              <a:t>  ·  15</a:t>
-            </a:r>
-            <a:endParaRPr lang="en-US" sz="1000" dirty="0"/>
+              <a:t>  ·  19</a:t>
+            </a:r>
+            <a:endParaRPr lang="en-US" sz="1200" dirty="0"/>
           </a:p>
         </p:txBody>
       </p:sp>
@@ -7079,7 +6963,7 @@
               <a:buNone/>
             </a:pPr>
             <a:r>
-              <a:rPr lang="en-US" sz="1350" b="1" dirty="0">
+              <a:rPr lang="en-US" sz="1800" b="1" dirty="0">
                 <a:solidFill>
                   <a:srgbClr val="1F2429"/>
                 </a:solidFill>
@@ -7087,9 +6971,9 @@
                 <a:ea typeface="Calibri" pitchFamily="34" charset="-122"/>
                 <a:cs typeface="Calibri" pitchFamily="34" charset="-120"/>
               </a:rPr>
-              <a:t>Content-management systems</a:t>
-            </a:r>
-            <a:endParaRPr lang="en-US" sz="1350" dirty="0"/>
+              <a:t>Content management</a:t>
+            </a:r>
+            <a:endParaRPr lang="en-US" sz="1800" dirty="0"/>
           </a:p>
         </p:txBody>
       </p:sp>
@@ -7121,7 +7005,7 @@
               <a:buNone/>
             </a:pPr>
             <a:r>
-              <a:rPr lang="en-US" sz="1050" dirty="0">
+              <a:rPr lang="en-US" sz="1200" dirty="0">
                 <a:solidFill>
                   <a:srgbClr val="6B7480"/>
                 </a:solidFill>
@@ -7131,7 +7015,7 @@
               </a:rPr>
               <a:t>Articles and pages that naturally vary in structure.</a:t>
             </a:r>
-            <a:endParaRPr lang="en-US" sz="1050" dirty="0"/>
+            <a:endParaRPr lang="en-US" sz="1200" dirty="0"/>
           </a:p>
         </p:txBody>
       </p:sp>
@@ -7214,7 +7098,7 @@
               <a:buNone/>
             </a:pPr>
             <a:r>
-              <a:rPr lang="en-US" sz="1350" b="1" dirty="0">
+              <a:rPr lang="en-US" sz="1800" b="1" dirty="0">
                 <a:solidFill>
                   <a:srgbClr val="1F2429"/>
                 </a:solidFill>
@@ -7224,7 +7108,7 @@
               </a:rPr>
               <a:t>Product catalogs</a:t>
             </a:r>
-            <a:endParaRPr lang="en-US" sz="1350" dirty="0"/>
+            <a:endParaRPr lang="en-US" sz="1800" dirty="0"/>
           </a:p>
         </p:txBody>
       </p:sp>
@@ -7256,7 +7140,7 @@
               <a:buNone/>
             </a:pPr>
             <a:r>
-              <a:rPr lang="en-US" sz="1050" dirty="0">
+              <a:rPr lang="en-US" sz="1200" dirty="0">
                 <a:solidFill>
                   <a:srgbClr val="6B7480"/>
                 </a:solidFill>
@@ -7266,7 +7150,7 @@
               </a:rPr>
               <a:t>Wildly different attributes per category.</a:t>
             </a:r>
-            <a:endParaRPr lang="en-US" sz="1050" dirty="0"/>
+            <a:endParaRPr lang="en-US" sz="1200" dirty="0"/>
           </a:p>
         </p:txBody>
       </p:sp>
@@ -7349,7 +7233,7 @@
               <a:buNone/>
             </a:pPr>
             <a:r>
-              <a:rPr lang="en-US" sz="1350" b="1" dirty="0">
+              <a:rPr lang="en-US" sz="1800" b="1" dirty="0">
                 <a:solidFill>
                   <a:srgbClr val="1F2429"/>
                 </a:solidFill>
@@ -7359,7 +7243,7 @@
               </a:rPr>
               <a:t>User profiles</a:t>
             </a:r>
-            <a:endParaRPr lang="en-US" sz="1350" dirty="0"/>
+            <a:endParaRPr lang="en-US" sz="1800" dirty="0"/>
           </a:p>
         </p:txBody>
       </p:sp>
@@ -7391,7 +7275,7 @@
               <a:buNone/>
             </a:pPr>
             <a:r>
-              <a:rPr lang="en-US" sz="1050" dirty="0">
+              <a:rPr lang="en-US" sz="1200" dirty="0">
                 <a:solidFill>
                   <a:srgbClr val="6B7480"/>
                 </a:solidFill>
@@ -7401,7 +7285,7 @@
               </a:rPr>
               <a:t>Flexible, evolving fields per user.</a:t>
             </a:r>
-            <a:endParaRPr lang="en-US" sz="1050" dirty="0"/>
+            <a:endParaRPr lang="en-US" sz="1200" dirty="0"/>
           </a:p>
         </p:txBody>
       </p:sp>
@@ -7484,7 +7368,7 @@
               <a:buNone/>
             </a:pPr>
             <a:r>
-              <a:rPr lang="en-US" sz="1350" b="1" dirty="0">
+              <a:rPr lang="en-US" sz="1800" b="1" dirty="0">
                 <a:solidFill>
                   <a:srgbClr val="1F2429"/>
                 </a:solidFill>
@@ -7494,7 +7378,7 @@
               </a:rPr>
               <a:t>Mobile / SPA backends</a:t>
             </a:r>
-            <a:endParaRPr lang="en-US" sz="1350" dirty="0"/>
+            <a:endParaRPr lang="en-US" sz="1800" dirty="0"/>
           </a:p>
         </p:txBody>
       </p:sp>
@@ -7526,7 +7410,7 @@
               <a:buNone/>
             </a:pPr>
             <a:r>
-              <a:rPr lang="en-US" sz="1050" dirty="0">
+              <a:rPr lang="en-US" sz="1200" dirty="0">
                 <a:solidFill>
                   <a:srgbClr val="6B7480"/>
                 </a:solidFill>
@@ -7536,7 +7420,7 @@
               </a:rPr>
               <a:t>Document shape matches the app's own objects.</a:t>
             </a:r>
-            <a:endParaRPr lang="en-US" sz="1050" dirty="0"/>
+            <a:endParaRPr lang="en-US" sz="1200" dirty="0"/>
           </a:p>
         </p:txBody>
       </p:sp>
@@ -7619,7 +7503,7 @@
               <a:buNone/>
             </a:pPr>
             <a:r>
-              <a:rPr lang="en-US" sz="1350" b="1" dirty="0">
+              <a:rPr lang="en-US" sz="1800" b="1" dirty="0">
                 <a:solidFill>
                   <a:srgbClr val="1F2429"/>
                 </a:solidFill>
@@ -7629,7 +7513,7 @@
               </a:rPr>
               <a:t>Fast-evolving schemas</a:t>
             </a:r>
-            <a:endParaRPr lang="en-US" sz="1350" dirty="0"/>
+            <a:endParaRPr lang="en-US" sz="1800" dirty="0"/>
           </a:p>
         </p:txBody>
       </p:sp>
@@ -7661,7 +7545,7 @@
               <a:buNone/>
             </a:pPr>
             <a:r>
-              <a:rPr lang="en-US" sz="1050" dirty="0">
+              <a:rPr lang="en-US" sz="1200" dirty="0">
                 <a:solidFill>
                   <a:srgbClr val="6B7480"/>
                 </a:solidFill>
@@ -7671,7 +7555,7 @@
               </a:rPr>
               <a:t>Active product development without migrations.</a:t>
             </a:r>
-            <a:endParaRPr lang="en-US" sz="1050" dirty="0"/>
+            <a:endParaRPr lang="en-US" sz="1200" dirty="0"/>
           </a:p>
         </p:txBody>
       </p:sp>
@@ -7813,7 +7697,7 @@
               <a:buNone/>
             </a:pPr>
             <a:r>
-              <a:rPr lang="en-US" sz="1550" dirty="0">
+              <a:rPr lang="en-US" sz="1800" dirty="0">
                 <a:solidFill>
                   <a:srgbClr val="FFFFFF"/>
                 </a:solidFill>
@@ -7823,7 +7707,7 @@
               </a:rPr>
               <a:t>MongoDB stores documents grouped into collections, served by mongod — roughly collection ≈ table, document ≈ row, but neither enforces a fixed shape.</a:t>
             </a:r>
-            <a:endParaRPr lang="en-US" sz="1550" dirty="0"/>
+            <a:endParaRPr lang="en-US" sz="1800" dirty="0"/>
           </a:p>
         </p:txBody>
       </p:sp>
@@ -7872,7 +7756,7 @@
               <a:buNone/>
             </a:pPr>
             <a:r>
-              <a:rPr lang="en-US" sz="1550" dirty="0">
+              <a:rPr lang="en-US" sz="1800" dirty="0">
                 <a:solidFill>
                   <a:srgbClr val="FFFFFF"/>
                 </a:solidFill>
@@ -7882,7 +7766,7 @@
               </a:rPr>
               <a:t>MongoDB stores data as BSON, not plain text JSON — for richer types (ObjectId, Date) and faster binary traversal.</a:t>
             </a:r>
-            <a:endParaRPr lang="en-US" sz="1550" dirty="0"/>
+            <a:endParaRPr lang="en-US" sz="1800" dirty="0"/>
           </a:p>
         </p:txBody>
       </p:sp>
@@ -7931,7 +7815,7 @@
               <a:buNone/>
             </a:pPr>
             <a:r>
-              <a:rPr lang="en-US" sz="1550" dirty="0">
+              <a:rPr lang="en-US" sz="1800" dirty="0">
                 <a:solidFill>
                   <a:srgbClr val="FFFFFF"/>
                 </a:solidFill>
@@ -7941,7 +7825,7 @@
               </a:rPr>
               <a:t>Model relationships by embedding (data almost always read together) or referencing an ObjectId (closer to a foreign key, better for independent queries).</a:t>
             </a:r>
-            <a:endParaRPr lang="en-US" sz="1550" dirty="0"/>
+            <a:endParaRPr lang="en-US" sz="1800" dirty="0"/>
           </a:p>
         </p:txBody>
       </p:sp>
@@ -7990,7 +7874,7 @@
               <a:buNone/>
             </a:pPr>
             <a:r>
-              <a:rPr lang="en-US" sz="1550" dirty="0">
+              <a:rPr lang="en-US" sz="1800" dirty="0">
                 <a:solidFill>
                   <a:srgbClr val="FFFFFF"/>
                 </a:solidFill>
@@ -8000,7 +7884,7 @@
               </a:rPr>
               <a:t>CRUD verbs — insertOne/insertMany, find/findOne, updateOne/updateMany, deleteOne/deleteMany — map directly onto SQL's INSERT, SELECT, UPDATE, DELETE.</a:t>
             </a:r>
-            <a:endParaRPr lang="en-US" sz="1550" dirty="0"/>
+            <a:endParaRPr lang="en-US" sz="1800" dirty="0"/>
           </a:p>
         </p:txBody>
       </p:sp>
@@ -8049,7 +7933,7 @@
               <a:buNone/>
             </a:pPr>
             <a:r>
-              <a:rPr lang="en-US" sz="1550" dirty="0">
+              <a:rPr lang="en-US" sz="1800" dirty="0">
                 <a:solidFill>
                   <a:srgbClr val="FFFFFF"/>
                 </a:solidFill>
@@ -8059,7 +7943,7 @@
               </a:rPr>
               <a:t>Query operators ($gt, $in, $and) and projections give MongoDB most of SQL's WHERE/SELECT expressive power, in document form.</a:t>
             </a:r>
-            <a:endParaRPr lang="en-US" sz="1550" dirty="0"/>
+            <a:endParaRPr lang="en-US" sz="1800" dirty="0"/>
           </a:p>
         </p:txBody>
       </p:sp>
@@ -8088,7 +7972,7 @@
               <a:buNone/>
             </a:pPr>
             <a:r>
-              <a:rPr lang="en-US" sz="1000" u="sng" dirty="0">
+              <a:rPr lang="en-US" sz="1200" u="sng" dirty="0">
                 <a:solidFill>
                   <a:srgbClr val="8A939B"/>
                 </a:solidFill>
@@ -8109,7 +7993,7 @@
               <a:buNone/>
             </a:pPr>
             <a:r>
-              <a:rPr lang="en-US" sz="1000" dirty="0">
+              <a:rPr lang="en-US" sz="1200" dirty="0">
                 <a:solidFill>
                   <a:srgbClr val="8A939B"/>
                 </a:solidFill>
@@ -8117,9 +8001,1581 @@
                 <a:ea typeface="Calibri" pitchFamily="34" charset="-122"/>
                 <a:cs typeface="Calibri" pitchFamily="34" charset="-120"/>
               </a:rPr>
+              <a:t>  ·  20</a:t>
+            </a:r>
+            <a:endParaRPr lang="en-US" sz="1200" dirty="0"/>
+          </a:p>
+        </p:txBody>
+      </p:sp>
+    </p:spTree>
+  </p:cSld>
+  <p:clrMapOvr>
+    <a:masterClrMapping/>
+  </p:clrMapOvr>
+</p:sld>
+</file>
+
+<file path=ppt/slides/slide17.xml><?xml version="1.0" encoding="utf-8"?>
+<p:sld xmlns:a="http://schemas.openxmlformats.org/drawingml/2006/main" xmlns:r="http://schemas.openxmlformats.org/officeDocument/2006/relationships" xmlns:p="http://schemas.openxmlformats.org/presentationml/2006/main">
+  <p:cSld name="Slide 16">
+    <p:bg>
+      <p:bgPr>
+        <a:solidFill>
+          <a:srgbClr val="14181C"/>
+        </a:solidFill>
+      </p:bgPr>
+    </p:bg>
+    <p:spTree>
+      <p:nvGrpSpPr>
+        <p:cNvPr id="1" name=""/>
+        <p:cNvGrpSpPr/>
+        <p:nvPr/>
+      </p:nvGrpSpPr>
+      <p:grpSpPr>
+        <a:xfrm>
+          <a:off x="0" y="0"/>
+          <a:ext cx="0" cy="0"/>
+          <a:chOff x="0" y="0"/>
+          <a:chExt cx="0" cy="0"/>
+        </a:xfrm>
+      </p:grpSpPr>
+      <p:sp>
+        <p:nvSpPr>
+          <p:cNvPr id="2" name="Shape 0"/>
+          <p:cNvSpPr/>
+          <p:nvPr/>
+        </p:nvSpPr>
+        <p:spPr>
+          <a:xfrm>
+            <a:off x="9265615" y="3931920"/>
+            <a:ext cx="3840480" cy="3840480"/>
+          </a:xfrm>
+          <a:prstGeom prst="ellipse">
+            <a:avLst/>
+          </a:prstGeom>
+          <a:solidFill>
+            <a:srgbClr val="2FE6C4">
+              <a:alpha val="10000"/>
+            </a:srgbClr>
+          </a:solidFill>
+          <a:ln/>
+        </p:spPr>
+      </p:sp>
+      <p:sp>
+        <p:nvSpPr>
+          <p:cNvPr id="3" name="Text 1"/>
+          <p:cNvSpPr txBox="1"/>
+          <p:nvPr/>
+        </p:nvSpPr>
+        <p:spPr>
+          <a:xfrm>
+            <a:off x="822960" y="548640"/>
+            <a:ext cx="10058400" cy="731520"/>
+          </a:xfrm>
+          <a:prstGeom prst="rect">
+            <a:avLst/>
+          </a:prstGeom>
+          <a:noFill/>
+          <a:ln/>
+        </p:spPr>
+        <p:txBody>
+          <a:bodyPr wrap="square" rtlCol="0" anchor="ctr"/>
+          <a:lstStyle/>
+          <a:p>
+            <a:pPr indent="0" marL="0">
+              <a:buNone/>
+            </a:pPr>
+            <a:r>
+              <a:rPr lang="en-US" sz="3200" b="1" dirty="0">
+                <a:solidFill>
+                  <a:srgbClr val="FFFFFF"/>
+                </a:solidFill>
+                <a:latin typeface="Calibri" pitchFamily="34" charset="0"/>
+                <a:ea typeface="Calibri" pitchFamily="34" charset="-122"/>
+                <a:cs typeface="Calibri" pitchFamily="34" charset="-120"/>
+              </a:rPr>
+              <a:t>Recap: Where We Are</a:t>
+            </a:r>
+            <a:endParaRPr lang="en-US" sz="3200" dirty="0"/>
+          </a:p>
+        </p:txBody>
+      </p:sp>
+      <p:sp>
+        <p:nvSpPr>
+          <p:cNvPr id="4" name="Shape 2"/>
+          <p:cNvSpPr/>
+          <p:nvPr/>
+        </p:nvSpPr>
+        <p:spPr>
+          <a:xfrm>
+            <a:off x="822960" y="2025396"/>
+            <a:ext cx="109728" cy="109728"/>
+          </a:xfrm>
+          <a:prstGeom prst="rect">
+            <a:avLst/>
+          </a:prstGeom>
+          <a:solidFill>
+            <a:srgbClr val="2FE6C4"/>
+          </a:solidFill>
+          <a:ln/>
+        </p:spPr>
+      </p:sp>
+      <p:sp>
+        <p:nvSpPr>
+          <p:cNvPr id="5" name="Text 3"/>
+          <p:cNvSpPr txBox="1"/>
+          <p:nvPr/>
+        </p:nvSpPr>
+        <p:spPr>
+          <a:xfrm>
+            <a:off x="1143000" y="1600200"/>
+            <a:ext cx="9875520" cy="941832"/>
+          </a:xfrm>
+          <a:prstGeom prst="rect">
+            <a:avLst/>
+          </a:prstGeom>
+          <a:noFill/>
+          <a:ln/>
+        </p:spPr>
+        <p:txBody>
+          <a:bodyPr wrap="square" rtlCol="0" anchor="ctr"/>
+          <a:lstStyle/>
+          <a:p>
+            <a:pPr indent="0" marL="0">
+              <a:buNone/>
+            </a:pPr>
+            <a:r>
+              <a:rPr lang="en-US" sz="1800" dirty="0">
+                <a:solidFill>
+                  <a:srgbClr val="FFFFFF"/>
+                </a:solidFill>
+                <a:latin typeface="Calibri" pitchFamily="34" charset="0"/>
+                <a:ea typeface="Calibri" pitchFamily="34" charset="-122"/>
+                <a:cs typeface="Calibri" pitchFamily="34" charset="-120"/>
+              </a:rPr>
+              <a:t>Relational design fits well-structured data; MongoDB fits documents that vary in shape.</a:t>
+            </a:r>
+            <a:endParaRPr lang="en-US" sz="1800" dirty="0"/>
+          </a:p>
+        </p:txBody>
+      </p:sp>
+      <p:sp>
+        <p:nvSpPr>
+          <p:cNvPr id="6" name="Shape 4"/>
+          <p:cNvSpPr/>
+          <p:nvPr/>
+        </p:nvSpPr>
+        <p:spPr>
+          <a:xfrm>
+            <a:off x="822960" y="2967228"/>
+            <a:ext cx="109728" cy="109728"/>
+          </a:xfrm>
+          <a:prstGeom prst="rect">
+            <a:avLst/>
+          </a:prstGeom>
+          <a:solidFill>
+            <a:srgbClr val="8B7FD9"/>
+          </a:solidFill>
+          <a:ln/>
+        </p:spPr>
+      </p:sp>
+      <p:sp>
+        <p:nvSpPr>
+          <p:cNvPr id="7" name="Text 5"/>
+          <p:cNvSpPr txBox="1"/>
+          <p:nvPr/>
+        </p:nvSpPr>
+        <p:spPr>
+          <a:xfrm>
+            <a:off x="1143000" y="2542032"/>
+            <a:ext cx="9875520" cy="941832"/>
+          </a:xfrm>
+          <a:prstGeom prst="rect">
+            <a:avLst/>
+          </a:prstGeom>
+          <a:noFill/>
+          <a:ln/>
+        </p:spPr>
+        <p:txBody>
+          <a:bodyPr wrap="square" rtlCol="0" anchor="ctr"/>
+          <a:lstStyle/>
+          <a:p>
+            <a:pPr indent="0" marL="0">
+              <a:buNone/>
+            </a:pPr>
+            <a:r>
+              <a:rPr lang="en-US" sz="1800" dirty="0">
+                <a:solidFill>
+                  <a:srgbClr val="FFFFFF"/>
+                </a:solidFill>
+                <a:latin typeface="Calibri" pitchFamily="34" charset="0"/>
+                <a:ea typeface="Calibri" pitchFamily="34" charset="-122"/>
+                <a:cs typeface="Calibri" pitchFamily="34" charset="-120"/>
+              </a:rPr>
+              <a:t>Documents are BSON: richer types such as ObjectId and Date, plus faster traversal.</a:t>
+            </a:r>
+            <a:endParaRPr lang="en-US" sz="1800" dirty="0"/>
+          </a:p>
+        </p:txBody>
+      </p:sp>
+      <p:sp>
+        <p:nvSpPr>
+          <p:cNvPr id="8" name="Shape 6"/>
+          <p:cNvSpPr/>
+          <p:nvPr/>
+        </p:nvSpPr>
+        <p:spPr>
+          <a:xfrm>
+            <a:off x="822960" y="3909060"/>
+            <a:ext cx="109728" cy="109728"/>
+          </a:xfrm>
+          <a:prstGeom prst="rect">
+            <a:avLst/>
+          </a:prstGeom>
+          <a:solidFill>
+            <a:srgbClr val="E8A33D"/>
+          </a:solidFill>
+          <a:ln/>
+        </p:spPr>
+      </p:sp>
+      <p:sp>
+        <p:nvSpPr>
+          <p:cNvPr id="9" name="Text 7"/>
+          <p:cNvSpPr txBox="1"/>
+          <p:nvPr/>
+        </p:nvSpPr>
+        <p:spPr>
+          <a:xfrm>
+            <a:off x="1143000" y="3483864"/>
+            <a:ext cx="9875520" cy="941832"/>
+          </a:xfrm>
+          <a:prstGeom prst="rect">
+            <a:avLst/>
+          </a:prstGeom>
+          <a:noFill/>
+          <a:ln/>
+        </p:spPr>
+        <p:txBody>
+          <a:bodyPr wrap="square" rtlCol="0" anchor="ctr"/>
+          <a:lstStyle/>
+          <a:p>
+            <a:pPr indent="0" marL="0">
+              <a:buNone/>
+            </a:pPr>
+            <a:r>
+              <a:rPr lang="en-US" sz="1800" dirty="0">
+                <a:solidFill>
+                  <a:srgbClr val="FFFFFF"/>
+                </a:solidFill>
+                <a:latin typeface="Calibri" pitchFamily="34" charset="0"/>
+                <a:ea typeface="Calibri" pitchFamily="34" charset="-122"/>
+                <a:cs typeface="Calibri" pitchFamily="34" charset="-120"/>
+              </a:rPr>
+              <a:t>Embed data you read together; reference data you query on its own.</a:t>
+            </a:r>
+            <a:endParaRPr lang="en-US" sz="1800" dirty="0"/>
+          </a:p>
+        </p:txBody>
+      </p:sp>
+      <p:sp>
+        <p:nvSpPr>
+          <p:cNvPr id="10" name="Shape 8"/>
+          <p:cNvSpPr/>
+          <p:nvPr/>
+        </p:nvSpPr>
+        <p:spPr>
+          <a:xfrm>
+            <a:off x="822960" y="4850892"/>
+            <a:ext cx="109728" cy="109728"/>
+          </a:xfrm>
+          <a:prstGeom prst="rect">
+            <a:avLst/>
+          </a:prstGeom>
+          <a:solidFill>
+            <a:srgbClr val="2FE6C4"/>
+          </a:solidFill>
+          <a:ln/>
+        </p:spPr>
+      </p:sp>
+      <p:sp>
+        <p:nvSpPr>
+          <p:cNvPr id="11" name="Text 9"/>
+          <p:cNvSpPr txBox="1"/>
+          <p:nvPr/>
+        </p:nvSpPr>
+        <p:spPr>
+          <a:xfrm>
+            <a:off x="1143000" y="4425696"/>
+            <a:ext cx="9875520" cy="941832"/>
+          </a:xfrm>
+          <a:prstGeom prst="rect">
+            <a:avLst/>
+          </a:prstGeom>
+          <a:noFill/>
+          <a:ln/>
+        </p:spPr>
+        <p:txBody>
+          <a:bodyPr wrap="square" rtlCol="0" anchor="ctr"/>
+          <a:lstStyle/>
+          <a:p>
+            <a:pPr indent="0" marL="0">
+              <a:buNone/>
+            </a:pPr>
+            <a:r>
+              <a:rPr lang="en-US" sz="1800" dirty="0">
+                <a:solidFill>
+                  <a:srgbClr val="FFFFFF"/>
+                </a:solidFill>
+                <a:latin typeface="Calibri" pitchFamily="34" charset="0"/>
+                <a:ea typeface="Calibri" pitchFamily="34" charset="-122"/>
+                <a:cs typeface="Calibri" pitchFamily="34" charset="-120"/>
+              </a:rPr>
+              <a:t>CRUD maps onto SQL: insert, find, update, delete — each with a One and a Many form.</a:t>
+            </a:r>
+            <a:endParaRPr lang="en-US" sz="1800" dirty="0"/>
+          </a:p>
+        </p:txBody>
+      </p:sp>
+      <p:sp>
+        <p:nvSpPr>
+          <p:cNvPr id="12" name="Shape 10"/>
+          <p:cNvSpPr/>
+          <p:nvPr/>
+        </p:nvSpPr>
+        <p:spPr>
+          <a:xfrm>
+            <a:off x="822960" y="5792724"/>
+            <a:ext cx="109728" cy="109728"/>
+          </a:xfrm>
+          <a:prstGeom prst="rect">
+            <a:avLst/>
+          </a:prstGeom>
+          <a:solidFill>
+            <a:srgbClr val="8B7FD9"/>
+          </a:solidFill>
+          <a:ln/>
+        </p:spPr>
+      </p:sp>
+      <p:sp>
+        <p:nvSpPr>
+          <p:cNvPr id="13" name="Text 11"/>
+          <p:cNvSpPr txBox="1"/>
+          <p:nvPr/>
+        </p:nvSpPr>
+        <p:spPr>
+          <a:xfrm>
+            <a:off x="1143000" y="5367528"/>
+            <a:ext cx="9875520" cy="941832"/>
+          </a:xfrm>
+          <a:prstGeom prst="rect">
+            <a:avLst/>
+          </a:prstGeom>
+          <a:noFill/>
+          <a:ln/>
+        </p:spPr>
+        <p:txBody>
+          <a:bodyPr wrap="square" rtlCol="0" anchor="ctr"/>
+          <a:lstStyle/>
+          <a:p>
+            <a:pPr indent="0" marL="0">
+              <a:buNone/>
+            </a:pPr>
+            <a:r>
+              <a:rPr lang="en-US" sz="1800" dirty="0">
+                <a:solidFill>
+                  <a:srgbClr val="FFFFFF"/>
+                </a:solidFill>
+                <a:latin typeface="Calibri" pitchFamily="34" charset="0"/>
+                <a:ea typeface="Calibri" pitchFamily="34" charset="-122"/>
+                <a:cs typeface="Calibri" pitchFamily="34" charset="-120"/>
+              </a:rPr>
+              <a:t>Next: how MongoDB scales, through replication and sharding.</a:t>
+            </a:r>
+            <a:endParaRPr lang="en-US" sz="1800" dirty="0"/>
+          </a:p>
+        </p:txBody>
+      </p:sp>
+      <p:sp>
+        <p:nvSpPr>
+          <p:cNvPr id="14" name="Text 12"/>
+          <p:cNvSpPr txBox="1"/>
+          <p:nvPr/>
+        </p:nvSpPr>
+        <p:spPr>
+          <a:xfrm>
+            <a:off x="9951415" y="6455664"/>
+            <a:ext cx="2011680" cy="292608"/>
+          </a:xfrm>
+          <a:prstGeom prst="rect">
+            <a:avLst/>
+          </a:prstGeom>
+          <a:noFill/>
+          <a:ln/>
+        </p:spPr>
+        <p:txBody>
+          <a:bodyPr wrap="square" rtlCol="0" anchor="ctr"/>
+          <a:lstStyle/>
+          <a:p>
+            <a:pPr algn="r" indent="0" marL="0">
+              <a:buNone/>
+            </a:pPr>
+            <a:r>
+              <a:rPr lang="en-US" sz="1200" u="sng" dirty="0">
+                <a:solidFill>
+                  <a:srgbClr val="8A939B"/>
+                </a:solidFill>
+                <a:latin typeface="Calibri" pitchFamily="34" charset="0"/>
+                <a:ea typeface="Calibri" pitchFamily="34" charset="-122"/>
+                <a:cs typeface="Calibri" pitchFamily="34" charset="-120"/>
+                <a:hlinkClick r:id="rId1" invalidUrl="" action="" tgtFrame="" tooltip="" history="1" highlightClick="0" endSnd="0">
+                  <a:extLst>
+                    <a:ext uri="{A12FA001-AC4F-418D-AE19-62706E023703}">
+                      <ahyp:hlinkClr xmlns:ahyp="http://schemas.microsoft.com/office/drawing/2018/hyperlinkcolor" val="tx"/>
+                    </a:ext>
+                  </a:extLst>
+                </a:hlinkClick>
+              </a:rPr>
+              <a:t>cuinotes.com</a:t>
+            </a:r>
+            <a:pPr algn="r" indent="0" marL="0">
+              <a:buNone/>
+            </a:pPr>
+            <a:r>
+              <a:rPr lang="en-US" sz="1200" dirty="0">
+                <a:solidFill>
+                  <a:srgbClr val="8A939B"/>
+                </a:solidFill>
+                <a:latin typeface="Calibri" pitchFamily="34" charset="0"/>
+                <a:ea typeface="Calibri" pitchFamily="34" charset="-122"/>
+                <a:cs typeface="Calibri" pitchFamily="34" charset="-120"/>
+              </a:rPr>
+              <a:t>  ·  3</a:t>
+            </a:r>
+            <a:endParaRPr lang="en-US" sz="1200" dirty="0"/>
+          </a:p>
+        </p:txBody>
+      </p:sp>
+    </p:spTree>
+  </p:cSld>
+  <p:clrMapOvr>
+    <a:masterClrMapping/>
+  </p:clrMapOvr>
+</p:sld>
+</file>
+
+<file path=ppt/slides/slide18.xml><?xml version="1.0" encoding="utf-8"?>
+<p:sld xmlns:a="http://schemas.openxmlformats.org/drawingml/2006/main" xmlns:r="http://schemas.openxmlformats.org/officeDocument/2006/relationships" xmlns:p="http://schemas.openxmlformats.org/presentationml/2006/main">
+  <p:cSld name="Slide 12">
+    <p:bg>
+      <p:bgPr>
+        <a:solidFill>
+          <a:srgbClr val="F7F8F9"/>
+        </a:solidFill>
+      </p:bgPr>
+    </p:bg>
+    <p:spTree>
+      <p:nvGrpSpPr>
+        <p:cNvPr id="1" name=""/>
+        <p:cNvGrpSpPr/>
+        <p:nvPr/>
+      </p:nvGrpSpPr>
+      <p:grpSpPr>
+        <a:xfrm>
+          <a:off x="0" y="0"/>
+          <a:ext cx="0" cy="0"/>
+          <a:chOff x="0" y="0"/>
+          <a:chExt cx="0" cy="0"/>
+        </a:xfrm>
+      </p:grpSpPr>
+      <p:sp>
+        <p:nvSpPr>
+          <p:cNvPr id="2" name="Text 0"/>
+          <p:cNvSpPr txBox="1"/>
+          <p:nvPr/>
+        </p:nvSpPr>
+        <p:spPr>
+          <a:xfrm>
+            <a:off x="548640" y="320040"/>
+            <a:ext cx="9144000" cy="292608"/>
+          </a:xfrm>
+          <a:prstGeom prst="rect">
+            <a:avLst/>
+          </a:prstGeom>
+          <a:noFill/>
+          <a:ln/>
+        </p:spPr>
+        <p:txBody>
+          <a:bodyPr wrap="square" rtlCol="0" anchor="ctr"/>
+          <a:lstStyle/>
+          <a:p>
+            <a:pPr indent="0" marL="0">
+              <a:buNone/>
+            </a:pPr>
+            <a:r>
+              <a:rPr lang="en-US" sz="1200" b="1" spc="150" kern="0" dirty="0">
+                <a:solidFill>
+                  <a:srgbClr val="8B7FD9"/>
+                </a:solidFill>
+                <a:latin typeface="Calibri" pitchFamily="34" charset="0"/>
+                <a:ea typeface="Calibri" pitchFamily="34" charset="-122"/>
+                <a:cs typeface="Calibri" pitchFamily="34" charset="-120"/>
+              </a:rPr>
+              <a:t>AGGREGATION PIPELINE</a:t>
+            </a:r>
+            <a:endParaRPr lang="en-US" sz="1200" dirty="0"/>
+          </a:p>
+        </p:txBody>
+      </p:sp>
+      <p:sp>
+        <p:nvSpPr>
+          <p:cNvPr id="3" name="Text 1"/>
+          <p:cNvSpPr txBox="1"/>
+          <p:nvPr/>
+        </p:nvSpPr>
+        <p:spPr>
+          <a:xfrm>
+            <a:off x="548640" y="566928"/>
+            <a:ext cx="11064240" cy="640080"/>
+          </a:xfrm>
+          <a:prstGeom prst="rect">
+            <a:avLst/>
+          </a:prstGeom>
+          <a:noFill/>
+          <a:ln/>
+        </p:spPr>
+        <p:txBody>
+          <a:bodyPr wrap="square" rtlCol="0" anchor="ctr"/>
+          <a:lstStyle/>
+          <a:p>
+            <a:pPr indent="0" marL="0">
+              <a:buNone/>
+            </a:pPr>
+            <a:r>
+              <a:rPr lang="en-US" sz="2500" b="1" dirty="0">
+                <a:solidFill>
+                  <a:srgbClr val="1F2429"/>
+                </a:solidFill>
+                <a:latin typeface="Calibri" pitchFamily="34" charset="0"/>
+                <a:ea typeface="Calibri" pitchFamily="34" charset="-122"/>
+                <a:cs typeface="Calibri" pitchFamily="34" charset="-120"/>
+              </a:rPr>
+              <a:t>Worked Example: Average GPA by Department</a:t>
+            </a:r>
+            <a:endParaRPr lang="en-US" sz="2500" dirty="0"/>
+          </a:p>
+        </p:txBody>
+      </p:sp>
+      <p:sp>
+        <p:nvSpPr>
+          <p:cNvPr id="4" name="Text 2"/>
+          <p:cNvSpPr txBox="1"/>
+          <p:nvPr/>
+        </p:nvSpPr>
+        <p:spPr>
+          <a:xfrm>
+            <a:off x="9951415" y="6455664"/>
+            <a:ext cx="2011680" cy="292608"/>
+          </a:xfrm>
+          <a:prstGeom prst="rect">
+            <a:avLst/>
+          </a:prstGeom>
+          <a:noFill/>
+          <a:ln/>
+        </p:spPr>
+        <p:txBody>
+          <a:bodyPr wrap="square" rtlCol="0" anchor="ctr"/>
+          <a:lstStyle/>
+          <a:p>
+            <a:pPr algn="r" indent="0" marL="0">
+              <a:buNone/>
+            </a:pPr>
+            <a:r>
+              <a:rPr lang="en-US" sz="1200" u="sng" dirty="0">
+                <a:solidFill>
+                  <a:srgbClr val="8A939B"/>
+                </a:solidFill>
+                <a:latin typeface="Calibri" pitchFamily="34" charset="0"/>
+                <a:ea typeface="Calibri" pitchFamily="34" charset="-122"/>
+                <a:cs typeface="Calibri" pitchFamily="34" charset="-120"/>
+                <a:hlinkClick r:id="rId1" invalidUrl="" action="" tgtFrame="" tooltip="" history="1" highlightClick="0" endSnd="0">
+                  <a:extLst>
+                    <a:ext uri="{A12FA001-AC4F-418D-AE19-62706E023703}">
+                      <ahyp:hlinkClr xmlns:ahyp="http://schemas.microsoft.com/office/drawing/2018/hyperlinkcolor" val="tx"/>
+                    </a:ext>
+                  </a:extLst>
+                </a:hlinkClick>
+              </a:rPr>
+              <a:t>cuinotes.com</a:t>
+            </a:r>
+            <a:pPr algn="r" indent="0" marL="0">
+              <a:buNone/>
+            </a:pPr>
+            <a:r>
+              <a:rPr lang="en-US" sz="1200" dirty="0">
+                <a:solidFill>
+                  <a:srgbClr val="8A939B"/>
+                </a:solidFill>
+                <a:latin typeface="Calibri" pitchFamily="34" charset="0"/>
+                <a:ea typeface="Calibri" pitchFamily="34" charset="-122"/>
+                <a:cs typeface="Calibri" pitchFamily="34" charset="-120"/>
+              </a:rPr>
+              <a:t>  ·  14</a:t>
+            </a:r>
+            <a:endParaRPr lang="en-US" sz="1200" dirty="0"/>
+          </a:p>
+        </p:txBody>
+      </p:sp>
+      <p:sp>
+        <p:nvSpPr>
+          <p:cNvPr id="5" name="Shape 3"/>
+          <p:cNvSpPr/>
+          <p:nvPr/>
+        </p:nvSpPr>
+        <p:spPr>
+          <a:xfrm>
+            <a:off x="548640" y="1280160"/>
+            <a:ext cx="11064240" cy="4114800"/>
+          </a:xfrm>
+          <a:prstGeom prst="roundRect">
+            <a:avLst>
+              <a:gd name="adj" fmla="val 1778"/>
+            </a:avLst>
+          </a:prstGeom>
+          <a:solidFill>
+            <a:srgbClr val="1F2429"/>
+          </a:solidFill>
+          <a:ln w="19050">
+            <a:solidFill>
+              <a:srgbClr val="2FE6C4"/>
+            </a:solidFill>
+            <a:prstDash val="solid"/>
+          </a:ln>
+          <a:effectLst>
+            <a:outerShdw sx="100000" sy="100000" kx="0" ky="0" algn="bl" rotWithShape="0" blurRad="76200" dist="25400" dir="5400000">
+              <a:srgbClr val="14181C">
+                <a:alpha val="25000"/>
+              </a:srgbClr>
+            </a:outerShdw>
+          </a:effectLst>
+        </p:spPr>
+      </p:sp>
+      <p:sp>
+        <p:nvSpPr>
+          <p:cNvPr id="6" name="Shape 4"/>
+          <p:cNvSpPr/>
+          <p:nvPr/>
+        </p:nvSpPr>
+        <p:spPr>
+          <a:xfrm>
+            <a:off x="713232" y="1426464"/>
+            <a:ext cx="100584" cy="100584"/>
+          </a:xfrm>
+          <a:prstGeom prst="ellipse">
+            <a:avLst/>
+          </a:prstGeom>
+          <a:solidFill>
+            <a:srgbClr val="E8A33D"/>
+          </a:solidFill>
+          <a:ln/>
+        </p:spPr>
+      </p:sp>
+      <p:sp>
+        <p:nvSpPr>
+          <p:cNvPr id="7" name="Shape 5"/>
+          <p:cNvSpPr/>
+          <p:nvPr/>
+        </p:nvSpPr>
+        <p:spPr>
+          <a:xfrm>
+            <a:off x="868680" y="1426464"/>
+            <a:ext cx="100584" cy="100584"/>
+          </a:xfrm>
+          <a:prstGeom prst="ellipse">
+            <a:avLst/>
+          </a:prstGeom>
+          <a:solidFill>
+            <a:srgbClr val="2FE6C4"/>
+          </a:solidFill>
+          <a:ln/>
+        </p:spPr>
+      </p:sp>
+      <p:sp>
+        <p:nvSpPr>
+          <p:cNvPr id="8" name="Shape 6"/>
+          <p:cNvSpPr/>
+          <p:nvPr/>
+        </p:nvSpPr>
+        <p:spPr>
+          <a:xfrm>
+            <a:off x="1024128" y="1426464"/>
+            <a:ext cx="100584" cy="100584"/>
+          </a:xfrm>
+          <a:prstGeom prst="ellipse">
+            <a:avLst/>
+          </a:prstGeom>
+          <a:solidFill>
+            <a:srgbClr val="8B7FD9"/>
+          </a:solidFill>
+          <a:ln/>
+        </p:spPr>
+      </p:sp>
+      <p:sp>
+        <p:nvSpPr>
+          <p:cNvPr id="9" name="Text 7"/>
+          <p:cNvSpPr txBox="1"/>
+          <p:nvPr/>
+        </p:nvSpPr>
+        <p:spPr>
+          <a:xfrm>
+            <a:off x="9418320" y="1371600"/>
+            <a:ext cx="2011680" cy="274320"/>
+          </a:xfrm>
+          <a:prstGeom prst="rect">
+            <a:avLst/>
+          </a:prstGeom>
+          <a:noFill/>
+          <a:ln/>
+        </p:spPr>
+        <p:txBody>
+          <a:bodyPr wrap="square" rtlCol="0" anchor="ctr"/>
+          <a:lstStyle/>
+          <a:p>
+            <a:pPr algn="r" indent="0" marL="0">
+              <a:buNone/>
+            </a:pPr>
+            <a:r>
+              <a:rPr lang="en-US" sz="1200" dirty="0">
+                <a:solidFill>
+                  <a:srgbClr val="8A939B"/>
+                </a:solidFill>
+                <a:latin typeface="Calibri" pitchFamily="34" charset="0"/>
+                <a:ea typeface="Calibri" pitchFamily="34" charset="-122"/>
+                <a:cs typeface="Calibri" pitchFamily="34" charset="-120"/>
+              </a:rPr>
+              <a:t>mongosh</a:t>
+            </a:r>
+            <a:endParaRPr lang="en-US" sz="1200" dirty="0"/>
+          </a:p>
+        </p:txBody>
+      </p:sp>
+      <p:sp>
+        <p:nvSpPr>
+          <p:cNvPr id="10" name="Text 8"/>
+          <p:cNvSpPr txBox="1"/>
+          <p:nvPr/>
+        </p:nvSpPr>
+        <p:spPr>
+          <a:xfrm>
+            <a:off x="841248" y="1700784"/>
+            <a:ext cx="10515600" cy="3547872"/>
+          </a:xfrm>
+          <a:prstGeom prst="rect">
+            <a:avLst/>
+          </a:prstGeom>
+          <a:noFill/>
+          <a:ln/>
+        </p:spPr>
+        <p:txBody>
+          <a:bodyPr wrap="square" rtlCol="0" anchor="t"/>
+          <a:lstStyle/>
+          <a:p>
+            <a:pPr indent="0" marL="0">
+              <a:lnSpc>
+                <a:spcPct val="128000"/>
+              </a:lnSpc>
+              <a:buNone/>
+            </a:pPr>
+            <a:r>
+              <a:rPr lang="en-US" sz="1400" dirty="0">
+                <a:solidFill>
+                  <a:srgbClr val="7C8792"/>
+                </a:solidFill>
+                <a:latin typeface="Courier New" pitchFamily="34" charset="0"/>
+                <a:ea typeface="Courier New" pitchFamily="34" charset="-122"/>
+                <a:cs typeface="Courier New" pitchFamily="34" charset="-120"/>
+              </a:rPr>
+              <a:t>// Stage 1 keeps active students; stage 2 groups and averages</a:t>
+            </a:r>
+            <a:endParaRPr lang="en-US" sz="1800" dirty="0"/>
+          </a:p>
+          <a:p>
+            <a:pPr indent="0" marL="0">
+              <a:lnSpc>
+                <a:spcPct val="128000"/>
+              </a:lnSpc>
+              <a:buNone/>
+            </a:pPr>
+            <a:r>
+              <a:rPr lang="en-US" sz="1400" dirty="0">
+                <a:solidFill>
+                  <a:srgbClr val="E8EDF0"/>
+                </a:solidFill>
+                <a:latin typeface="Courier New" pitchFamily="34" charset="0"/>
+                <a:ea typeface="Courier New" pitchFamily="34" charset="-122"/>
+                <a:cs typeface="Courier New" pitchFamily="34" charset="-120"/>
+              </a:rPr>
+              <a:t>db.students.aggregate([</a:t>
+            </a:r>
+            <a:endParaRPr lang="en-US" sz="1800" dirty="0"/>
+          </a:p>
+          <a:p>
+            <a:pPr indent="0" marL="0">
+              <a:lnSpc>
+                <a:spcPct val="128000"/>
+              </a:lnSpc>
+              <a:buNone/>
+            </a:pPr>
+            <a:r>
+              <a:rPr lang="en-US" sz="1400" dirty="0">
+                <a:solidFill>
+                  <a:srgbClr val="E8EDF0"/>
+                </a:solidFill>
+                <a:latin typeface="Courier New" pitchFamily="34" charset="0"/>
+                <a:ea typeface="Courier New" pitchFamily="34" charset="-122"/>
+                <a:cs typeface="Courier New" pitchFamily="34" charset="-120"/>
+              </a:rPr>
+              <a:t>  { $match: { isActive: true } },</a:t>
+            </a:r>
+            <a:endParaRPr lang="en-US" sz="1800" dirty="0"/>
+          </a:p>
+          <a:p>
+            <a:pPr indent="0" marL="0">
+              <a:lnSpc>
+                <a:spcPct val="128000"/>
+              </a:lnSpc>
+              <a:buNone/>
+            </a:pPr>
+            <a:r>
+              <a:rPr lang="en-US" sz="1400" dirty="0">
+                <a:solidFill>
+                  <a:srgbClr val="E8EDF0"/>
+                </a:solidFill>
+                <a:latin typeface="Courier New" pitchFamily="34" charset="0"/>
+                <a:ea typeface="Courier New" pitchFamily="34" charset="-122"/>
+                <a:cs typeface="Courier New" pitchFamily="34" charset="-120"/>
+              </a:rPr>
+              <a:t>  { $group: { _id: "$department", avgGpa: { $avg: "$gpa" } } },</a:t>
+            </a:r>
+            <a:endParaRPr lang="en-US" sz="1800" dirty="0"/>
+          </a:p>
+          <a:p>
+            <a:pPr indent="0" marL="0">
+              <a:lnSpc>
+                <a:spcPct val="128000"/>
+              </a:lnSpc>
+              <a:buNone/>
+            </a:pPr>
+            <a:r>
+              <a:rPr lang="en-US" sz="1400" dirty="0">
+                <a:solidFill>
+                  <a:srgbClr val="E8EDF0"/>
+                </a:solidFill>
+                <a:latin typeface="Courier New" pitchFamily="34" charset="0"/>
+                <a:ea typeface="Courier New" pitchFamily="34" charset="-122"/>
+                <a:cs typeface="Courier New" pitchFamily="34" charset="-120"/>
+              </a:rPr>
+              <a:t>  { $sort: { avgGpa: -1 } }</a:t>
+            </a:r>
+            <a:endParaRPr lang="en-US" sz="1800" dirty="0"/>
+          </a:p>
+          <a:p>
+            <a:pPr indent="0" marL="0">
+              <a:lnSpc>
+                <a:spcPct val="128000"/>
+              </a:lnSpc>
+              <a:buNone/>
+            </a:pPr>
+            <a:r>
+              <a:rPr lang="en-US" sz="1400" dirty="0">
+                <a:solidFill>
+                  <a:srgbClr val="E8EDF0"/>
+                </a:solidFill>
+                <a:latin typeface="Courier New" pitchFamily="34" charset="0"/>
+                <a:ea typeface="Courier New" pitchFamily="34" charset="-122"/>
+                <a:cs typeface="Courier New" pitchFamily="34" charset="-120"/>
+              </a:rPr>
+              <a:t>]);</a:t>
+            </a:r>
+            <a:endParaRPr lang="en-US" sz="1800" dirty="0"/>
+          </a:p>
+          <a:p>
+            <a:pPr indent="0" marL="0">
+              <a:lnSpc>
+                <a:spcPct val="128000"/>
+              </a:lnSpc>
+              <a:buNone/>
+            </a:pPr>
+            <a:r>
+              <a:rPr lang="en-US" sz="1400" dirty="0">
+                <a:solidFill>
+                  <a:srgbClr val="E8EDF0"/>
+                </a:solidFill>
+                <a:latin typeface="Courier New" pitchFamily="34" charset="0"/>
+                <a:ea typeface="Courier New" pitchFamily="34" charset="-122"/>
+                <a:cs typeface="Courier New" pitchFamily="34" charset="-120"/>
+              </a:rPr>
+              <a:t> </a:t>
+            </a:r>
+            <a:endParaRPr lang="en-US" sz="1800" dirty="0"/>
+          </a:p>
+          <a:p>
+            <a:pPr indent="0" marL="0">
+              <a:lnSpc>
+                <a:spcPct val="128000"/>
+              </a:lnSpc>
+              <a:buNone/>
+            </a:pPr>
+            <a:r>
+              <a:rPr lang="en-US" sz="1400" dirty="0">
+                <a:solidFill>
+                  <a:srgbClr val="7C8792"/>
+                </a:solidFill>
+                <a:latin typeface="Courier New" pitchFamily="34" charset="0"/>
+                <a:ea typeface="Courier New" pitchFamily="34" charset="-122"/>
+                <a:cs typeface="Courier New" pitchFamily="34" charset="-120"/>
+              </a:rPr>
+              <a:t>// Each stage receives the output of the stage before it</a:t>
+            </a:r>
+            <a:endParaRPr lang="en-US" sz="1800" dirty="0"/>
+          </a:p>
+        </p:txBody>
+      </p:sp>
+      <p:sp>
+        <p:nvSpPr>
+          <p:cNvPr id="11" name="Text 9"/>
+          <p:cNvSpPr txBox="1"/>
+          <p:nvPr/>
+        </p:nvSpPr>
+        <p:spPr>
+          <a:xfrm>
+            <a:off x="548640" y="5532120"/>
+            <a:ext cx="11064240" cy="365760"/>
+          </a:xfrm>
+          <a:prstGeom prst="rect">
+            <a:avLst/>
+          </a:prstGeom>
+          <a:noFill/>
+          <a:ln/>
+        </p:spPr>
+        <p:txBody>
+          <a:bodyPr wrap="square" rtlCol="0" anchor="ctr"/>
+          <a:lstStyle/>
+          <a:p>
+            <a:pPr indent="0" marL="0">
+              <a:buNone/>
+            </a:pPr>
+            <a:r>
+              <a:rPr lang="en-US" sz="1200" dirty="0">
+                <a:solidFill>
+                  <a:srgbClr val="6B7480"/>
+                </a:solidFill>
+                <a:latin typeface="Calibri" pitchFamily="34" charset="0"/>
+                <a:ea typeface="Calibri" pitchFamily="34" charset="-122"/>
+                <a:cs typeface="Calibri" pitchFamily="34" charset="-120"/>
+              </a:rPr>
+              <a:t>Think of each stage as a SQL clause: $match is WHERE, $group is GROUP BY with AVG, and $sort is ORDER BY. Stages run left to right on the server.</a:t>
+            </a:r>
+            <a:endParaRPr lang="en-US" sz="1200" dirty="0"/>
+          </a:p>
+        </p:txBody>
+      </p:sp>
+    </p:spTree>
+  </p:cSld>
+  <p:clrMapOvr>
+    <a:masterClrMapping/>
+  </p:clrMapOvr>
+</p:sld>
+</file>
+
+<file path=ppt/slides/slide19.xml><?xml version="1.0" encoding="utf-8"?>
+<p:sld xmlns:a="http://schemas.openxmlformats.org/drawingml/2006/main" xmlns:r="http://schemas.openxmlformats.org/officeDocument/2006/relationships" xmlns:p="http://schemas.openxmlformats.org/presentationml/2006/main">
+  <p:cSld name="Slide 13">
+    <p:bg>
+      <p:bgPr>
+        <a:solidFill>
+          <a:srgbClr val="F7F8F9"/>
+        </a:solidFill>
+      </p:bgPr>
+    </p:bg>
+    <p:spTree>
+      <p:nvGrpSpPr>
+        <p:cNvPr id="1" name=""/>
+        <p:cNvGrpSpPr/>
+        <p:nvPr/>
+      </p:nvGrpSpPr>
+      <p:grpSpPr>
+        <a:xfrm>
+          <a:off x="0" y="0"/>
+          <a:ext cx="0" cy="0"/>
+          <a:chOff x="0" y="0"/>
+          <a:chExt cx="0" cy="0"/>
+        </a:xfrm>
+      </p:grpSpPr>
+      <p:sp>
+        <p:nvSpPr>
+          <p:cNvPr id="2" name="Text 0"/>
+          <p:cNvSpPr txBox="1"/>
+          <p:nvPr/>
+        </p:nvSpPr>
+        <p:spPr>
+          <a:xfrm>
+            <a:off x="548640" y="320040"/>
+            <a:ext cx="9144000" cy="292608"/>
+          </a:xfrm>
+          <a:prstGeom prst="rect">
+            <a:avLst/>
+          </a:prstGeom>
+          <a:noFill/>
+          <a:ln/>
+        </p:spPr>
+        <p:txBody>
+          <a:bodyPr wrap="square" rtlCol="0" anchor="ctr"/>
+          <a:lstStyle/>
+          <a:p>
+            <a:pPr indent="0" marL="0">
+              <a:buNone/>
+            </a:pPr>
+            <a:r>
+              <a:rPr lang="en-US" sz="1200" b="1" spc="150" kern="0" dirty="0">
+                <a:solidFill>
+                  <a:srgbClr val="8B7FD9"/>
+                </a:solidFill>
+                <a:latin typeface="Calibri" pitchFamily="34" charset="0"/>
+                <a:ea typeface="Calibri" pitchFamily="34" charset="-122"/>
+                <a:cs typeface="Calibri" pitchFamily="34" charset="-120"/>
+              </a:rPr>
+              <a:t>CRUD — SAFE UPDATES</a:t>
+            </a:r>
+            <a:endParaRPr lang="en-US" sz="1200" dirty="0"/>
+          </a:p>
+        </p:txBody>
+      </p:sp>
+      <p:sp>
+        <p:nvSpPr>
+          <p:cNvPr id="3" name="Text 1"/>
+          <p:cNvSpPr txBox="1"/>
+          <p:nvPr/>
+        </p:nvSpPr>
+        <p:spPr>
+          <a:xfrm>
+            <a:off x="548640" y="566928"/>
+            <a:ext cx="11064240" cy="640080"/>
+          </a:xfrm>
+          <a:prstGeom prst="rect">
+            <a:avLst/>
+          </a:prstGeom>
+          <a:noFill/>
+          <a:ln/>
+        </p:spPr>
+        <p:txBody>
+          <a:bodyPr wrap="square" rtlCol="0" anchor="ctr"/>
+          <a:lstStyle/>
+          <a:p>
+            <a:pPr indent="0" marL="0">
+              <a:buNone/>
+            </a:pPr>
+            <a:r>
+              <a:rPr lang="en-US" sz="2500" b="1" dirty="0">
+                <a:solidFill>
+                  <a:srgbClr val="1F2429"/>
+                </a:solidFill>
+                <a:latin typeface="Calibri" pitchFamily="34" charset="0"/>
+                <a:ea typeface="Calibri" pitchFamily="34" charset="-122"/>
+                <a:cs typeface="Calibri" pitchFamily="34" charset="-120"/>
+              </a:rPr>
+              <a:t>Worked Example: Updating One Student Safely</a:t>
+            </a:r>
+            <a:endParaRPr lang="en-US" sz="2500" dirty="0"/>
+          </a:p>
+        </p:txBody>
+      </p:sp>
+      <p:sp>
+        <p:nvSpPr>
+          <p:cNvPr id="4" name="Text 2"/>
+          <p:cNvSpPr txBox="1"/>
+          <p:nvPr/>
+        </p:nvSpPr>
+        <p:spPr>
+          <a:xfrm>
+            <a:off x="9951415" y="6455664"/>
+            <a:ext cx="2011680" cy="292608"/>
+          </a:xfrm>
+          <a:prstGeom prst="rect">
+            <a:avLst/>
+          </a:prstGeom>
+          <a:noFill/>
+          <a:ln/>
+        </p:spPr>
+        <p:txBody>
+          <a:bodyPr wrap="square" rtlCol="0" anchor="ctr"/>
+          <a:lstStyle/>
+          <a:p>
+            <a:pPr algn="r" indent="0" marL="0">
+              <a:buNone/>
+            </a:pPr>
+            <a:r>
+              <a:rPr lang="en-US" sz="1200" u="sng" dirty="0">
+                <a:solidFill>
+                  <a:srgbClr val="8A939B"/>
+                </a:solidFill>
+                <a:latin typeface="Calibri" pitchFamily="34" charset="0"/>
+                <a:ea typeface="Calibri" pitchFamily="34" charset="-122"/>
+                <a:cs typeface="Calibri" pitchFamily="34" charset="-120"/>
+                <a:hlinkClick r:id="rId1" invalidUrl="" action="" tgtFrame="" tooltip="" history="1" highlightClick="0" endSnd="0">
+                  <a:extLst>
+                    <a:ext uri="{A12FA001-AC4F-418D-AE19-62706E023703}">
+                      <ahyp:hlinkClr xmlns:ahyp="http://schemas.microsoft.com/office/drawing/2018/hyperlinkcolor" val="tx"/>
+                    </a:ext>
+                  </a:extLst>
+                </a:hlinkClick>
+              </a:rPr>
+              <a:t>cuinotes.com</a:t>
+            </a:r>
+            <a:pPr algn="r" indent="0" marL="0">
+              <a:buNone/>
+            </a:pPr>
+            <a:r>
+              <a:rPr lang="en-US" sz="1200" dirty="0">
+                <a:solidFill>
+                  <a:srgbClr val="8A939B"/>
+                </a:solidFill>
+                <a:latin typeface="Calibri" pitchFamily="34" charset="0"/>
+                <a:ea typeface="Calibri" pitchFamily="34" charset="-122"/>
+                <a:cs typeface="Calibri" pitchFamily="34" charset="-120"/>
+              </a:rPr>
               <a:t>  ·  16</a:t>
             </a:r>
-            <a:endParaRPr lang="en-US" sz="1000" dirty="0"/>
+            <a:endParaRPr lang="en-US" sz="1200" dirty="0"/>
+          </a:p>
+        </p:txBody>
+      </p:sp>
+      <p:sp>
+        <p:nvSpPr>
+          <p:cNvPr id="5" name="Shape 3"/>
+          <p:cNvSpPr/>
+          <p:nvPr/>
+        </p:nvSpPr>
+        <p:spPr>
+          <a:xfrm>
+            <a:off x="548640" y="1188720"/>
+            <a:ext cx="11064240" cy="2743200"/>
+          </a:xfrm>
+          <a:prstGeom prst="roundRect">
+            <a:avLst>
+              <a:gd name="adj" fmla="val 2667"/>
+            </a:avLst>
+          </a:prstGeom>
+          <a:solidFill>
+            <a:srgbClr val="1F2429"/>
+          </a:solidFill>
+          <a:ln w="19050">
+            <a:solidFill>
+              <a:srgbClr val="2FE6C4"/>
+            </a:solidFill>
+            <a:prstDash val="solid"/>
+          </a:ln>
+          <a:effectLst>
+            <a:outerShdw sx="100000" sy="100000" kx="0" ky="0" algn="bl" rotWithShape="0" blurRad="76200" dist="25400" dir="5400000">
+              <a:srgbClr val="14181C">
+                <a:alpha val="25000"/>
+              </a:srgbClr>
+            </a:outerShdw>
+          </a:effectLst>
+        </p:spPr>
+      </p:sp>
+      <p:sp>
+        <p:nvSpPr>
+          <p:cNvPr id="6" name="Shape 4"/>
+          <p:cNvSpPr/>
+          <p:nvPr/>
+        </p:nvSpPr>
+        <p:spPr>
+          <a:xfrm>
+            <a:off x="713232" y="1335024"/>
+            <a:ext cx="100584" cy="100584"/>
+          </a:xfrm>
+          <a:prstGeom prst="ellipse">
+            <a:avLst/>
+          </a:prstGeom>
+          <a:solidFill>
+            <a:srgbClr val="E8A33D"/>
+          </a:solidFill>
+          <a:ln/>
+        </p:spPr>
+      </p:sp>
+      <p:sp>
+        <p:nvSpPr>
+          <p:cNvPr id="7" name="Shape 5"/>
+          <p:cNvSpPr/>
+          <p:nvPr/>
+        </p:nvSpPr>
+        <p:spPr>
+          <a:xfrm>
+            <a:off x="868680" y="1335024"/>
+            <a:ext cx="100584" cy="100584"/>
+          </a:xfrm>
+          <a:prstGeom prst="ellipse">
+            <a:avLst/>
+          </a:prstGeom>
+          <a:solidFill>
+            <a:srgbClr val="2FE6C4"/>
+          </a:solidFill>
+          <a:ln/>
+        </p:spPr>
+      </p:sp>
+      <p:sp>
+        <p:nvSpPr>
+          <p:cNvPr id="8" name="Shape 6"/>
+          <p:cNvSpPr/>
+          <p:nvPr/>
+        </p:nvSpPr>
+        <p:spPr>
+          <a:xfrm>
+            <a:off x="1024128" y="1335024"/>
+            <a:ext cx="100584" cy="100584"/>
+          </a:xfrm>
+          <a:prstGeom prst="ellipse">
+            <a:avLst/>
+          </a:prstGeom>
+          <a:solidFill>
+            <a:srgbClr val="8B7FD9"/>
+          </a:solidFill>
+          <a:ln/>
+        </p:spPr>
+      </p:sp>
+      <p:sp>
+        <p:nvSpPr>
+          <p:cNvPr id="9" name="Text 7"/>
+          <p:cNvSpPr txBox="1"/>
+          <p:nvPr/>
+        </p:nvSpPr>
+        <p:spPr>
+          <a:xfrm>
+            <a:off x="9418320" y="1280160"/>
+            <a:ext cx="2011680" cy="274320"/>
+          </a:xfrm>
+          <a:prstGeom prst="rect">
+            <a:avLst/>
+          </a:prstGeom>
+          <a:noFill/>
+          <a:ln/>
+        </p:spPr>
+        <p:txBody>
+          <a:bodyPr wrap="square" rtlCol="0" anchor="ctr"/>
+          <a:lstStyle/>
+          <a:p>
+            <a:pPr algn="r" indent="0" marL="0">
+              <a:buNone/>
+            </a:pPr>
+            <a:r>
+              <a:rPr lang="en-US" sz="1200" dirty="0">
+                <a:solidFill>
+                  <a:srgbClr val="8A939B"/>
+                </a:solidFill>
+                <a:latin typeface="Calibri" pitchFamily="34" charset="0"/>
+                <a:ea typeface="Calibri" pitchFamily="34" charset="-122"/>
+                <a:cs typeface="Calibri" pitchFamily="34" charset="-120"/>
+              </a:rPr>
+              <a:t>mongosh</a:t>
+            </a:r>
+            <a:endParaRPr lang="en-US" sz="1200" dirty="0"/>
+          </a:p>
+        </p:txBody>
+      </p:sp>
+      <p:sp>
+        <p:nvSpPr>
+          <p:cNvPr id="10" name="Text 8"/>
+          <p:cNvSpPr txBox="1"/>
+          <p:nvPr/>
+        </p:nvSpPr>
+        <p:spPr>
+          <a:xfrm>
+            <a:off x="841248" y="1609344"/>
+            <a:ext cx="10515600" cy="2176272"/>
+          </a:xfrm>
+          <a:prstGeom prst="rect">
+            <a:avLst/>
+          </a:prstGeom>
+          <a:noFill/>
+          <a:ln/>
+        </p:spPr>
+        <p:txBody>
+          <a:bodyPr wrap="square" rtlCol="0" anchor="t"/>
+          <a:lstStyle/>
+          <a:p>
+            <a:pPr indent="0" marL="0">
+              <a:lnSpc>
+                <a:spcPct val="128000"/>
+              </a:lnSpc>
+              <a:buNone/>
+            </a:pPr>
+            <a:r>
+              <a:rPr lang="en-US" sz="1400" dirty="0">
+                <a:solidFill>
+                  <a:srgbClr val="E8EDF0"/>
+                </a:solidFill>
+                <a:latin typeface="Courier New" pitchFamily="34" charset="0"/>
+                <a:ea typeface="Courier New" pitchFamily="34" charset="-122"/>
+                <a:cs typeface="Courier New" pitchFamily="34" charset="-120"/>
+              </a:rPr>
+              <a:t>// Step 1: filter on a unique field, regNo</a:t>
+            </a:r>
+            <a:endParaRPr lang="en-US" sz="1800" dirty="0"/>
+          </a:p>
+          <a:p>
+            <a:pPr indent="0" marL="0">
+              <a:lnSpc>
+                <a:spcPct val="128000"/>
+              </a:lnSpc>
+              <a:buNone/>
+            </a:pPr>
+            <a:r>
+              <a:rPr lang="en-US" sz="1400" dirty="0">
+                <a:solidFill>
+                  <a:srgbClr val="E8EDF0"/>
+                </a:solidFill>
+                <a:latin typeface="Courier New" pitchFamily="34" charset="0"/>
+                <a:ea typeface="Courier New" pitchFamily="34" charset="-122"/>
+                <a:cs typeface="Courier New" pitchFamily="34" charset="-120"/>
+              </a:rPr>
+              <a:t>db.students.updateOne(</a:t>
+            </a:r>
+            <a:endParaRPr lang="en-US" sz="1800" dirty="0"/>
+          </a:p>
+          <a:p>
+            <a:pPr indent="0" marL="0">
+              <a:lnSpc>
+                <a:spcPct val="128000"/>
+              </a:lnSpc>
+              <a:buNone/>
+            </a:pPr>
+            <a:r>
+              <a:rPr lang="en-US" sz="1400" dirty="0">
+                <a:solidFill>
+                  <a:srgbClr val="E8EDF0"/>
+                </a:solidFill>
+                <a:latin typeface="Courier New" pitchFamily="34" charset="0"/>
+                <a:ea typeface="Courier New" pitchFamily="34" charset="-122"/>
+                <a:cs typeface="Courier New" pitchFamily="34" charset="-120"/>
+              </a:rPr>
+              <a:t>  { regNo: "FA21-BCS-045" },</a:t>
+            </a:r>
+            <a:endParaRPr lang="en-US" sz="1800" dirty="0"/>
+          </a:p>
+          <a:p>
+            <a:pPr indent="0" marL="0">
+              <a:lnSpc>
+                <a:spcPct val="128000"/>
+              </a:lnSpc>
+              <a:buNone/>
+            </a:pPr>
+            <a:r>
+              <a:rPr lang="en-US" sz="1400" dirty="0">
+                <a:solidFill>
+                  <a:srgbClr val="E8EDF0"/>
+                </a:solidFill>
+                <a:latin typeface="Courier New" pitchFamily="34" charset="0"/>
+                <a:ea typeface="Courier New" pitchFamily="34" charset="-122"/>
+                <a:cs typeface="Courier New" pitchFamily="34" charset="-120"/>
+              </a:rPr>
+              <a:t>  { $set: { gpa: 3.80 } }</a:t>
+            </a:r>
+            <a:endParaRPr lang="en-US" sz="1800" dirty="0"/>
+          </a:p>
+          <a:p>
+            <a:pPr indent="0" marL="0">
+              <a:lnSpc>
+                <a:spcPct val="128000"/>
+              </a:lnSpc>
+              <a:buNone/>
+            </a:pPr>
+            <a:r>
+              <a:rPr lang="en-US" sz="1400" dirty="0">
+                <a:solidFill>
+                  <a:srgbClr val="E8EDF0"/>
+                </a:solidFill>
+                <a:latin typeface="Courier New" pitchFamily="34" charset="0"/>
+                <a:ea typeface="Courier New" pitchFamily="34" charset="-122"/>
+                <a:cs typeface="Courier New" pitchFamily="34" charset="-120"/>
+              </a:rPr>
+              <a:t>);</a:t>
+            </a:r>
+            <a:endParaRPr lang="en-US" sz="1800" dirty="0"/>
+          </a:p>
+          <a:p>
+            <a:pPr indent="0" marL="0">
+              <a:lnSpc>
+                <a:spcPct val="128000"/>
+              </a:lnSpc>
+              <a:buNone/>
+            </a:pPr>
+            <a:r>
+              <a:rPr lang="en-US" sz="1400" dirty="0">
+                <a:solidFill>
+                  <a:srgbClr val="E8EDF0"/>
+                </a:solidFill>
+                <a:latin typeface="Courier New" pitchFamily="34" charset="0"/>
+                <a:ea typeface="Courier New" pitchFamily="34" charset="-122"/>
+                <a:cs typeface="Courier New" pitchFamily="34" charset="-120"/>
+              </a:rPr>
+              <a:t> </a:t>
+            </a:r>
+            <a:endParaRPr lang="en-US" sz="1800" dirty="0"/>
+          </a:p>
+          <a:p>
+            <a:pPr indent="0" marL="0">
+              <a:lnSpc>
+                <a:spcPct val="128000"/>
+              </a:lnSpc>
+              <a:buNone/>
+            </a:pPr>
+            <a:r>
+              <a:rPr lang="en-US" sz="1400" dirty="0">
+                <a:solidFill>
+                  <a:srgbClr val="E8EDF0"/>
+                </a:solidFill>
+                <a:latin typeface="Courier New" pitchFamily="34" charset="0"/>
+                <a:ea typeface="Courier New" pitchFamily="34" charset="-122"/>
+                <a:cs typeface="Courier New" pitchFamily="34" charset="-120"/>
+              </a:rPr>
+              <a:t>// Result: matchedCount: 1, modifiedCount: 1 — verify before moving on</a:t>
+            </a:r>
+            <a:endParaRPr lang="en-US" sz="1800" dirty="0"/>
+          </a:p>
+        </p:txBody>
+      </p:sp>
+      <p:sp>
+        <p:nvSpPr>
+          <p:cNvPr id="11" name="Shape 9"/>
+          <p:cNvSpPr/>
+          <p:nvPr/>
+        </p:nvSpPr>
+        <p:spPr>
+          <a:xfrm>
+            <a:off x="548640" y="4114800"/>
+            <a:ext cx="11064240" cy="2057400"/>
+          </a:xfrm>
+          <a:prstGeom prst="roundRect">
+            <a:avLst>
+              <a:gd name="adj" fmla="val 3111"/>
+            </a:avLst>
+          </a:prstGeom>
+          <a:solidFill>
+            <a:srgbClr val="FFFFFF"/>
+          </a:solidFill>
+          <a:ln w="19050">
+            <a:solidFill>
+              <a:srgbClr val="E8A33D"/>
+            </a:solidFill>
+            <a:prstDash val="solid"/>
+          </a:ln>
+          <a:effectLst>
+            <a:outerShdw sx="100000" sy="100000" kx="0" ky="0" algn="bl" rotWithShape="0" blurRad="50800" dist="12700" dir="5400000">
+              <a:srgbClr val="1F2429">
+                <a:alpha val="12000"/>
+              </a:srgbClr>
+            </a:outerShdw>
+          </a:effectLst>
+        </p:spPr>
+      </p:sp>
+      <p:sp>
+        <p:nvSpPr>
+          <p:cNvPr id="12" name="Shape 10"/>
+          <p:cNvSpPr/>
+          <p:nvPr/>
+        </p:nvSpPr>
+        <p:spPr>
+          <a:xfrm>
+            <a:off x="731520" y="4279392"/>
+            <a:ext cx="274320" cy="82296"/>
+          </a:xfrm>
+          <a:prstGeom prst="rect">
+            <a:avLst/>
+          </a:prstGeom>
+          <a:solidFill>
+            <a:srgbClr val="E8A33D"/>
+          </a:solidFill>
+          <a:ln/>
+        </p:spPr>
+      </p:sp>
+      <p:sp>
+        <p:nvSpPr>
+          <p:cNvPr id="13" name="Text 11"/>
+          <p:cNvSpPr txBox="1"/>
+          <p:nvPr/>
+        </p:nvSpPr>
+        <p:spPr>
+          <a:xfrm>
+            <a:off x="731520" y="4407408"/>
+            <a:ext cx="10698480" cy="237744"/>
+          </a:xfrm>
+          <a:prstGeom prst="rect">
+            <a:avLst/>
+          </a:prstGeom>
+          <a:noFill/>
+          <a:ln/>
+        </p:spPr>
+        <p:txBody>
+          <a:bodyPr wrap="square" rtlCol="0" anchor="ctr"/>
+          <a:lstStyle/>
+          <a:p>
+            <a:pPr indent="0" marL="0">
+              <a:buNone/>
+            </a:pPr>
+            <a:r>
+              <a:rPr lang="en-US" sz="1200" b="1" spc="100" kern="0" dirty="0">
+                <a:solidFill>
+                  <a:srgbClr val="E8A33D"/>
+                </a:solidFill>
+                <a:latin typeface="Calibri" pitchFamily="34" charset="0"/>
+                <a:ea typeface="Calibri" pitchFamily="34" charset="-122"/>
+                <a:cs typeface="Calibri" pitchFamily="34" charset="-120"/>
+              </a:rPr>
+              <a:t>WHY THIS STEP ORDER</a:t>
+            </a:r>
+            <a:endParaRPr lang="en-US" sz="1200" dirty="0"/>
+          </a:p>
+        </p:txBody>
+      </p:sp>
+      <p:sp>
+        <p:nvSpPr>
+          <p:cNvPr id="14" name="Text 12"/>
+          <p:cNvSpPr txBox="1"/>
+          <p:nvPr/>
+        </p:nvSpPr>
+        <p:spPr>
+          <a:xfrm>
+            <a:off x="731520" y="4663440"/>
+            <a:ext cx="10698480" cy="1371600"/>
+          </a:xfrm>
+          <a:prstGeom prst="rect">
+            <a:avLst/>
+          </a:prstGeom>
+          <a:noFill/>
+          <a:ln/>
+        </p:spPr>
+        <p:txBody>
+          <a:bodyPr wrap="square" rtlCol="0" anchor="t"/>
+          <a:lstStyle/>
+          <a:p>
+            <a:pPr indent="0" marL="0">
+              <a:lnSpc>
+                <a:spcPct val="118000"/>
+              </a:lnSpc>
+              <a:buNone/>
+            </a:pPr>
+            <a:r>
+              <a:rPr lang="en-US" sz="1200" dirty="0">
+                <a:solidFill>
+                  <a:srgbClr val="1F2429"/>
+                </a:solidFill>
+                <a:latin typeface="Calibri" pitchFamily="34" charset="0"/>
+                <a:ea typeface="Calibri" pitchFamily="34" charset="-122"/>
+                <a:cs typeface="Calibri" pitchFamily="34" charset="-120"/>
+              </a:rPr>
+              <a:t>A unique filter guarantees exactly one document changes. Apply the same discipline to deleteOne: a shared field like isActive can silently match the wrong records.</a:t>
+            </a:r>
+            <a:endParaRPr lang="en-US" sz="1200" dirty="0"/>
           </a:p>
         </p:txBody>
       </p:sp>
@@ -8239,7 +9695,7 @@
               <a:buNone/>
             </a:pPr>
             <a:r>
-              <a:rPr lang="en-US" sz="1500" b="1" dirty="0">
+              <a:rPr lang="en-US" sz="1800" b="1" dirty="0">
                 <a:solidFill>
                   <a:srgbClr val="14181C"/>
                 </a:solidFill>
@@ -8249,7 +9705,7 @@
               </a:rPr>
               <a:t>1</a:t>
             </a:r>
-            <a:endParaRPr lang="en-US" sz="1500" dirty="0"/>
+            <a:endParaRPr lang="en-US" sz="1800" dirty="0"/>
           </a:p>
         </p:txBody>
       </p:sp>
@@ -8278,7 +9734,7 @@
               <a:buNone/>
             </a:pPr>
             <a:r>
-              <a:rPr lang="en-US" sz="1450" dirty="0">
+              <a:rPr lang="en-US" sz="1800" dirty="0">
                 <a:solidFill>
                   <a:srgbClr val="1F2429"/>
                 </a:solidFill>
@@ -8288,7 +9744,7 @@
               </a:rPr>
               <a:t>MongoDB architecture: mongod, databases, collections, documents</a:t>
             </a:r>
-            <a:endParaRPr lang="en-US" sz="1450" dirty="0"/>
+            <a:endParaRPr lang="en-US" sz="1800" dirty="0"/>
           </a:p>
         </p:txBody>
       </p:sp>
@@ -8337,7 +9793,7 @@
               <a:buNone/>
             </a:pPr>
             <a:r>
-              <a:rPr lang="en-US" sz="1500" b="1" dirty="0">
+              <a:rPr lang="en-US" sz="1800" b="1" dirty="0">
                 <a:solidFill>
                   <a:srgbClr val="14181C"/>
                 </a:solidFill>
@@ -8347,7 +9803,7 @@
               </a:rPr>
               <a:t>2</a:t>
             </a:r>
-            <a:endParaRPr lang="en-US" sz="1500" dirty="0"/>
+            <a:endParaRPr lang="en-US" sz="1800" dirty="0"/>
           </a:p>
         </p:txBody>
       </p:sp>
@@ -8376,7 +9832,7 @@
               <a:buNone/>
             </a:pPr>
             <a:r>
-              <a:rPr lang="en-US" sz="1450" dirty="0">
+              <a:rPr lang="en-US" sz="1800" dirty="0">
                 <a:solidFill>
                   <a:srgbClr val="1F2429"/>
                 </a:solidFill>
@@ -8386,7 +9842,7 @@
               </a:rPr>
               <a:t>The document model vs. the relational row/table model</a:t>
             </a:r>
-            <a:endParaRPr lang="en-US" sz="1450" dirty="0"/>
+            <a:endParaRPr lang="en-US" sz="1800" dirty="0"/>
           </a:p>
         </p:txBody>
       </p:sp>
@@ -8435,7 +9891,7 @@
               <a:buNone/>
             </a:pPr>
             <a:r>
-              <a:rPr lang="en-US" sz="1500" b="1" dirty="0">
+              <a:rPr lang="en-US" sz="1800" b="1" dirty="0">
                 <a:solidFill>
                   <a:srgbClr val="14181C"/>
                 </a:solidFill>
@@ -8445,7 +9901,7 @@
               </a:rPr>
               <a:t>3</a:t>
             </a:r>
-            <a:endParaRPr lang="en-US" sz="1500" dirty="0"/>
+            <a:endParaRPr lang="en-US" sz="1800" dirty="0"/>
           </a:p>
         </p:txBody>
       </p:sp>
@@ -8474,7 +9930,7 @@
               <a:buNone/>
             </a:pPr>
             <a:r>
-              <a:rPr lang="en-US" sz="1450" dirty="0">
+              <a:rPr lang="en-US" sz="1800" dirty="0">
                 <a:solidFill>
                   <a:srgbClr val="1F2429"/>
                 </a:solidFill>
@@ -8484,7 +9940,7 @@
               </a:rPr>
               <a:t>BSON — why binary JSON, not plain text</a:t>
             </a:r>
-            <a:endParaRPr lang="en-US" sz="1450" dirty="0"/>
+            <a:endParaRPr lang="en-US" sz="1800" dirty="0"/>
           </a:p>
         </p:txBody>
       </p:sp>
@@ -8533,7 +9989,7 @@
               <a:buNone/>
             </a:pPr>
             <a:r>
-              <a:rPr lang="en-US" sz="1500" b="1" dirty="0">
+              <a:rPr lang="en-US" sz="1800" b="1" dirty="0">
                 <a:solidFill>
                   <a:srgbClr val="14181C"/>
                 </a:solidFill>
@@ -8543,7 +9999,7 @@
               </a:rPr>
               <a:t>4</a:t>
             </a:r>
-            <a:endParaRPr lang="en-US" sz="1500" dirty="0"/>
+            <a:endParaRPr lang="en-US" sz="1800" dirty="0"/>
           </a:p>
         </p:txBody>
       </p:sp>
@@ -8572,7 +10028,7 @@
               <a:buNone/>
             </a:pPr>
             <a:r>
-              <a:rPr lang="en-US" sz="1450" dirty="0">
+              <a:rPr lang="en-US" sz="1800" dirty="0">
                 <a:solidFill>
                   <a:srgbClr val="1F2429"/>
                 </a:solidFill>
@@ -8582,7 +10038,7 @@
               </a:rPr>
               <a:t>Core data types: ObjectId, dates, arrays, embedded documents</a:t>
             </a:r>
-            <a:endParaRPr lang="en-US" sz="1450" dirty="0"/>
+            <a:endParaRPr lang="en-US" sz="1800" dirty="0"/>
           </a:p>
         </p:txBody>
       </p:sp>
@@ -8631,7 +10087,7 @@
               <a:buNone/>
             </a:pPr>
             <a:r>
-              <a:rPr lang="en-US" sz="1500" b="1" dirty="0">
+              <a:rPr lang="en-US" sz="1800" b="1" dirty="0">
                 <a:solidFill>
                   <a:srgbClr val="14181C"/>
                 </a:solidFill>
@@ -8641,7 +10097,7 @@
               </a:rPr>
               <a:t>5</a:t>
             </a:r>
-            <a:endParaRPr lang="en-US" sz="1500" dirty="0"/>
+            <a:endParaRPr lang="en-US" sz="1800" dirty="0"/>
           </a:p>
         </p:txBody>
       </p:sp>
@@ -8670,7 +10126,7 @@
               <a:buNone/>
             </a:pPr>
             <a:r>
-              <a:rPr lang="en-US" sz="1450" dirty="0">
+              <a:rPr lang="en-US" sz="1800" dirty="0">
                 <a:solidFill>
                   <a:srgbClr val="1F2429"/>
                 </a:solidFill>
@@ -8680,7 +10136,7 @@
               </a:rPr>
               <a:t>Modeling relationships by embedding vs. referencing</a:t>
             </a:r>
-            <a:endParaRPr lang="en-US" sz="1450" dirty="0"/>
+            <a:endParaRPr lang="en-US" sz="1800" dirty="0"/>
           </a:p>
         </p:txBody>
       </p:sp>
@@ -8729,7 +10185,7 @@
               <a:buNone/>
             </a:pPr>
             <a:r>
-              <a:rPr lang="en-US" sz="1500" b="1" dirty="0">
+              <a:rPr lang="en-US" sz="1800" b="1" dirty="0">
                 <a:solidFill>
                   <a:srgbClr val="14181C"/>
                 </a:solidFill>
@@ -8739,7 +10195,7 @@
               </a:rPr>
               <a:t>6</a:t>
             </a:r>
-            <a:endParaRPr lang="en-US" sz="1500" dirty="0"/>
+            <a:endParaRPr lang="en-US" sz="1800" dirty="0"/>
           </a:p>
         </p:txBody>
       </p:sp>
@@ -8768,7 +10224,7 @@
               <a:buNone/>
             </a:pPr>
             <a:r>
-              <a:rPr lang="en-US" sz="1450" dirty="0">
+              <a:rPr lang="en-US" sz="1800" dirty="0">
                 <a:solidFill>
                   <a:srgbClr val="1F2429"/>
                 </a:solidFill>
@@ -8778,7 +10234,7 @@
               </a:rPr>
               <a:t>Real CRUD syntax: insert, find, update, delete</a:t>
             </a:r>
-            <a:endParaRPr lang="en-US" sz="1450" dirty="0"/>
+            <a:endParaRPr lang="en-US" sz="1800" dirty="0"/>
           </a:p>
         </p:txBody>
       </p:sp>
@@ -8827,7 +10283,7 @@
               <a:buNone/>
             </a:pPr>
             <a:r>
-              <a:rPr lang="en-US" sz="1500" b="1" dirty="0">
+              <a:rPr lang="en-US" sz="1800" b="1" dirty="0">
                 <a:solidFill>
                   <a:srgbClr val="14181C"/>
                 </a:solidFill>
@@ -8837,7 +10293,7 @@
               </a:rPr>
               <a:t>7</a:t>
             </a:r>
-            <a:endParaRPr lang="en-US" sz="1500" dirty="0"/>
+            <a:endParaRPr lang="en-US" sz="1800" dirty="0"/>
           </a:p>
         </p:txBody>
       </p:sp>
@@ -8866,7 +10322,7 @@
               <a:buNone/>
             </a:pPr>
             <a:r>
-              <a:rPr lang="en-US" sz="1450" dirty="0">
+              <a:rPr lang="en-US" sz="1800" dirty="0">
                 <a:solidFill>
                   <a:srgbClr val="1F2429"/>
                 </a:solidFill>
@@ -8876,7 +10332,7 @@
               </a:rPr>
               <a:t>Query operators ($gt, $in, $and) and projections</a:t>
             </a:r>
-            <a:endParaRPr lang="en-US" sz="1450" dirty="0"/>
+            <a:endParaRPr lang="en-US" sz="1800" dirty="0"/>
           </a:p>
         </p:txBody>
       </p:sp>
@@ -8925,7 +10381,7 @@
               <a:buNone/>
             </a:pPr>
             <a:r>
-              <a:rPr lang="en-US" sz="1500" b="1" dirty="0">
+              <a:rPr lang="en-US" sz="1800" b="1" dirty="0">
                 <a:solidFill>
                   <a:srgbClr val="14181C"/>
                 </a:solidFill>
@@ -8935,7 +10391,7 @@
               </a:rPr>
               <a:t>8</a:t>
             </a:r>
-            <a:endParaRPr lang="en-US" sz="1500" dirty="0"/>
+            <a:endParaRPr lang="en-US" sz="1800" dirty="0"/>
           </a:p>
         </p:txBody>
       </p:sp>
@@ -8964,7 +10420,7 @@
               <a:buNone/>
             </a:pPr>
             <a:r>
-              <a:rPr lang="en-US" sz="1450" dirty="0">
+              <a:rPr lang="en-US" sz="1800" dirty="0">
                 <a:solidFill>
                   <a:srgbClr val="1F2429"/>
                 </a:solidFill>
@@ -8974,7 +10430,7 @@
               </a:rPr>
               <a:t>Realistic use cases for a document database</a:t>
             </a:r>
-            <a:endParaRPr lang="en-US" sz="1450" dirty="0"/>
+            <a:endParaRPr lang="en-US" sz="1800" dirty="0"/>
           </a:p>
         </p:txBody>
       </p:sp>
@@ -9003,7 +10459,7 @@
               <a:buNone/>
             </a:pPr>
             <a:r>
-              <a:rPr lang="en-US" sz="1000" u="sng" dirty="0">
+              <a:rPr lang="en-US" sz="1200" u="sng" dirty="0">
                 <a:solidFill>
                   <a:srgbClr val="8A939B"/>
                 </a:solidFill>
@@ -9024,7 +10480,7 @@
               <a:buNone/>
             </a:pPr>
             <a:r>
-              <a:rPr lang="en-US" sz="1000" dirty="0">
+              <a:rPr lang="en-US" sz="1200" dirty="0">
                 <a:solidFill>
                   <a:srgbClr val="8A939B"/>
                 </a:solidFill>
@@ -9034,7 +10490,531 @@
               </a:rPr>
               <a:t>  ·  2</a:t>
             </a:r>
-            <a:endParaRPr lang="en-US" sz="1000" dirty="0"/>
+            <a:endParaRPr lang="en-US" sz="1200" dirty="0"/>
+          </a:p>
+        </p:txBody>
+      </p:sp>
+    </p:spTree>
+  </p:cSld>
+  <p:clrMapOvr>
+    <a:masterClrMapping/>
+  </p:clrMapOvr>
+</p:sld>
+</file>
+
+<file path=ppt/slides/slide20.xml><?xml version="1.0" encoding="utf-8"?>
+<p:sld xmlns:a="http://schemas.openxmlformats.org/drawingml/2006/main" xmlns:r="http://schemas.openxmlformats.org/officeDocument/2006/relationships" xmlns:p="http://schemas.openxmlformats.org/presentationml/2006/main">
+  <p:cSld name="Slide 12">
+    <p:bg>
+      <p:bgPr>
+        <a:solidFill>
+          <a:srgbClr val="F7F8F9"/>
+        </a:solidFill>
+      </p:bgPr>
+    </p:bg>
+    <p:spTree>
+      <p:nvGrpSpPr>
+        <p:cNvPr id="1" name=""/>
+        <p:cNvGrpSpPr/>
+        <p:nvPr/>
+      </p:nvGrpSpPr>
+      <p:grpSpPr>
+        <a:xfrm>
+          <a:off x="0" y="0"/>
+          <a:ext cx="0" cy="0"/>
+          <a:chOff x="0" y="0"/>
+          <a:chExt cx="0" cy="0"/>
+        </a:xfrm>
+      </p:grpSpPr>
+      <p:sp>
+        <p:nvSpPr>
+          <p:cNvPr id="2" name="Text 0"/>
+          <p:cNvSpPr txBox="1"/>
+          <p:nvPr/>
+        </p:nvSpPr>
+        <p:spPr>
+          <a:xfrm>
+            <a:off x="548640" y="320040"/>
+            <a:ext cx="9144000" cy="292608"/>
+          </a:xfrm>
+          <a:prstGeom prst="rect">
+            <a:avLst/>
+          </a:prstGeom>
+          <a:noFill/>
+          <a:ln/>
+        </p:spPr>
+        <p:txBody>
+          <a:bodyPr wrap="square" rtlCol="0" anchor="ctr"/>
+          <a:lstStyle/>
+          <a:p>
+            <a:pPr indent="0" marL="0">
+              <a:buNone/>
+            </a:pPr>
+            <a:r>
+              <a:rPr lang="en-US" sz="1200" b="1" spc="150" kern="0" dirty="0">
+                <a:solidFill>
+                  <a:srgbClr val="8B7FD9"/>
+                </a:solidFill>
+                <a:latin typeface="Calibri" pitchFamily="34" charset="0"/>
+                <a:ea typeface="Calibri" pitchFamily="34" charset="-122"/>
+                <a:cs typeface="Calibri" pitchFamily="34" charset="-120"/>
+              </a:rPr>
+              <a:t>CRUD — READ</a:t>
+            </a:r>
+            <a:endParaRPr lang="en-US" sz="1200" dirty="0"/>
+          </a:p>
+        </p:txBody>
+      </p:sp>
+      <p:sp>
+        <p:nvSpPr>
+          <p:cNvPr id="3" name="Text 1"/>
+          <p:cNvSpPr txBox="1"/>
+          <p:nvPr/>
+        </p:nvSpPr>
+        <p:spPr>
+          <a:xfrm>
+            <a:off x="548640" y="566928"/>
+            <a:ext cx="11064240" cy="640080"/>
+          </a:xfrm>
+          <a:prstGeom prst="rect">
+            <a:avLst/>
+          </a:prstGeom>
+          <a:noFill/>
+          <a:ln/>
+        </p:spPr>
+        <p:txBody>
+          <a:bodyPr wrap="square" rtlCol="0" anchor="ctr"/>
+          <a:lstStyle/>
+          <a:p>
+            <a:pPr indent="0" marL="0">
+              <a:buNone/>
+            </a:pPr>
+            <a:r>
+              <a:rPr lang="en-US" sz="2500" b="1" dirty="0">
+                <a:solidFill>
+                  <a:srgbClr val="1F2429"/>
+                </a:solidFill>
+                <a:latin typeface="Calibri" pitchFamily="34" charset="0"/>
+                <a:ea typeface="Calibri" pitchFamily="34" charset="-122"/>
+                <a:cs typeface="Calibri" pitchFamily="34" charset="-120"/>
+              </a:rPr>
+              <a:t>Worked Example: Projection Keeps Results Small</a:t>
+            </a:r>
+            <a:endParaRPr lang="en-US" sz="2500" dirty="0"/>
+          </a:p>
+        </p:txBody>
+      </p:sp>
+      <p:sp>
+        <p:nvSpPr>
+          <p:cNvPr id="4" name="Text 2"/>
+          <p:cNvSpPr txBox="1"/>
+          <p:nvPr/>
+        </p:nvSpPr>
+        <p:spPr>
+          <a:xfrm>
+            <a:off x="9951415" y="6455664"/>
+            <a:ext cx="2011680" cy="292608"/>
+          </a:xfrm>
+          <a:prstGeom prst="rect">
+            <a:avLst/>
+          </a:prstGeom>
+          <a:noFill/>
+          <a:ln/>
+        </p:spPr>
+        <p:txBody>
+          <a:bodyPr wrap="square" rtlCol="0" anchor="ctr"/>
+          <a:lstStyle/>
+          <a:p>
+            <a:pPr algn="r" indent="0" marL="0">
+              <a:buNone/>
+            </a:pPr>
+            <a:r>
+              <a:rPr lang="en-US" sz="1200" u="sng" dirty="0">
+                <a:solidFill>
+                  <a:srgbClr val="8A939B"/>
+                </a:solidFill>
+                <a:latin typeface="Calibri" pitchFamily="34" charset="0"/>
+                <a:ea typeface="Calibri" pitchFamily="34" charset="-122"/>
+                <a:cs typeface="Calibri" pitchFamily="34" charset="-120"/>
+                <a:hlinkClick r:id="rId1" invalidUrl="" action="" tgtFrame="" tooltip="" history="1" highlightClick="0" endSnd="0">
+                  <a:extLst>
+                    <a:ext uri="{A12FA001-AC4F-418D-AE19-62706E023703}">
+                      <ahyp:hlinkClr xmlns:ahyp="http://schemas.microsoft.com/office/drawing/2018/hyperlinkcolor" val="tx"/>
+                    </a:ext>
+                  </a:extLst>
+                </a:hlinkClick>
+              </a:rPr>
+              <a:t>cuinotes.com</a:t>
+            </a:r>
+            <a:pPr algn="r" indent="0" marL="0">
+              <a:buNone/>
+            </a:pPr>
+            <a:r>
+              <a:rPr lang="en-US" sz="1200" dirty="0">
+                <a:solidFill>
+                  <a:srgbClr val="8A939B"/>
+                </a:solidFill>
+                <a:latin typeface="Calibri" pitchFamily="34" charset="0"/>
+                <a:ea typeface="Calibri" pitchFamily="34" charset="-122"/>
+                <a:cs typeface="Calibri" pitchFamily="34" charset="-120"/>
+              </a:rPr>
+              <a:t>  ·  18</a:t>
+            </a:r>
+            <a:endParaRPr lang="en-US" sz="1200" dirty="0"/>
+          </a:p>
+        </p:txBody>
+      </p:sp>
+      <p:sp>
+        <p:nvSpPr>
+          <p:cNvPr id="5" name="Shape 3"/>
+          <p:cNvSpPr/>
+          <p:nvPr/>
+        </p:nvSpPr>
+        <p:spPr>
+          <a:xfrm>
+            <a:off x="548640" y="1280160"/>
+            <a:ext cx="11064240" cy="4114800"/>
+          </a:xfrm>
+          <a:prstGeom prst="roundRect">
+            <a:avLst>
+              <a:gd name="adj" fmla="val 1778"/>
+            </a:avLst>
+          </a:prstGeom>
+          <a:solidFill>
+            <a:srgbClr val="1F2429"/>
+          </a:solidFill>
+          <a:ln w="19050">
+            <a:solidFill>
+              <a:srgbClr val="2FE6C4"/>
+            </a:solidFill>
+            <a:prstDash val="solid"/>
+          </a:ln>
+          <a:effectLst>
+            <a:outerShdw sx="100000" sy="100000" kx="0" ky="0" algn="bl" rotWithShape="0" blurRad="76200" dist="25400" dir="5400000">
+              <a:srgbClr val="14181C">
+                <a:alpha val="25000"/>
+              </a:srgbClr>
+            </a:outerShdw>
+          </a:effectLst>
+        </p:spPr>
+      </p:sp>
+      <p:sp>
+        <p:nvSpPr>
+          <p:cNvPr id="6" name="Shape 4"/>
+          <p:cNvSpPr/>
+          <p:nvPr/>
+        </p:nvSpPr>
+        <p:spPr>
+          <a:xfrm>
+            <a:off x="713232" y="1426464"/>
+            <a:ext cx="100584" cy="100584"/>
+          </a:xfrm>
+          <a:prstGeom prst="ellipse">
+            <a:avLst/>
+          </a:prstGeom>
+          <a:solidFill>
+            <a:srgbClr val="E8A33D"/>
+          </a:solidFill>
+          <a:ln/>
+        </p:spPr>
+      </p:sp>
+      <p:sp>
+        <p:nvSpPr>
+          <p:cNvPr id="7" name="Shape 5"/>
+          <p:cNvSpPr/>
+          <p:nvPr/>
+        </p:nvSpPr>
+        <p:spPr>
+          <a:xfrm>
+            <a:off x="868680" y="1426464"/>
+            <a:ext cx="100584" cy="100584"/>
+          </a:xfrm>
+          <a:prstGeom prst="ellipse">
+            <a:avLst/>
+          </a:prstGeom>
+          <a:solidFill>
+            <a:srgbClr val="2FE6C4"/>
+          </a:solidFill>
+          <a:ln/>
+        </p:spPr>
+      </p:sp>
+      <p:sp>
+        <p:nvSpPr>
+          <p:cNvPr id="8" name="Shape 6"/>
+          <p:cNvSpPr/>
+          <p:nvPr/>
+        </p:nvSpPr>
+        <p:spPr>
+          <a:xfrm>
+            <a:off x="1024128" y="1426464"/>
+            <a:ext cx="100584" cy="100584"/>
+          </a:xfrm>
+          <a:prstGeom prst="ellipse">
+            <a:avLst/>
+          </a:prstGeom>
+          <a:solidFill>
+            <a:srgbClr val="8B7FD9"/>
+          </a:solidFill>
+          <a:ln/>
+        </p:spPr>
+      </p:sp>
+      <p:sp>
+        <p:nvSpPr>
+          <p:cNvPr id="9" name="Text 7"/>
+          <p:cNvSpPr txBox="1"/>
+          <p:nvPr/>
+        </p:nvSpPr>
+        <p:spPr>
+          <a:xfrm>
+            <a:off x="9418320" y="1371600"/>
+            <a:ext cx="2011680" cy="274320"/>
+          </a:xfrm>
+          <a:prstGeom prst="rect">
+            <a:avLst/>
+          </a:prstGeom>
+          <a:noFill/>
+          <a:ln/>
+        </p:spPr>
+        <p:txBody>
+          <a:bodyPr wrap="square" rtlCol="0" anchor="ctr"/>
+          <a:lstStyle/>
+          <a:p>
+            <a:pPr algn="r" indent="0" marL="0">
+              <a:buNone/>
+            </a:pPr>
+            <a:r>
+              <a:rPr lang="en-US" sz="1200" dirty="0">
+                <a:solidFill>
+                  <a:srgbClr val="8A939B"/>
+                </a:solidFill>
+                <a:latin typeface="Calibri" pitchFamily="34" charset="0"/>
+                <a:ea typeface="Calibri" pitchFamily="34" charset="-122"/>
+                <a:cs typeface="Calibri" pitchFamily="34" charset="-120"/>
+              </a:rPr>
+              <a:t>mongosh</a:t>
+            </a:r>
+            <a:endParaRPr lang="en-US" sz="1200" dirty="0"/>
+          </a:p>
+        </p:txBody>
+      </p:sp>
+      <p:sp>
+        <p:nvSpPr>
+          <p:cNvPr id="10" name="Text 8"/>
+          <p:cNvSpPr txBox="1"/>
+          <p:nvPr/>
+        </p:nvSpPr>
+        <p:spPr>
+          <a:xfrm>
+            <a:off x="841248" y="1700784"/>
+            <a:ext cx="10515600" cy="3547872"/>
+          </a:xfrm>
+          <a:prstGeom prst="rect">
+            <a:avLst/>
+          </a:prstGeom>
+          <a:noFill/>
+          <a:ln/>
+        </p:spPr>
+        <p:txBody>
+          <a:bodyPr wrap="square" rtlCol="0" anchor="t"/>
+          <a:lstStyle/>
+          <a:p>
+            <a:pPr indent="0" marL="0">
+              <a:lnSpc>
+                <a:spcPct val="128000"/>
+              </a:lnSpc>
+              <a:buNone/>
+            </a:pPr>
+            <a:r>
+              <a:rPr lang="en-US" sz="1400" dirty="0">
+                <a:solidFill>
+                  <a:srgbClr val="7C8792"/>
+                </a:solidFill>
+                <a:latin typeface="Courier New" pitchFamily="34" charset="0"/>
+                <a:ea typeface="Courier New" pitchFamily="34" charset="-122"/>
+                <a:cs typeface="Courier New" pitchFamily="34" charset="-120"/>
+              </a:rPr>
+              <a:t>// Without projection: the whole document comes back</a:t>
+            </a:r>
+            <a:endParaRPr lang="en-US" sz="1800" dirty="0"/>
+          </a:p>
+          <a:p>
+            <a:pPr indent="0" marL="0">
+              <a:lnSpc>
+                <a:spcPct val="128000"/>
+              </a:lnSpc>
+              <a:buNone/>
+            </a:pPr>
+            <a:r>
+              <a:rPr lang="en-US" sz="1400" dirty="0">
+                <a:solidFill>
+                  <a:srgbClr val="E8EDF0"/>
+                </a:solidFill>
+                <a:latin typeface="Courier New" pitchFamily="34" charset="0"/>
+                <a:ea typeface="Courier New" pitchFamily="34" charset="-122"/>
+                <a:cs typeface="Courier New" pitchFamily="34" charset="-120"/>
+              </a:rPr>
+              <a:t>db.students.find({ gpa: { $gt: 3.5 } });</a:t>
+            </a:r>
+            <a:endParaRPr lang="en-US" sz="1800" dirty="0"/>
+          </a:p>
+          <a:p>
+            <a:pPr indent="0" marL="0">
+              <a:lnSpc>
+                <a:spcPct val="128000"/>
+              </a:lnSpc>
+              <a:buNone/>
+            </a:pPr>
+            <a:r>
+              <a:rPr lang="en-US" sz="1400" dirty="0">
+                <a:solidFill>
+                  <a:srgbClr val="E8EDF0"/>
+                </a:solidFill>
+                <a:latin typeface="Courier New" pitchFamily="34" charset="0"/>
+                <a:ea typeface="Courier New" pitchFamily="34" charset="-122"/>
+                <a:cs typeface="Courier New" pitchFamily="34" charset="-120"/>
+              </a:rPr>
+              <a:t> </a:t>
+            </a:r>
+            <a:endParaRPr lang="en-US" sz="1800" dirty="0"/>
+          </a:p>
+          <a:p>
+            <a:pPr indent="0" marL="0">
+              <a:lnSpc>
+                <a:spcPct val="128000"/>
+              </a:lnSpc>
+              <a:buNone/>
+            </a:pPr>
+            <a:r>
+              <a:rPr lang="en-US" sz="1400" dirty="0">
+                <a:solidFill>
+                  <a:srgbClr val="7C8792"/>
+                </a:solidFill>
+                <a:latin typeface="Courier New" pitchFamily="34" charset="0"/>
+                <a:ea typeface="Courier New" pitchFamily="34" charset="-122"/>
+                <a:cs typeface="Courier New" pitchFamily="34" charset="-120"/>
+              </a:rPr>
+              <a:t>// With projection: only the fields you need</a:t>
+            </a:r>
+            <a:endParaRPr lang="en-US" sz="1800" dirty="0"/>
+          </a:p>
+          <a:p>
+            <a:pPr indent="0" marL="0">
+              <a:lnSpc>
+                <a:spcPct val="128000"/>
+              </a:lnSpc>
+              <a:buNone/>
+            </a:pPr>
+            <a:r>
+              <a:rPr lang="en-US" sz="1400" dirty="0">
+                <a:solidFill>
+                  <a:srgbClr val="E8EDF0"/>
+                </a:solidFill>
+                <a:latin typeface="Courier New" pitchFamily="34" charset="0"/>
+                <a:ea typeface="Courier New" pitchFamily="34" charset="-122"/>
+                <a:cs typeface="Courier New" pitchFamily="34" charset="-120"/>
+              </a:rPr>
+              <a:t>db.students.find(</a:t>
+            </a:r>
+            <a:endParaRPr lang="en-US" sz="1800" dirty="0"/>
+          </a:p>
+          <a:p>
+            <a:pPr indent="0" marL="0">
+              <a:lnSpc>
+                <a:spcPct val="128000"/>
+              </a:lnSpc>
+              <a:buNone/>
+            </a:pPr>
+            <a:r>
+              <a:rPr lang="en-US" sz="1400" dirty="0">
+                <a:solidFill>
+                  <a:srgbClr val="E8EDF0"/>
+                </a:solidFill>
+                <a:latin typeface="Courier New" pitchFamily="34" charset="0"/>
+                <a:ea typeface="Courier New" pitchFamily="34" charset="-122"/>
+                <a:cs typeface="Courier New" pitchFamily="34" charset="-120"/>
+              </a:rPr>
+              <a:t>  { gpa: { $gt: 3.5 } },</a:t>
+            </a:r>
+            <a:endParaRPr lang="en-US" sz="1800" dirty="0"/>
+          </a:p>
+          <a:p>
+            <a:pPr indent="0" marL="0">
+              <a:lnSpc>
+                <a:spcPct val="128000"/>
+              </a:lnSpc>
+              <a:buNone/>
+            </a:pPr>
+            <a:r>
+              <a:rPr lang="en-US" sz="1400" dirty="0">
+                <a:solidFill>
+                  <a:srgbClr val="E8EDF0"/>
+                </a:solidFill>
+                <a:latin typeface="Courier New" pitchFamily="34" charset="0"/>
+                <a:ea typeface="Courier New" pitchFamily="34" charset="-122"/>
+                <a:cs typeface="Courier New" pitchFamily="34" charset="-120"/>
+              </a:rPr>
+              <a:t>  { name: 1, gpa: 1, _id: 0 }</a:t>
+            </a:r>
+            <a:endParaRPr lang="en-US" sz="1800" dirty="0"/>
+          </a:p>
+          <a:p>
+            <a:pPr indent="0" marL="0">
+              <a:lnSpc>
+                <a:spcPct val="128000"/>
+              </a:lnSpc>
+              <a:buNone/>
+            </a:pPr>
+            <a:r>
+              <a:rPr lang="en-US" sz="1400" dirty="0">
+                <a:solidFill>
+                  <a:srgbClr val="E8EDF0"/>
+                </a:solidFill>
+                <a:latin typeface="Courier New" pitchFamily="34" charset="0"/>
+                <a:ea typeface="Courier New" pitchFamily="34" charset="-122"/>
+                <a:cs typeface="Courier New" pitchFamily="34" charset="-120"/>
+              </a:rPr>
+              <a:t>);</a:t>
+            </a:r>
+            <a:endParaRPr lang="en-US" sz="1800" dirty="0"/>
+          </a:p>
+        </p:txBody>
+      </p:sp>
+      <p:sp>
+        <p:nvSpPr>
+          <p:cNvPr id="11" name="Text 9"/>
+          <p:cNvSpPr txBox="1"/>
+          <p:nvPr/>
+        </p:nvSpPr>
+        <p:spPr>
+          <a:xfrm>
+            <a:off x="548640" y="5532120"/>
+            <a:ext cx="11064240" cy="365760"/>
+          </a:xfrm>
+          <a:prstGeom prst="rect">
+            <a:avLst/>
+          </a:prstGeom>
+          <a:noFill/>
+          <a:ln/>
+        </p:spPr>
+        <p:txBody>
+          <a:bodyPr wrap="square" rtlCol="0" anchor="ctr"/>
+          <a:lstStyle/>
+          <a:p>
+            <a:pPr indent="0" marL="0">
+              <a:buNone/>
+            </a:pPr>
+            <a:r>
+              <a:rPr lang="en-US" sz="1200" dirty="0">
+                <a:solidFill>
+                  <a:srgbClr val="6B7480"/>
+                </a:solidFill>
+                <a:latin typeface="Calibri" pitchFamily="34" charset="0"/>
+                <a:ea typeface="Calibri" pitchFamily="34" charset="-122"/>
+                <a:cs typeface="Calibri" pitchFamily="34" charset="-120"/>
+              </a:rPr>
+              <a:t>The second argument mirrors SQL's SELECT column list. Smaller results mean less network traffic and faster responses.</a:t>
+            </a:r>
+            <a:endParaRPr lang="en-US" sz="1200" dirty="0"/>
           </a:p>
         </p:txBody>
       </p:sp>
@@ -9173,7 +11153,7 @@
               <a:buNone/>
             </a:pPr>
             <a:r>
-              <a:rPr lang="en-US" sz="1000" u="sng" dirty="0">
+              <a:rPr lang="en-US" sz="1200" u="sng" dirty="0">
                 <a:solidFill>
                   <a:srgbClr val="8A939B"/>
                 </a:solidFill>
@@ -9194,7 +11174,7 @@
               <a:buNone/>
             </a:pPr>
             <a:r>
-              <a:rPr lang="en-US" sz="1000" dirty="0">
+              <a:rPr lang="en-US" sz="1200" dirty="0">
                 <a:solidFill>
                   <a:srgbClr val="8A939B"/>
                 </a:solidFill>
@@ -9202,9 +11182,9 @@
                 <a:ea typeface="Calibri" pitchFamily="34" charset="-122"/>
                 <a:cs typeface="Calibri" pitchFamily="34" charset="-120"/>
               </a:rPr>
-              <a:t>  ·  3</a:t>
-            </a:r>
-            <a:endParaRPr lang="en-US" sz="1000" dirty="0"/>
+              <a:t>  ·  4</a:t>
+            </a:r>
+            <a:endParaRPr lang="en-US" sz="1200" dirty="0"/>
           </a:p>
         </p:txBody>
       </p:sp>
@@ -9236,7 +11216,7 @@
               <a:buNone/>
             </a:pPr>
             <a:r>
-              <a:rPr lang="en-US" sz="1450" dirty="0">
+              <a:rPr lang="en-US" sz="1400" dirty="0">
                 <a:solidFill>
                   <a:srgbClr val="1F2429"/>
                 </a:solidFill>
@@ -9246,7 +11226,7 @@
               </a:rPr>
               <a:t>MongoDB is an open-source, document-oriented NoSQL database, first released in 2009. Instead of rows in tables, it stores data as documents — flexible, nested, JSON-like structures — grouped into collections.</a:t>
             </a:r>
-            <a:endParaRPr lang="en-US" sz="1450" dirty="0"/>
+            <a:endParaRPr lang="en-US" sz="1800" dirty="0"/>
           </a:p>
         </p:txBody>
       </p:sp>
@@ -9351,7 +11331,7 @@
               <a:buNone/>
             </a:pPr>
             <a:r>
-              <a:rPr lang="en-US" sz="1100" dirty="0">
+              <a:rPr lang="en-US" sz="1200" dirty="0">
                 <a:solidFill>
                   <a:srgbClr val="6B7480"/>
                 </a:solidFill>
@@ -9361,7 +11341,7 @@
               </a:rPr>
               <a:t>First released</a:t>
             </a:r>
-            <a:endParaRPr lang="en-US" sz="1100" dirty="0"/>
+            <a:endParaRPr lang="en-US" sz="1200" dirty="0"/>
           </a:p>
         </p:txBody>
       </p:sp>
@@ -9466,7 +11446,7 @@
               <a:buNone/>
             </a:pPr>
             <a:r>
-              <a:rPr lang="en-US" sz="1100" dirty="0">
+              <a:rPr lang="en-US" sz="1200" dirty="0">
                 <a:solidFill>
                   <a:srgbClr val="6B7480"/>
                 </a:solidFill>
@@ -9476,7 +11456,7 @@
               </a:rPr>
               <a:t>Data model — flexible, nested, JSON-like</a:t>
             </a:r>
-            <a:endParaRPr lang="en-US" sz="1100" dirty="0"/>
+            <a:endParaRPr lang="en-US" sz="1200" dirty="0"/>
           </a:p>
         </p:txBody>
       </p:sp>
@@ -9581,7 +11561,7 @@
               <a:buNone/>
             </a:pPr>
             <a:r>
-              <a:rPr lang="en-US" sz="1100" dirty="0">
+              <a:rPr lang="en-US" sz="1200" dirty="0">
                 <a:solidFill>
                   <a:srgbClr val="6B7480"/>
                 </a:solidFill>
@@ -9591,7 +11571,7 @@
               </a:rPr>
               <a:t>Language + indexing, not just get/set</a:t>
             </a:r>
-            <a:endParaRPr lang="en-US" sz="1100" dirty="0"/>
+            <a:endParaRPr lang="en-US" sz="1200" dirty="0"/>
           </a:p>
         </p:txBody>
       </p:sp>
@@ -9696,7 +11676,7 @@
               <a:buNone/>
             </a:pPr>
             <a:r>
-              <a:rPr lang="en-US" sz="1100" dirty="0">
+              <a:rPr lang="en-US" sz="1200" dirty="0">
                 <a:solidFill>
                   <a:srgbClr val="6B7480"/>
                 </a:solidFill>
@@ -9706,7 +11686,7 @@
               </a:rPr>
               <a:t>Multi-document transactions</a:t>
             </a:r>
-            <a:endParaRPr lang="en-US" sz="1100" dirty="0"/>
+            <a:endParaRPr lang="en-US" sz="1200" dirty="0"/>
           </a:p>
         </p:txBody>
       </p:sp>
@@ -9789,7 +11769,7 @@
               <a:buNone/>
             </a:pPr>
             <a:r>
-              <a:rPr lang="en-US" sz="1050" b="1" spc="100" kern="0" dirty="0">
+              <a:rPr lang="en-US" sz="1200" b="1" spc="100" kern="0" dirty="0">
                 <a:solidFill>
                   <a:srgbClr val="8B7FD9"/>
                 </a:solidFill>
@@ -9799,7 +11779,7 @@
               </a:rPr>
               <a:t>BUILT FOR LECTURE 26'S PRIORITIES</a:t>
             </a:r>
-            <a:endParaRPr lang="en-US" sz="1050" dirty="0"/>
+            <a:endParaRPr lang="en-US" sz="1200" dirty="0"/>
           </a:p>
         </p:txBody>
       </p:sp>
@@ -9980,7 +11960,7 @@
               <a:buNone/>
             </a:pPr>
             <a:r>
-              <a:rPr lang="en-US" sz="1000" u="sng" dirty="0">
+              <a:rPr lang="en-US" sz="1200" u="sng" dirty="0">
                 <a:solidFill>
                   <a:srgbClr val="8A939B"/>
                 </a:solidFill>
@@ -10001,7 +11981,7 @@
               <a:buNone/>
             </a:pPr>
             <a:r>
-              <a:rPr lang="en-US" sz="1000" dirty="0">
+              <a:rPr lang="en-US" sz="1200" dirty="0">
                 <a:solidFill>
                   <a:srgbClr val="8A939B"/>
                 </a:solidFill>
@@ -10009,9 +11989,9 @@
                 <a:ea typeface="Calibri" pitchFamily="34" charset="-122"/>
                 <a:cs typeface="Calibri" pitchFamily="34" charset="-120"/>
               </a:rPr>
-              <a:t>  ·  4</a:t>
-            </a:r>
-            <a:endParaRPr lang="en-US" sz="1000" dirty="0"/>
+              <a:t>  ·  5</a:t>
+            </a:r>
+            <a:endParaRPr lang="en-US" sz="1200" dirty="0"/>
           </a:p>
         </p:txBody>
       </p:sp>
@@ -10043,7 +12023,7 @@
               <a:buNone/>
             </a:pPr>
             <a:r>
-              <a:rPr lang="en-US" sz="1300" dirty="0">
+              <a:rPr lang="en-US" sz="1400" dirty="0">
                 <a:solidFill>
                   <a:srgbClr val="1F2429"/>
                 </a:solidFill>
@@ -10053,7 +12033,7 @@
               </a:rPr>
               <a:t>Clients — the mongosh shell, or a driver — connect to mongod (directly, or via a router in a cluster; Lecture 28) and issue commands against a four-level hierarchy:</a:t>
             </a:r>
-            <a:endParaRPr lang="en-US" sz="1300" dirty="0"/>
+            <a:endParaRPr lang="en-US" sz="1800" dirty="0"/>
           </a:p>
         </p:txBody>
       </p:sp>
@@ -10136,7 +12116,7 @@
               <a:buNone/>
             </a:pPr>
             <a:r>
-              <a:rPr lang="en-US" sz="1450" b="1" dirty="0">
+              <a:rPr lang="en-US" sz="1800" b="1" dirty="0">
                 <a:solidFill>
                   <a:srgbClr val="1F2429"/>
                 </a:solidFill>
@@ -10146,7 +12126,7 @@
               </a:rPr>
               <a:t>mongod server process</a:t>
             </a:r>
-            <a:endParaRPr lang="en-US" sz="1450" dirty="0"/>
+            <a:endParaRPr lang="en-US" sz="1800" dirty="0"/>
           </a:p>
         </p:txBody>
       </p:sp>
@@ -10178,7 +12158,7 @@
               <a:buNone/>
             </a:pPr>
             <a:r>
-              <a:rPr lang="en-US" sz="1100" dirty="0">
+              <a:rPr lang="en-US" sz="1200" dirty="0">
                 <a:solidFill>
                   <a:srgbClr val="6B7480"/>
                 </a:solidFill>
@@ -10188,7 +12168,7 @@
               </a:rPr>
               <a:t>One running MongoDB instance</a:t>
             </a:r>
-            <a:endParaRPr lang="en-US" sz="1100" dirty="0"/>
+            <a:endParaRPr lang="en-US" sz="1200" dirty="0"/>
           </a:p>
         </p:txBody>
       </p:sp>
@@ -10271,7 +12251,7 @@
               <a:buNone/>
             </a:pPr>
             <a:r>
-              <a:rPr lang="en-US" sz="1450" b="1" dirty="0">
+              <a:rPr lang="en-US" sz="1800" b="1" dirty="0">
                 <a:solidFill>
                   <a:srgbClr val="1F2429"/>
                 </a:solidFill>
@@ -10281,7 +12261,7 @@
               </a:rPr>
               <a:t>Database</a:t>
             </a:r>
-            <a:endParaRPr lang="en-US" sz="1450" dirty="0"/>
+            <a:endParaRPr lang="en-US" sz="1800" dirty="0"/>
           </a:p>
         </p:txBody>
       </p:sp>
@@ -10313,7 +12293,7 @@
               <a:buNone/>
             </a:pPr>
             <a:r>
-              <a:rPr lang="en-US" sz="1100" dirty="0">
+              <a:rPr lang="en-US" sz="1200" dirty="0">
                 <a:solidFill>
                   <a:srgbClr val="6B7480"/>
                 </a:solidFill>
@@ -10323,7 +12303,7 @@
               </a:rPr>
               <a:t>e.g. university</a:t>
             </a:r>
-            <a:endParaRPr lang="en-US" sz="1100" dirty="0"/>
+            <a:endParaRPr lang="en-US" sz="1200" dirty="0"/>
           </a:p>
         </p:txBody>
       </p:sp>
@@ -10406,7 +12386,7 @@
               <a:buNone/>
             </a:pPr>
             <a:r>
-              <a:rPr lang="en-US" sz="1450" b="1" dirty="0">
+              <a:rPr lang="en-US" sz="1800" b="1" dirty="0">
                 <a:solidFill>
                   <a:srgbClr val="1F2429"/>
                 </a:solidFill>
@@ -10416,7 +12396,7 @@
               </a:rPr>
               <a:t>Collection</a:t>
             </a:r>
-            <a:endParaRPr lang="en-US" sz="1450" dirty="0"/>
+            <a:endParaRPr lang="en-US" sz="1800" dirty="0"/>
           </a:p>
         </p:txBody>
       </p:sp>
@@ -10448,7 +12428,7 @@
               <a:buNone/>
             </a:pPr>
             <a:r>
-              <a:rPr lang="en-US" sz="1100" dirty="0">
+              <a:rPr lang="en-US" sz="1200" dirty="0">
                 <a:solidFill>
                   <a:srgbClr val="6B7480"/>
                 </a:solidFill>
@@ -10458,7 +12438,7 @@
               </a:rPr>
               <a:t>e.g. students, courses — analogous to a relational table</a:t>
             </a:r>
-            <a:endParaRPr lang="en-US" sz="1100" dirty="0"/>
+            <a:endParaRPr lang="en-US" sz="1200" dirty="0"/>
           </a:p>
         </p:txBody>
       </p:sp>
@@ -10541,7 +12521,7 @@
               <a:buNone/>
             </a:pPr>
             <a:r>
-              <a:rPr lang="en-US" sz="1450" b="1" dirty="0">
+              <a:rPr lang="en-US" sz="1800" b="1" dirty="0">
                 <a:solidFill>
                   <a:srgbClr val="1F2429"/>
                 </a:solidFill>
@@ -10551,7 +12531,7 @@
               </a:rPr>
               <a:t>Document</a:t>
             </a:r>
-            <a:endParaRPr lang="en-US" sz="1450" dirty="0"/>
+            <a:endParaRPr lang="en-US" sz="1800" dirty="0"/>
           </a:p>
         </p:txBody>
       </p:sp>
@@ -10583,7 +12563,7 @@
               <a:buNone/>
             </a:pPr>
             <a:r>
-              <a:rPr lang="en-US" sz="1100" dirty="0">
+              <a:rPr lang="en-US" sz="1200" dirty="0">
                 <a:solidFill>
                   <a:srgbClr val="6B7480"/>
                 </a:solidFill>
@@ -10593,7 +12573,7 @@
               </a:rPr>
               <a:t>e.g. one student's record — analogous to a relational row</a:t>
             </a:r>
-            <a:endParaRPr lang="en-US" sz="1100" dirty="0"/>
+            <a:endParaRPr lang="en-US" sz="1200" dirty="0"/>
           </a:p>
         </p:txBody>
       </p:sp>
@@ -10732,7 +12712,7 @@
               <a:buNone/>
             </a:pPr>
             <a:r>
-              <a:rPr lang="en-US" sz="1000" u="sng" dirty="0">
+              <a:rPr lang="en-US" sz="1200" u="sng" dirty="0">
                 <a:solidFill>
                   <a:srgbClr val="8A939B"/>
                 </a:solidFill>
@@ -10753,7 +12733,7 @@
               <a:buNone/>
             </a:pPr>
             <a:r>
-              <a:rPr lang="en-US" sz="1000" dirty="0">
+              <a:rPr lang="en-US" sz="1200" dirty="0">
                 <a:solidFill>
                   <a:srgbClr val="8A939B"/>
                 </a:solidFill>
@@ -10761,9 +12741,9 @@
                 <a:ea typeface="Calibri" pitchFamily="34" charset="-122"/>
                 <a:cs typeface="Calibri" pitchFamily="34" charset="-120"/>
               </a:rPr>
-              <a:t>  ·  5</a:t>
-            </a:r>
-            <a:endParaRPr lang="en-US" sz="1000" dirty="0"/>
+              <a:t>  ·  6</a:t>
+            </a:r>
+            <a:endParaRPr lang="en-US" sz="1200" dirty="0"/>
           </a:p>
         </p:txBody>
       </p:sp>
@@ -10886,7 +12866,7 @@
               <a:buNone/>
             </a:pPr>
             <a:r>
-              <a:rPr lang="en-US" sz="1000" dirty="0">
+              <a:rPr lang="en-US" sz="1200" dirty="0">
                 <a:solidFill>
                   <a:srgbClr val="8A939B"/>
                 </a:solidFill>
@@ -10896,7 +12876,7 @@
               </a:rPr>
               <a:t>mongosh</a:t>
             </a:r>
-            <a:endParaRPr lang="en-US" sz="1000" dirty="0"/>
+            <a:endParaRPr lang="en-US" sz="1200" dirty="0"/>
           </a:p>
         </p:txBody>
       </p:sp>
@@ -10928,7 +12908,7 @@
               <a:buNone/>
             </a:pPr>
             <a:r>
-              <a:rPr lang="en-US" sz="1300" dirty="0">
+              <a:rPr lang="en-US" sz="1400" dirty="0">
                 <a:solidFill>
                   <a:srgbClr val="7C8792"/>
                 </a:solidFill>
@@ -10938,7 +12918,7 @@
               </a:rPr>
               <a:t>// A single document in the "students" collection</a:t>
             </a:r>
-            <a:endParaRPr lang="en-US" sz="1300" dirty="0"/>
+            <a:endParaRPr lang="en-US" sz="1800" dirty="0"/>
           </a:p>
           <a:p>
             <a:pPr indent="0" marL="0">
@@ -10948,7 +12928,7 @@
               <a:buNone/>
             </a:pPr>
             <a:r>
-              <a:rPr lang="en-US" sz="1300" dirty="0">
+              <a:rPr lang="en-US" sz="1400" dirty="0">
                 <a:solidFill>
                   <a:srgbClr val="E8EDF0"/>
                 </a:solidFill>
@@ -10958,7 +12938,7 @@
               </a:rPr>
               <a:t>{</a:t>
             </a:r>
-            <a:endParaRPr lang="en-US" sz="1300" dirty="0"/>
+            <a:endParaRPr lang="en-US" sz="1800" dirty="0"/>
           </a:p>
           <a:p>
             <a:pPr indent="0" marL="0">
@@ -10968,7 +12948,7 @@
               <a:buNone/>
             </a:pPr>
             <a:r>
-              <a:rPr lang="en-US" sz="1300" dirty="0">
+              <a:rPr lang="en-US" sz="1400" dirty="0">
                 <a:solidFill>
                   <a:srgbClr val="E8EDF0"/>
                 </a:solidFill>
@@ -10978,7 +12958,7 @@
               </a:rPr>
               <a:t>  _id: ObjectId("66f1a2b3c4d5e6f7a8b9c0d1"),</a:t>
             </a:r>
-            <a:endParaRPr lang="en-US" sz="1300" dirty="0"/>
+            <a:endParaRPr lang="en-US" sz="1800" dirty="0"/>
           </a:p>
           <a:p>
             <a:pPr indent="0" marL="0">
@@ -10988,7 +12968,7 @@
               <a:buNone/>
             </a:pPr>
             <a:r>
-              <a:rPr lang="en-US" sz="1300" dirty="0">
+              <a:rPr lang="en-US" sz="1400" dirty="0">
                 <a:solidFill>
                   <a:srgbClr val="E8EDF0"/>
                 </a:solidFill>
@@ -10998,7 +12978,7 @@
               </a:rPr>
               <a:t>  regNo: "FA21-BCS-045",</a:t>
             </a:r>
-            <a:endParaRPr lang="en-US" sz="1300" dirty="0"/>
+            <a:endParaRPr lang="en-US" sz="1800" dirty="0"/>
           </a:p>
           <a:p>
             <a:pPr indent="0" marL="0">
@@ -11008,7 +12988,7 @@
               <a:buNone/>
             </a:pPr>
             <a:r>
-              <a:rPr lang="en-US" sz="1300" dirty="0">
+              <a:rPr lang="en-US" sz="1400" dirty="0">
                 <a:solidFill>
                   <a:srgbClr val="E8EDF0"/>
                 </a:solidFill>
@@ -11018,7 +12998,7 @@
               </a:rPr>
               <a:t>  name: "Ayesha Khan",</a:t>
             </a:r>
-            <a:endParaRPr lang="en-US" sz="1300" dirty="0"/>
+            <a:endParaRPr lang="en-US" sz="1800" dirty="0"/>
           </a:p>
           <a:p>
             <a:pPr indent="0" marL="0">
@@ -11028,7 +13008,7 @@
               <a:buNone/>
             </a:pPr>
             <a:r>
-              <a:rPr lang="en-US" sz="1300" dirty="0">
+              <a:rPr lang="en-US" sz="1400" dirty="0">
                 <a:solidFill>
                   <a:srgbClr val="E8EDF0"/>
                 </a:solidFill>
@@ -11038,7 +13018,7 @@
               </a:rPr>
               <a:t>  gpa: 3.72,</a:t>
             </a:r>
-            <a:endParaRPr lang="en-US" sz="1300" dirty="0"/>
+            <a:endParaRPr lang="en-US" sz="1800" dirty="0"/>
           </a:p>
           <a:p>
             <a:pPr indent="0" marL="0">
@@ -11048,7 +13028,7 @@
               <a:buNone/>
             </a:pPr>
             <a:r>
-              <a:rPr lang="en-US" sz="1300" dirty="0">
+              <a:rPr lang="en-US" sz="1400" dirty="0">
                 <a:solidFill>
                   <a:srgbClr val="E8EDF0"/>
                 </a:solidFill>
@@ -11058,7 +13038,7 @@
               </a:rPr>
               <a:t>  department: "Computer Science",</a:t>
             </a:r>
-            <a:endParaRPr lang="en-US" sz="1300" dirty="0"/>
+            <a:endParaRPr lang="en-US" sz="1800" dirty="0"/>
           </a:p>
           <a:p>
             <a:pPr indent="0" marL="0">
@@ -11068,7 +13048,7 @@
               <a:buNone/>
             </a:pPr>
             <a:r>
-              <a:rPr lang="en-US" sz="1300" dirty="0">
+              <a:rPr lang="en-US" sz="1400" dirty="0">
                 <a:solidFill>
                   <a:srgbClr val="E8EDF0"/>
                 </a:solidFill>
@@ -11078,7 +13058,7 @@
               </a:rPr>
               <a:t>  isActive: true,</a:t>
             </a:r>
-            <a:endParaRPr lang="en-US" sz="1300" dirty="0"/>
+            <a:endParaRPr lang="en-US" sz="1800" dirty="0"/>
           </a:p>
           <a:p>
             <a:pPr indent="0" marL="0">
@@ -11088,7 +13068,7 @@
               <a:buNone/>
             </a:pPr>
             <a:r>
-              <a:rPr lang="en-US" sz="1300" dirty="0">
+              <a:rPr lang="en-US" sz="1400" dirty="0">
                 <a:solidFill>
                   <a:srgbClr val="E8EDF0"/>
                 </a:solidFill>
@@ -11098,7 +13078,7 @@
               </a:rPr>
               <a:t>  enrollmentDate: ISODate("2021-09-01")</a:t>
             </a:r>
-            <a:endParaRPr lang="en-US" sz="1300" dirty="0"/>
+            <a:endParaRPr lang="en-US" sz="1800" dirty="0"/>
           </a:p>
           <a:p>
             <a:pPr indent="0" marL="0">
@@ -11108,7 +13088,7 @@
               <a:buNone/>
             </a:pPr>
             <a:r>
-              <a:rPr lang="en-US" sz="1300" dirty="0">
+              <a:rPr lang="en-US" sz="1400" dirty="0">
                 <a:solidFill>
                   <a:srgbClr val="E8EDF0"/>
                 </a:solidFill>
@@ -11118,7 +13098,7 @@
               </a:rPr>
               <a:t>}</a:t>
             </a:r>
-            <a:endParaRPr lang="en-US" sz="1300" dirty="0"/>
+            <a:endParaRPr lang="en-US" sz="1800" dirty="0"/>
           </a:p>
         </p:txBody>
       </p:sp>
@@ -11147,7 +13127,7 @@
               <a:buNone/>
             </a:pPr>
             <a:r>
-              <a:rPr lang="en-US" sz="1100" b="1" spc="100" kern="0" dirty="0">
+              <a:rPr lang="en-US" sz="1200" b="1" spc="100" kern="0" dirty="0">
                 <a:solidFill>
                   <a:srgbClr val="2FE6C4"/>
                 </a:solidFill>
@@ -11157,7 +13137,7 @@
               </a:rPr>
               <a:t>RELATIONAL MODEL</a:t>
             </a:r>
-            <a:endParaRPr lang="en-US" sz="1100" dirty="0"/>
+            <a:endParaRPr lang="en-US" sz="1200" dirty="0"/>
           </a:p>
         </p:txBody>
       </p:sp>
@@ -11240,7 +13220,7 @@
               <a:buNone/>
             </a:pPr>
             <a:r>
-              <a:rPr lang="en-US" sz="1350" b="1" dirty="0">
+              <a:rPr lang="en-US" sz="1800" b="1" dirty="0">
                 <a:solidFill>
                   <a:srgbClr val="1F2429"/>
                 </a:solidFill>
@@ -11250,7 +13230,7 @@
               </a:rPr>
               <a:t>Table</a:t>
             </a:r>
-            <a:endParaRPr lang="en-US" sz="1350" dirty="0"/>
+            <a:endParaRPr lang="en-US" sz="1800" dirty="0"/>
           </a:p>
         </p:txBody>
       </p:sp>
@@ -11282,7 +13262,7 @@
               <a:buNone/>
             </a:pPr>
             <a:r>
-              <a:rPr lang="en-US" sz="1050" dirty="0">
+              <a:rPr lang="en-US" sz="1200" dirty="0">
                 <a:solidFill>
                   <a:srgbClr val="6B7480"/>
                 </a:solidFill>
@@ -11292,7 +13272,7 @@
               </a:rPr>
               <a:t>Fixed columns, every row has the same shape</a:t>
             </a:r>
-            <a:endParaRPr lang="en-US" sz="1050" dirty="0"/>
+            <a:endParaRPr lang="en-US" sz="1200" dirty="0"/>
           </a:p>
         </p:txBody>
       </p:sp>
@@ -11321,7 +13301,7 @@
               <a:buNone/>
             </a:pPr>
             <a:r>
-              <a:rPr lang="en-US" sz="1100" b="1" spc="100" kern="0" dirty="0">
+              <a:rPr lang="en-US" sz="1200" b="1" spc="100" kern="0" dirty="0">
                 <a:solidFill>
                   <a:srgbClr val="8B7FD9"/>
                 </a:solidFill>
@@ -11331,7 +13311,7 @@
               </a:rPr>
               <a:t>DOCUMENT MODEL</a:t>
             </a:r>
-            <a:endParaRPr lang="en-US" sz="1100" dirty="0"/>
+            <a:endParaRPr lang="en-US" sz="1200" dirty="0"/>
           </a:p>
         </p:txBody>
       </p:sp>
@@ -11414,7 +13394,7 @@
               <a:buNone/>
             </a:pPr>
             <a:r>
-              <a:rPr lang="en-US" sz="1350" b="1" dirty="0">
+              <a:rPr lang="en-US" sz="1800" b="1" dirty="0">
                 <a:solidFill>
                   <a:srgbClr val="1F2429"/>
                 </a:solidFill>
@@ -11424,7 +13404,7 @@
               </a:rPr>
               <a:t>Collection</a:t>
             </a:r>
-            <a:endParaRPr lang="en-US" sz="1350" dirty="0"/>
+            <a:endParaRPr lang="en-US" sz="1800" dirty="0"/>
           </a:p>
         </p:txBody>
       </p:sp>
@@ -11456,7 +13436,7 @@
               <a:buNone/>
             </a:pPr>
             <a:r>
-              <a:rPr lang="en-US" sz="1050" dirty="0">
+              <a:rPr lang="en-US" sz="1200" dirty="0">
                 <a:solidFill>
                   <a:srgbClr val="6B7480"/>
                 </a:solidFill>
@@ -11466,7 +13446,7 @@
               </a:rPr>
               <a:t>No fixed columns, documents can vary in shape</a:t>
             </a:r>
-            <a:endParaRPr lang="en-US" sz="1050" dirty="0"/>
+            <a:endParaRPr lang="en-US" sz="1200" dirty="0"/>
           </a:p>
         </p:txBody>
       </p:sp>
@@ -11549,7 +13529,7 @@
               <a:buNone/>
             </a:pPr>
             <a:r>
-              <a:rPr lang="en-US" sz="1050" b="1" spc="100" kern="0" dirty="0">
+              <a:rPr lang="en-US" sz="1200" b="1" spc="100" kern="0" dirty="0">
                 <a:solidFill>
                   <a:srgbClr val="8B7FD9"/>
                 </a:solidFill>
@@ -11559,7 +13539,7 @@
               </a:rPr>
               <a:t>TABLE → COLLECTION, ROW → DOCUMENT</a:t>
             </a:r>
-            <a:endParaRPr lang="en-US" sz="1050" dirty="0"/>
+            <a:endParaRPr lang="en-US" sz="1200" dirty="0"/>
           </a:p>
         </p:txBody>
       </p:sp>
@@ -11740,7 +13720,7 @@
               <a:buNone/>
             </a:pPr>
             <a:r>
-              <a:rPr lang="en-US" sz="1000" u="sng" dirty="0">
+              <a:rPr lang="en-US" sz="1200" u="sng" dirty="0">
                 <a:solidFill>
                   <a:srgbClr val="8A939B"/>
                 </a:solidFill>
@@ -11761,7 +13741,7 @@
               <a:buNone/>
             </a:pPr>
             <a:r>
-              <a:rPr lang="en-US" sz="1000" dirty="0">
+              <a:rPr lang="en-US" sz="1200" dirty="0">
                 <a:solidFill>
                   <a:srgbClr val="8A939B"/>
                 </a:solidFill>
@@ -11769,9 +13749,9 @@
                 <a:ea typeface="Calibri" pitchFamily="34" charset="-122"/>
                 <a:cs typeface="Calibri" pitchFamily="34" charset="-120"/>
               </a:rPr>
-              <a:t>  ·  6</a:t>
-            </a:r>
-            <a:endParaRPr lang="en-US" sz="1000" dirty="0"/>
+              <a:t>  ·  7</a:t>
+            </a:r>
+            <a:endParaRPr lang="en-US" sz="1200" dirty="0"/>
           </a:p>
         </p:txBody>
       </p:sp>
@@ -11803,7 +13783,7 @@
               <a:buNone/>
             </a:pPr>
             <a:r>
-              <a:rPr lang="en-US" sz="1350" dirty="0">
+              <a:rPr lang="en-US" sz="1400" dirty="0">
                 <a:solidFill>
                   <a:srgbClr val="1F2429"/>
                 </a:solidFill>
@@ -11813,7 +13793,7 @@
               </a:rPr>
               <a:t>MongoDB does not store documents as plain-text JSON. It stores them as BSON (“Binary JSON”) — designed for two things text JSON can't do well:</a:t>
             </a:r>
-            <a:endParaRPr lang="en-US" sz="1350" dirty="0"/>
+            <a:endParaRPr lang="en-US" sz="1800" dirty="0"/>
           </a:p>
         </p:txBody>
       </p:sp>
@@ -11896,7 +13876,7 @@
               <a:buNone/>
             </a:pPr>
             <a:r>
-              <a:rPr lang="en-US" sz="1350" b="1" dirty="0">
+              <a:rPr lang="en-US" sz="1800" b="1" dirty="0">
                 <a:solidFill>
                   <a:srgbClr val="1F2429"/>
                 </a:solidFill>
@@ -11906,7 +13886,7 @@
               </a:rPr>
               <a:t>Richer data types</a:t>
             </a:r>
-            <a:endParaRPr lang="en-US" sz="1350" dirty="0"/>
+            <a:endParaRPr lang="en-US" sz="1800" dirty="0"/>
           </a:p>
         </p:txBody>
       </p:sp>
@@ -11938,7 +13918,7 @@
               <a:buNone/>
             </a:pPr>
             <a:r>
-              <a:rPr lang="en-US" sz="1050" dirty="0">
+              <a:rPr lang="en-US" sz="1200" dirty="0">
                 <a:solidFill>
                   <a:srgbClr val="6B7480"/>
                 </a:solidFill>
@@ -11948,7 +13928,7 @@
               </a:rPr>
               <a:t>Plain JSON only has strings, numbers, booleans, null, arrays, objects. BSON adds dates, binary data, and a dedicated 12-byte ObjectId type.</a:t>
             </a:r>
-            <a:endParaRPr lang="en-US" sz="1050" dirty="0"/>
+            <a:endParaRPr lang="en-US" sz="1200" dirty="0"/>
           </a:p>
         </p:txBody>
       </p:sp>
@@ -12031,7 +14011,7 @@
               <a:buNone/>
             </a:pPr>
             <a:r>
-              <a:rPr lang="en-US" sz="1350" b="1" dirty="0">
+              <a:rPr lang="en-US" sz="1800" b="1" dirty="0">
                 <a:solidFill>
                   <a:srgbClr val="1F2429"/>
                 </a:solidFill>
@@ -12041,7 +14021,7 @@
               </a:rPr>
               <a:t>Efficient traversal</a:t>
             </a:r>
-            <a:endParaRPr lang="en-US" sz="1350" dirty="0"/>
+            <a:endParaRPr lang="en-US" sz="1800" dirty="0"/>
           </a:p>
         </p:txBody>
       </p:sp>
@@ -12073,7 +14053,7 @@
               <a:buNone/>
             </a:pPr>
             <a:r>
-              <a:rPr lang="en-US" sz="1050" dirty="0">
+              <a:rPr lang="en-US" sz="1200" dirty="0">
                 <a:solidFill>
                   <a:srgbClr val="6B7480"/>
                 </a:solidFill>
@@ -12083,7 +14063,7 @@
               </a:rPr>
               <a:t>Every BSON field is stored with a length prefix, so the database skips directly past fields it doesn't need instead of parsing character by character.</a:t>
             </a:r>
-            <a:endParaRPr lang="en-US" sz="1050" dirty="0"/>
+            <a:endParaRPr lang="en-US" sz="1200" dirty="0"/>
           </a:p>
         </p:txBody>
       </p:sp>
@@ -12166,7 +14146,7 @@
               <a:buNone/>
             </a:pPr>
             <a:r>
-              <a:rPr lang="en-US" sz="1050" b="1" spc="100" kern="0" dirty="0">
+              <a:rPr lang="en-US" sz="1200" b="1" spc="100" kern="0" dirty="0">
                 <a:solidFill>
                   <a:srgbClr val="2FE6C4"/>
                 </a:solidFill>
@@ -12176,7 +14156,7 @@
               </a:rPr>
               <a:t>YOU NEVER WRITE BSON BY HAND</a:t>
             </a:r>
-            <a:endParaRPr lang="en-US" sz="1050" dirty="0"/>
+            <a:endParaRPr lang="en-US" sz="1200" dirty="0"/>
           </a:p>
         </p:txBody>
       </p:sp>
@@ -12357,7 +14337,7 @@
               <a:buNone/>
             </a:pPr>
             <a:r>
-              <a:rPr lang="en-US" sz="1000" u="sng" dirty="0">
+              <a:rPr lang="en-US" sz="1200" u="sng" dirty="0">
                 <a:solidFill>
                   <a:srgbClr val="8A939B"/>
                 </a:solidFill>
@@ -12378,7 +14358,7 @@
               <a:buNone/>
             </a:pPr>
             <a:r>
-              <a:rPr lang="en-US" sz="1000" dirty="0">
+              <a:rPr lang="en-US" sz="1200" dirty="0">
                 <a:solidFill>
                   <a:srgbClr val="8A939B"/>
                 </a:solidFill>
@@ -12386,9 +14366,9 @@
                 <a:ea typeface="Calibri" pitchFamily="34" charset="-122"/>
                 <a:cs typeface="Calibri" pitchFamily="34" charset="-120"/>
               </a:rPr>
-              <a:t>  ·  7</a:t>
-            </a:r>
-            <a:endParaRPr lang="en-US" sz="1000" dirty="0"/>
+              <a:t>  ·  8</a:t>
+            </a:r>
+            <a:endParaRPr lang="en-US" sz="1200" dirty="0"/>
           </a:p>
         </p:txBody>
       </p:sp>
@@ -12429,7 +14409,7 @@
                         <a:buNone/>
                       </a:pPr>
                       <a:r>
-                        <a:rPr lang="en-US" sz="1150" b="1" dirty="0">
+                        <a:rPr lang="en-US" sz="1400" b="1" dirty="0">
                           <a:solidFill>
                             <a:srgbClr val="FFFFFF"/>
                           </a:solidFill>
@@ -12439,7 +14419,7 @@
                         </a:rPr>
                         <a:t>Type</a:t>
                       </a:r>
-                      <a:endParaRPr lang="en-US" sz="1150" dirty="0">
+                      <a:endParaRPr lang="en-US" sz="1400" dirty="0">
                         <a:latin typeface="Calibri" charset="0"/>
                         <a:ea typeface="Calibri" charset="0"/>
                         <a:cs typeface="Calibri" charset="0"/>
@@ -12497,7 +14477,7 @@
                         <a:buNone/>
                       </a:pPr>
                       <a:r>
-                        <a:rPr lang="en-US" sz="1150" b="1" dirty="0">
+                        <a:rPr lang="en-US" sz="1400" b="1" dirty="0">
                           <a:solidFill>
                             <a:srgbClr val="FFFFFF"/>
                           </a:solidFill>
@@ -12507,7 +14487,7 @@
                         </a:rPr>
                         <a:t>Example</a:t>
                       </a:r>
-                      <a:endParaRPr lang="en-US" sz="1150" dirty="0">
+                      <a:endParaRPr lang="en-US" sz="1400" dirty="0">
                         <a:latin typeface="Calibri" charset="0"/>
                         <a:ea typeface="Calibri" charset="0"/>
                         <a:cs typeface="Calibri" charset="0"/>
@@ -12565,7 +14545,7 @@
                         <a:buNone/>
                       </a:pPr>
                       <a:r>
-                        <a:rPr lang="en-US" sz="1150" b="1" dirty="0">
+                        <a:rPr lang="en-US" sz="1400" b="1" dirty="0">
                           <a:solidFill>
                             <a:srgbClr val="FFFFFF"/>
                           </a:solidFill>
@@ -12575,7 +14555,7 @@
                         </a:rPr>
                         <a:t>Notes</a:t>
                       </a:r>
-                      <a:endParaRPr lang="en-US" sz="1150" dirty="0">
+                      <a:endParaRPr lang="en-US" sz="1400" dirty="0">
                         <a:latin typeface="Calibri" charset="0"/>
                         <a:ea typeface="Calibri" charset="0"/>
                         <a:cs typeface="Calibri" charset="0"/>
@@ -12635,7 +14615,7 @@
                         <a:buNone/>
                       </a:pPr>
                       <a:r>
-                        <a:rPr lang="en-US" sz="1150" dirty="0">
+                        <a:rPr lang="en-US" sz="1400" dirty="0">
                           <a:solidFill>
                             <a:srgbClr val="1F2429"/>
                           </a:solidFill>
@@ -12645,7 +14625,7 @@
                         </a:rPr>
                         <a:t>ObjectId</a:t>
                       </a:r>
-                      <a:endParaRPr lang="en-US" sz="1150" dirty="0">
+                      <a:endParaRPr lang="en-US" sz="1400" dirty="0">
                         <a:latin typeface="Calibri" charset="0"/>
                         <a:ea typeface="Calibri" charset="0"/>
                         <a:cs typeface="Calibri" charset="0"/>
@@ -12703,7 +14683,7 @@
                         <a:buNone/>
                       </a:pPr>
                       <a:r>
-                        <a:rPr lang="en-US" sz="1150" dirty="0">
+                        <a:rPr lang="en-US" sz="1400" dirty="0">
                           <a:solidFill>
                             <a:srgbClr val="1F2429"/>
                           </a:solidFill>
@@ -12713,7 +14693,7 @@
                         </a:rPr>
                         <a:t>ObjectId("66f1a2b3...")</a:t>
                       </a:r>
-                      <a:endParaRPr lang="en-US" sz="1150" dirty="0">
+                      <a:endParaRPr lang="en-US" sz="1400" dirty="0">
                         <a:latin typeface="Calibri" charset="0"/>
                         <a:ea typeface="Calibri" charset="0"/>
                         <a:cs typeface="Calibri" charset="0"/>
@@ -12771,7 +14751,7 @@
                         <a:buNone/>
                       </a:pPr>
                       <a:r>
-                        <a:rPr lang="en-US" sz="1150" dirty="0">
+                        <a:rPr lang="en-US" sz="1400" dirty="0">
                           <a:solidFill>
                             <a:srgbClr val="1F2429"/>
                           </a:solidFill>
@@ -12781,7 +14761,7 @@
                         </a:rPr>
                         <a:t>12-byte unique identifier, auto-generated as _id</a:t>
                       </a:r>
-                      <a:endParaRPr lang="en-US" sz="1150" dirty="0">
+                      <a:endParaRPr lang="en-US" sz="1400" dirty="0">
                         <a:latin typeface="Calibri" charset="0"/>
                         <a:ea typeface="Calibri" charset="0"/>
                         <a:cs typeface="Calibri" charset="0"/>
@@ -12841,7 +14821,7 @@
                         <a:buNone/>
                       </a:pPr>
                       <a:r>
-                        <a:rPr lang="en-US" sz="1150" dirty="0">
+                        <a:rPr lang="en-US" sz="1400" dirty="0">
                           <a:solidFill>
                             <a:srgbClr val="1F2429"/>
                           </a:solidFill>
@@ -12851,7 +14831,7 @@
                         </a:rPr>
                         <a:t>String</a:t>
                       </a:r>
-                      <a:endParaRPr lang="en-US" sz="1150" dirty="0">
+                      <a:endParaRPr lang="en-US" sz="1400" dirty="0">
                         <a:latin typeface="Calibri" charset="0"/>
                         <a:ea typeface="Calibri" charset="0"/>
                         <a:cs typeface="Calibri" charset="0"/>
@@ -12909,7 +14889,7 @@
                         <a:buNone/>
                       </a:pPr>
                       <a:r>
-                        <a:rPr lang="en-US" sz="1150" dirty="0">
+                        <a:rPr lang="en-US" sz="1400" dirty="0">
                           <a:solidFill>
                             <a:srgbClr val="1F2429"/>
                           </a:solidFill>
@@ -12919,7 +14899,7 @@
                         </a:rPr>
                         <a:t>"Ayesha Khan"</a:t>
                       </a:r>
-                      <a:endParaRPr lang="en-US" sz="1150" dirty="0">
+                      <a:endParaRPr lang="en-US" sz="1400" dirty="0">
                         <a:latin typeface="Calibri" charset="0"/>
                         <a:ea typeface="Calibri" charset="0"/>
                         <a:cs typeface="Calibri" charset="0"/>
@@ -12977,7 +14957,7 @@
                         <a:buNone/>
                       </a:pPr>
                       <a:r>
-                        <a:rPr lang="en-US" sz="1150" dirty="0">
+                        <a:rPr lang="en-US" sz="1400" dirty="0">
                           <a:solidFill>
                             <a:srgbClr val="1F2429"/>
                           </a:solidFill>
@@ -12987,7 +14967,7 @@
                         </a:rPr>
                         <a:t>UTF-8 text</a:t>
                       </a:r>
-                      <a:endParaRPr lang="en-US" sz="1150" dirty="0">
+                      <a:endParaRPr lang="en-US" sz="1400" dirty="0">
                         <a:latin typeface="Calibri" charset="0"/>
                         <a:ea typeface="Calibri" charset="0"/>
                         <a:cs typeface="Calibri" charset="0"/>
@@ -13047,7 +15027,7 @@
                         <a:buNone/>
                       </a:pPr>
                       <a:r>
-                        <a:rPr lang="en-US" sz="1150" dirty="0">
+                        <a:rPr lang="en-US" sz="1400" dirty="0">
                           <a:solidFill>
                             <a:srgbClr val="1F2429"/>
                           </a:solidFill>
@@ -13057,7 +15037,7 @@
                         </a:rPr>
                         <a:t>Int32 / Int64</a:t>
                       </a:r>
-                      <a:endParaRPr lang="en-US" sz="1150" dirty="0">
+                      <a:endParaRPr lang="en-US" sz="1400" dirty="0">
                         <a:latin typeface="Calibri" charset="0"/>
                         <a:ea typeface="Calibri" charset="0"/>
                         <a:cs typeface="Calibri" charset="0"/>
@@ -13115,7 +15095,7 @@
                         <a:buNone/>
                       </a:pPr>
                       <a:r>
-                        <a:rPr lang="en-US" sz="1150" dirty="0">
+                        <a:rPr lang="en-US" sz="1400" dirty="0">
                           <a:solidFill>
                             <a:srgbClr val="1F2429"/>
                           </a:solidFill>
@@ -13125,7 +15105,7 @@
                         </a:rPr>
                         <a:t>42, 9223372036854775807</a:t>
                       </a:r>
-                      <a:endParaRPr lang="en-US" sz="1150" dirty="0">
+                      <a:endParaRPr lang="en-US" sz="1400" dirty="0">
                         <a:latin typeface="Calibri" charset="0"/>
                         <a:ea typeface="Calibri" charset="0"/>
                         <a:cs typeface="Calibri" charset="0"/>
@@ -13183,7 +15163,7 @@
                         <a:buNone/>
                       </a:pPr>
                       <a:r>
-                        <a:rPr lang="en-US" sz="1150" dirty="0">
+                        <a:rPr lang="en-US" sz="1400" dirty="0">
                           <a:solidFill>
                             <a:srgbClr val="1F2429"/>
                           </a:solidFill>
@@ -13193,7 +15173,7 @@
                         </a:rPr>
                         <a:t>Whole numbers, like a relational INT/BIGINT</a:t>
                       </a:r>
-                      <a:endParaRPr lang="en-US" sz="1150" dirty="0">
+                      <a:endParaRPr lang="en-US" sz="1400" dirty="0">
                         <a:latin typeface="Calibri" charset="0"/>
                         <a:ea typeface="Calibri" charset="0"/>
                         <a:cs typeface="Calibri" charset="0"/>
@@ -13253,7 +15233,7 @@
                         <a:buNone/>
                       </a:pPr>
                       <a:r>
-                        <a:rPr lang="en-US" sz="1150" dirty="0">
+                        <a:rPr lang="en-US" sz="1400" dirty="0">
                           <a:solidFill>
                             <a:srgbClr val="1F2429"/>
                           </a:solidFill>
@@ -13263,7 +15243,7 @@
                         </a:rPr>
                         <a:t>Double</a:t>
                       </a:r>
-                      <a:endParaRPr lang="en-US" sz="1150" dirty="0">
+                      <a:endParaRPr lang="en-US" sz="1400" dirty="0">
                         <a:latin typeface="Calibri" charset="0"/>
                         <a:ea typeface="Calibri" charset="0"/>
                         <a:cs typeface="Calibri" charset="0"/>
@@ -13321,7 +15301,7 @@
                         <a:buNone/>
                       </a:pPr>
                       <a:r>
-                        <a:rPr lang="en-US" sz="1150" dirty="0">
+                        <a:rPr lang="en-US" sz="1400" dirty="0">
                           <a:solidFill>
                             <a:srgbClr val="1F2429"/>
                           </a:solidFill>
@@ -13331,7 +15311,7 @@
                         </a:rPr>
                         <a:t>3.72</a:t>
                       </a:r>
-                      <a:endParaRPr lang="en-US" sz="1150" dirty="0">
+                      <a:endParaRPr lang="en-US" sz="1400" dirty="0">
                         <a:latin typeface="Calibri" charset="0"/>
                         <a:ea typeface="Calibri" charset="0"/>
                         <a:cs typeface="Calibri" charset="0"/>
@@ -13389,7 +15369,7 @@
                         <a:buNone/>
                       </a:pPr>
                       <a:r>
-                        <a:rPr lang="en-US" sz="1150" dirty="0">
+                        <a:rPr lang="en-US" sz="1400" dirty="0">
                           <a:solidFill>
                             <a:srgbClr val="1F2429"/>
                           </a:solidFill>
@@ -13399,7 +15379,7 @@
                         </a:rPr>
                         <a:t>Default type for a decimal literal</a:t>
                       </a:r>
-                      <a:endParaRPr lang="en-US" sz="1150" dirty="0">
+                      <a:endParaRPr lang="en-US" sz="1400" dirty="0">
                         <a:latin typeface="Calibri" charset="0"/>
                         <a:ea typeface="Calibri" charset="0"/>
                         <a:cs typeface="Calibri" charset="0"/>
@@ -13459,7 +15439,7 @@
                         <a:buNone/>
                       </a:pPr>
                       <a:r>
-                        <a:rPr lang="en-US" sz="1150" dirty="0">
+                        <a:rPr lang="en-US" sz="1400" dirty="0">
                           <a:solidFill>
                             <a:srgbClr val="1F2429"/>
                           </a:solidFill>
@@ -13469,7 +15449,7 @@
                         </a:rPr>
                         <a:t>Boolean</a:t>
                       </a:r>
-                      <a:endParaRPr lang="en-US" sz="1150" dirty="0">
+                      <a:endParaRPr lang="en-US" sz="1400" dirty="0">
                         <a:latin typeface="Calibri" charset="0"/>
                         <a:ea typeface="Calibri" charset="0"/>
                         <a:cs typeface="Calibri" charset="0"/>
@@ -13527,7 +15507,7 @@
                         <a:buNone/>
                       </a:pPr>
                       <a:r>
-                        <a:rPr lang="en-US" sz="1150" dirty="0">
+                        <a:rPr lang="en-US" sz="1400" dirty="0">
                           <a:solidFill>
                             <a:srgbClr val="1F2429"/>
                           </a:solidFill>
@@ -13537,7 +15517,7 @@
                         </a:rPr>
                         <a:t>true, false</a:t>
                       </a:r>
-                      <a:endParaRPr lang="en-US" sz="1150" dirty="0">
+                      <a:endParaRPr lang="en-US" sz="1400" dirty="0">
                         <a:latin typeface="Calibri" charset="0"/>
                         <a:ea typeface="Calibri" charset="0"/>
                         <a:cs typeface="Calibri" charset="0"/>
@@ -13594,7 +15574,7 @@
                       <a:pPr algn="l" indent="0" marL="0">
                         <a:buNone/>
                       </a:pPr>
-                      <a:endParaRPr lang="en-US" sz="1150" dirty="0">
+                      <a:endParaRPr lang="en-US" sz="1400" dirty="0">
                         <a:latin typeface="Calibri" charset="0"/>
                         <a:ea typeface="Calibri" charset="0"/>
                         <a:cs typeface="Calibri" charset="0"/>
@@ -13654,7 +15634,7 @@
                         <a:buNone/>
                       </a:pPr>
                       <a:r>
-                        <a:rPr lang="en-US" sz="1150" dirty="0">
+                        <a:rPr lang="en-US" sz="1400" dirty="0">
                           <a:solidFill>
                             <a:srgbClr val="1F2429"/>
                           </a:solidFill>
@@ -13664,7 +15644,7 @@
                         </a:rPr>
                         <a:t>Date</a:t>
                       </a:r>
-                      <a:endParaRPr lang="en-US" sz="1150" dirty="0">
+                      <a:endParaRPr lang="en-US" sz="1400" dirty="0">
                         <a:latin typeface="Calibri" charset="0"/>
                         <a:ea typeface="Calibri" charset="0"/>
                         <a:cs typeface="Calibri" charset="0"/>
@@ -13722,7 +15702,7 @@
                         <a:buNone/>
                       </a:pPr>
                       <a:r>
-                        <a:rPr lang="en-US" sz="1150" dirty="0">
+                        <a:rPr lang="en-US" sz="1400" dirty="0">
                           <a:solidFill>
                             <a:srgbClr val="1F2429"/>
                           </a:solidFill>
@@ -13732,7 +15712,7 @@
                         </a:rPr>
                         <a:t>ISODate("2021-09-01")</a:t>
                       </a:r>
-                      <a:endParaRPr lang="en-US" sz="1150" dirty="0">
+                      <a:endParaRPr lang="en-US" sz="1400" dirty="0">
                         <a:latin typeface="Calibri" charset="0"/>
                         <a:ea typeface="Calibri" charset="0"/>
                         <a:cs typeface="Calibri" charset="0"/>
@@ -13790,7 +15770,7 @@
                         <a:buNone/>
                       </a:pPr>
                       <a:r>
-                        <a:rPr lang="en-US" sz="1150" dirty="0">
+                        <a:rPr lang="en-US" sz="1400" dirty="0">
                           <a:solidFill>
                             <a:srgbClr val="1F2429"/>
                           </a:solidFill>
@@ -13800,7 +15780,7 @@
                         </a:rPr>
                         <a:t>Stored internally as ms since the Unix epoch</a:t>
                       </a:r>
-                      <a:endParaRPr lang="en-US" sz="1150" dirty="0">
+                      <a:endParaRPr lang="en-US" sz="1400" dirty="0">
                         <a:latin typeface="Calibri" charset="0"/>
                         <a:ea typeface="Calibri" charset="0"/>
                         <a:cs typeface="Calibri" charset="0"/>
@@ -13860,7 +15840,7 @@
                         <a:buNone/>
                       </a:pPr>
                       <a:r>
-                        <a:rPr lang="en-US" sz="1150" dirty="0">
+                        <a:rPr lang="en-US" sz="1400" dirty="0">
                           <a:solidFill>
                             <a:srgbClr val="1F2429"/>
                           </a:solidFill>
@@ -13870,7 +15850,7 @@
                         </a:rPr>
                         <a:t>Array</a:t>
                       </a:r>
-                      <a:endParaRPr lang="en-US" sz="1150" dirty="0">
+                      <a:endParaRPr lang="en-US" sz="1400" dirty="0">
                         <a:latin typeface="Calibri" charset="0"/>
                         <a:ea typeface="Calibri" charset="0"/>
                         <a:cs typeface="Calibri" charset="0"/>
@@ -13928,7 +15908,7 @@
                         <a:buNone/>
                       </a:pPr>
                       <a:r>
-                        <a:rPr lang="en-US" sz="1150" dirty="0">
+                        <a:rPr lang="en-US" sz="1400" dirty="0">
                           <a:solidFill>
                             <a:srgbClr val="1F2429"/>
                           </a:solidFill>
@@ -13938,7 +15918,7 @@
                         </a:rPr>
                         <a:t>["CSC270", "CSC211"]</a:t>
                       </a:r>
-                      <a:endParaRPr lang="en-US" sz="1150" dirty="0">
+                      <a:endParaRPr lang="en-US" sz="1400" dirty="0">
                         <a:latin typeface="Calibri" charset="0"/>
                         <a:ea typeface="Calibri" charset="0"/>
                         <a:cs typeface="Calibri" charset="0"/>
@@ -13996,7 +15976,7 @@
                         <a:buNone/>
                       </a:pPr>
                       <a:r>
-                        <a:rPr lang="en-US" sz="1150" dirty="0">
+                        <a:rPr lang="en-US" sz="1400" dirty="0">
                           <a:solidFill>
                             <a:srgbClr val="1F2429"/>
                           </a:solidFill>
@@ -14006,7 +15986,7 @@
                         </a:rPr>
                         <a:t>An ordered list — values need not share a type</a:t>
                       </a:r>
-                      <a:endParaRPr lang="en-US" sz="1150" dirty="0">
+                      <a:endParaRPr lang="en-US" sz="1400" dirty="0">
                         <a:latin typeface="Calibri" charset="0"/>
                         <a:ea typeface="Calibri" charset="0"/>
                         <a:cs typeface="Calibri" charset="0"/>
@@ -14066,7 +16046,7 @@
                         <a:buNone/>
                       </a:pPr>
                       <a:r>
-                        <a:rPr lang="en-US" sz="1150" dirty="0">
+                        <a:rPr lang="en-US" sz="1400" dirty="0">
                           <a:solidFill>
                             <a:srgbClr val="1F2429"/>
                           </a:solidFill>
@@ -14076,7 +16056,7 @@
                         </a:rPr>
                         <a:t>Embedded Document</a:t>
                       </a:r>
-                      <a:endParaRPr lang="en-US" sz="1150" dirty="0">
+                      <a:endParaRPr lang="en-US" sz="1400" dirty="0">
                         <a:latin typeface="Calibri" charset="0"/>
                         <a:ea typeface="Calibri" charset="0"/>
                         <a:cs typeface="Calibri" charset="0"/>
@@ -14134,7 +16114,7 @@
                         <a:buNone/>
                       </a:pPr>
                       <a:r>
-                        <a:rPr lang="en-US" sz="1150" dirty="0">
+                        <a:rPr lang="en-US" sz="1400" dirty="0">
                           <a:solidFill>
                             <a:srgbClr val="1F2429"/>
                           </a:solidFill>
@@ -14144,7 +16124,7 @@
                         </a:rPr>
                         <a:t>{ street: "...", city: "..." }</a:t>
                       </a:r>
-                      <a:endParaRPr lang="en-US" sz="1150" dirty="0">
+                      <a:endParaRPr lang="en-US" sz="1400" dirty="0">
                         <a:latin typeface="Calibri" charset="0"/>
                         <a:ea typeface="Calibri" charset="0"/>
                         <a:cs typeface="Calibri" charset="0"/>
@@ -14202,7 +16182,7 @@
                         <a:buNone/>
                       </a:pPr>
                       <a:r>
-                        <a:rPr lang="en-US" sz="1150" dirty="0">
+                        <a:rPr lang="en-US" sz="1400" dirty="0">
                           <a:solidFill>
                             <a:srgbClr val="1F2429"/>
                           </a:solidFill>
@@ -14212,7 +16192,7 @@
                         </a:rPr>
                         <a:t>A document nested as the value of a field</a:t>
                       </a:r>
-                      <a:endParaRPr lang="en-US" sz="1150" dirty="0">
+                      <a:endParaRPr lang="en-US" sz="1400" dirty="0">
                         <a:latin typeface="Calibri" charset="0"/>
                         <a:ea typeface="Calibri" charset="0"/>
                         <a:cs typeface="Calibri" charset="0"/>
@@ -14401,7 +16381,7 @@
               <a:buNone/>
             </a:pPr>
             <a:r>
-              <a:rPr lang="en-US" sz="1000" u="sng" dirty="0">
+              <a:rPr lang="en-US" sz="1200" u="sng" dirty="0">
                 <a:solidFill>
                   <a:srgbClr val="8A939B"/>
                 </a:solidFill>
@@ -14422,7 +16402,7 @@
               <a:buNone/>
             </a:pPr>
             <a:r>
-              <a:rPr lang="en-US" sz="1000" dirty="0">
+              <a:rPr lang="en-US" sz="1200" dirty="0">
                 <a:solidFill>
                   <a:srgbClr val="8A939B"/>
                 </a:solidFill>
@@ -14430,9 +16410,9 @@
                 <a:ea typeface="Calibri" pitchFamily="34" charset="-122"/>
                 <a:cs typeface="Calibri" pitchFamily="34" charset="-120"/>
               </a:rPr>
-              <a:t>  ·  8</a:t>
-            </a:r>
-            <a:endParaRPr lang="en-US" sz="1000" dirty="0"/>
+              <a:t>  ·  9</a:t>
+            </a:r>
+            <a:endParaRPr lang="en-US" sz="1200" dirty="0"/>
           </a:p>
         </p:txBody>
       </p:sp>
@@ -14464,7 +16444,7 @@
               <a:buNone/>
             </a:pPr>
             <a:r>
-              <a:rPr lang="en-US" sz="1300" dirty="0">
+              <a:rPr lang="en-US" sz="1400" dirty="0">
                 <a:solidFill>
                   <a:srgbClr val="1F2429"/>
                 </a:solidFill>
@@ -14474,7 +16454,7 @@
               </a:rPr>
               <a:t>The biggest mental shift from the relational model: instead of splitting related data into separate tables, a document can embed related data directly inside the parent — trading normalization for reading everything about one entity in a single read.</a:t>
             </a:r>
-            <a:endParaRPr lang="en-US" sz="1300" dirty="0"/>
+            <a:endParaRPr lang="en-US" sz="1800" dirty="0"/>
           </a:p>
         </p:txBody>
       </p:sp>
@@ -14636,7 +16616,7 @@
               <a:buNone/>
             </a:pPr>
             <a:r>
-              <a:rPr lang="en-US" sz="1000" dirty="0">
+              <a:rPr lang="en-US" sz="1200" dirty="0">
                 <a:solidFill>
                   <a:srgbClr val="8A939B"/>
                 </a:solidFill>
@@ -14646,7 +16626,7 @@
               </a:rPr>
               <a:t>mongosh</a:t>
             </a:r>
-            <a:endParaRPr lang="en-US" sz="1000" dirty="0"/>
+            <a:endParaRPr lang="en-US" sz="1200" dirty="0"/>
           </a:p>
         </p:txBody>
       </p:sp>
@@ -14678,7 +16658,7 @@
               <a:buNone/>
             </a:pPr>
             <a:r>
-              <a:rPr lang="en-US" sz="1300" dirty="0">
+              <a:rPr lang="en-US" sz="1400" dirty="0">
                 <a:solidFill>
                   <a:srgbClr val="E8EDF0"/>
                 </a:solidFill>
@@ -14688,7 +16668,7 @@
               </a:rPr>
               <a:t>db.students.insertOne({</a:t>
             </a:r>
-            <a:endParaRPr lang="en-US" sz="1300" dirty="0"/>
+            <a:endParaRPr lang="en-US" sz="1800" dirty="0"/>
           </a:p>
           <a:p>
             <a:pPr indent="0" marL="0">
@@ -14698,7 +16678,7 @@
               <a:buNone/>
             </a:pPr>
             <a:r>
-              <a:rPr lang="en-US" sz="1300" dirty="0">
+              <a:rPr lang="en-US" sz="1400" dirty="0">
                 <a:solidFill>
                   <a:srgbClr val="E8EDF0"/>
                 </a:solidFill>
@@ -14708,7 +16688,7 @@
               </a:rPr>
               <a:t>  regNo: "FA21-BCS-045",</a:t>
             </a:r>
-            <a:endParaRPr lang="en-US" sz="1300" dirty="0"/>
+            <a:endParaRPr lang="en-US" sz="1800" dirty="0"/>
           </a:p>
           <a:p>
             <a:pPr indent="0" marL="0">
@@ -14718,7 +16698,7 @@
               <a:buNone/>
             </a:pPr>
             <a:r>
-              <a:rPr lang="en-US" sz="1300" dirty="0">
+              <a:rPr lang="en-US" sz="1400" dirty="0">
                 <a:solidFill>
                   <a:srgbClr val="E8EDF0"/>
                 </a:solidFill>
@@ -14728,7 +16708,7 @@
               </a:rPr>
               <a:t>  name: "Ayesha Khan",</a:t>
             </a:r>
-            <a:endParaRPr lang="en-US" sz="1300" dirty="0"/>
+            <a:endParaRPr lang="en-US" sz="1800" dirty="0"/>
           </a:p>
           <a:p>
             <a:pPr indent="0" marL="0">
@@ -14738,7 +16718,7 @@
               <a:buNone/>
             </a:pPr>
             <a:r>
-              <a:rPr lang="en-US" sz="1300" dirty="0">
+              <a:rPr lang="en-US" sz="1400" dirty="0">
                 <a:solidFill>
                   <a:srgbClr val="E8EDF0"/>
                 </a:solidFill>
@@ -14748,7 +16728,7 @@
               </a:rPr>
               <a:t>  addresses: [</a:t>
             </a:r>
-            <a:endParaRPr lang="en-US" sz="1300" dirty="0"/>
+            <a:endParaRPr lang="en-US" sz="1800" dirty="0"/>
           </a:p>
           <a:p>
             <a:pPr indent="0" marL="0">
@@ -14758,7 +16738,7 @@
               <a:buNone/>
             </a:pPr>
             <a:r>
-              <a:rPr lang="en-US" sz="1300" dirty="0">
+              <a:rPr lang="en-US" sz="1400" dirty="0">
                 <a:solidFill>
                   <a:srgbClr val="E8EDF0"/>
                 </a:solidFill>
@@ -14768,7 +16748,7 @@
               </a:rPr>
               <a:t>    { type: "home", city: "Islamabad", street: "6 Lawrence St" },</a:t>
             </a:r>
-            <a:endParaRPr lang="en-US" sz="1300" dirty="0"/>
+            <a:endParaRPr lang="en-US" sz="1800" dirty="0"/>
           </a:p>
           <a:p>
             <a:pPr indent="0" marL="0">
@@ -14778,7 +16758,7 @@
               <a:buNone/>
             </a:pPr>
             <a:r>
-              <a:rPr lang="en-US" sz="1300" dirty="0">
+              <a:rPr lang="en-US" sz="1400" dirty="0">
                 <a:solidFill>
                   <a:srgbClr val="E8EDF0"/>
                 </a:solidFill>
@@ -14788,7 +16768,7 @@
               </a:rPr>
               <a:t>    { type: "hostel", city: "Islamabad", street: "COMSATS Hostel Block C" }</a:t>
             </a:r>
-            <a:endParaRPr lang="en-US" sz="1300" dirty="0"/>
+            <a:endParaRPr lang="en-US" sz="1800" dirty="0"/>
           </a:p>
           <a:p>
             <a:pPr indent="0" marL="0">
@@ -14798,7 +16778,7 @@
               <a:buNone/>
             </a:pPr>
             <a:r>
-              <a:rPr lang="en-US" sz="1300" dirty="0">
+              <a:rPr lang="en-US" sz="1400" dirty="0">
                 <a:solidFill>
                   <a:srgbClr val="E8EDF0"/>
                 </a:solidFill>
@@ -14808,7 +16788,7 @@
               </a:rPr>
               <a:t>  ]</a:t>
             </a:r>
-            <a:endParaRPr lang="en-US" sz="1300" dirty="0"/>
+            <a:endParaRPr lang="en-US" sz="1800" dirty="0"/>
           </a:p>
           <a:p>
             <a:pPr indent="0" marL="0">
@@ -14818,7 +16798,7 @@
               <a:buNone/>
             </a:pPr>
             <a:r>
-              <a:rPr lang="en-US" sz="1300" dirty="0">
+              <a:rPr lang="en-US" sz="1400" dirty="0">
                 <a:solidFill>
                   <a:srgbClr val="E8EDF0"/>
                 </a:solidFill>
@@ -14828,7 +16808,7 @@
               </a:rPr>
               <a:t>});</a:t>
             </a:r>
-            <a:endParaRPr lang="en-US" sz="1300" dirty="0"/>
+            <a:endParaRPr lang="en-US" sz="1800" dirty="0"/>
           </a:p>
         </p:txBody>
       </p:sp>
@@ -14967,7 +16947,7 @@
               <a:buNone/>
             </a:pPr>
             <a:r>
-              <a:rPr lang="en-US" sz="1000" u="sng" dirty="0">
+              <a:rPr lang="en-US" sz="1200" u="sng" dirty="0">
                 <a:solidFill>
                   <a:srgbClr val="8A939B"/>
                 </a:solidFill>
@@ -14988,7 +16968,7 @@
               <a:buNone/>
             </a:pPr>
             <a:r>
-              <a:rPr lang="en-US" sz="1000" dirty="0">
+              <a:rPr lang="en-US" sz="1200" dirty="0">
                 <a:solidFill>
                   <a:srgbClr val="8A939B"/>
                 </a:solidFill>
@@ -14996,9 +16976,9 @@
                 <a:ea typeface="Calibri" pitchFamily="34" charset="-122"/>
                 <a:cs typeface="Calibri" pitchFamily="34" charset="-120"/>
               </a:rPr>
-              <a:t>  ·  9</a:t>
-            </a:r>
-            <a:endParaRPr lang="en-US" sz="1000" dirty="0"/>
+              <a:t>  ·  10</a:t>
+            </a:r>
+            <a:endParaRPr lang="en-US" sz="1200" dirty="0"/>
           </a:p>
         </p:txBody>
       </p:sp>
@@ -15121,7 +17101,7 @@
               <a:buNone/>
             </a:pPr>
             <a:r>
-              <a:rPr lang="en-US" sz="1000" dirty="0">
+              <a:rPr lang="en-US" sz="1200" dirty="0">
                 <a:solidFill>
                   <a:srgbClr val="8A939B"/>
                 </a:solidFill>
@@ -15131,7 +17111,7 @@
               </a:rPr>
               <a:t>mongosh</a:t>
             </a:r>
-            <a:endParaRPr lang="en-US" sz="1000" dirty="0"/>
+            <a:endParaRPr lang="en-US" sz="1200" dirty="0"/>
           </a:p>
         </p:txBody>
       </p:sp>
@@ -15163,7 +17143,7 @@
               <a:buNone/>
             </a:pPr>
             <a:r>
-              <a:rPr lang="en-US" sz="1100" dirty="0">
+              <a:rPr lang="en-US" sz="1400" dirty="0">
                 <a:solidFill>
                   <a:srgbClr val="E8EDF0"/>
                 </a:solidFill>
@@ -15173,7 +17153,7 @@
               </a:rPr>
               <a:t>db.students.insertOne({</a:t>
             </a:r>
-            <a:endParaRPr lang="en-US" sz="1100" dirty="0"/>
+            <a:endParaRPr lang="en-US" sz="1200" dirty="0"/>
           </a:p>
           <a:p>
             <a:pPr indent="0" marL="0">
@@ -15183,7 +17163,7 @@
               <a:buNone/>
             </a:pPr>
             <a:r>
-              <a:rPr lang="en-US" sz="1100" dirty="0">
+              <a:rPr lang="en-US" sz="1400" dirty="0">
                 <a:solidFill>
                   <a:srgbClr val="E8EDF0"/>
                 </a:solidFill>
@@ -15193,7 +17173,7 @@
               </a:rPr>
               <a:t>  regNo: "FA21-BCS-045",</a:t>
             </a:r>
-            <a:endParaRPr lang="en-US" sz="1100" dirty="0"/>
+            <a:endParaRPr lang="en-US" sz="1200" dirty="0"/>
           </a:p>
           <a:p>
             <a:pPr indent="0" marL="0">
@@ -15203,7 +17183,7 @@
               <a:buNone/>
             </a:pPr>
             <a:r>
-              <a:rPr lang="en-US" sz="1100" dirty="0">
+              <a:rPr lang="en-US" sz="1400" dirty="0">
                 <a:solidFill>
                   <a:srgbClr val="E8EDF0"/>
                 </a:solidFill>
@@ -15213,7 +17193,7 @@
               </a:rPr>
               <a:t>  name: "Ayesha Khan",</a:t>
             </a:r>
-            <a:endParaRPr lang="en-US" sz="1100" dirty="0"/>
+            <a:endParaRPr lang="en-US" sz="1200" dirty="0"/>
           </a:p>
           <a:p>
             <a:pPr indent="0" marL="0">
@@ -15223,7 +17203,7 @@
               <a:buNone/>
             </a:pPr>
             <a:r>
-              <a:rPr lang="en-US" sz="1100" dirty="0">
+              <a:rPr lang="en-US" sz="1400" dirty="0">
                 <a:solidFill>
                   <a:srgbClr val="E8EDF0"/>
                 </a:solidFill>
@@ -15233,7 +17213,7 @@
               </a:rPr>
               <a:t>  gpa: 3.72,</a:t>
             </a:r>
-            <a:endParaRPr lang="en-US" sz="1100" dirty="0"/>
+            <a:endParaRPr lang="en-US" sz="1200" dirty="0"/>
           </a:p>
           <a:p>
             <a:pPr indent="0" marL="0">
@@ -15243,7 +17223,7 @@
               <a:buNone/>
             </a:pPr>
             <a:r>
-              <a:rPr lang="en-US" sz="1100" dirty="0">
+              <a:rPr lang="en-US" sz="1400" dirty="0">
                 <a:solidFill>
                   <a:srgbClr val="E8EDF0"/>
                 </a:solidFill>
@@ -15253,7 +17233,7 @@
               </a:rPr>
               <a:t>  enrolledCourses: [</a:t>
             </a:r>
-            <a:endParaRPr lang="en-US" sz="1100" dirty="0"/>
+            <a:endParaRPr lang="en-US" sz="1200" dirty="0"/>
           </a:p>
           <a:p>
             <a:pPr indent="0" marL="0">
@@ -15263,7 +17243,7 @@
               <a:buNone/>
             </a:pPr>
             <a:r>
-              <a:rPr lang="en-US" sz="1100" dirty="0">
+              <a:rPr lang="en-US" sz="1400" dirty="0">
                 <a:solidFill>
                   <a:srgbClr val="E8EDF0"/>
                 </a:solidFill>
@@ -15271,9 +17251,9 @@
                 <a:ea typeface="Courier New" pitchFamily="34" charset="-122"/>
                 <a:cs typeface="Courier New" pitchFamily="34" charset="-120"/>
               </a:rPr>
-              <a:t>    { courseCode: "CSC270", title: "Database Systems",</a:t>
-            </a:r>
-            <a:endParaRPr lang="en-US" sz="1100" dirty="0"/>
+              <a:t>    { courseCode: "CSC270" },</a:t>
+            </a:r>
+            <a:endParaRPr lang="en-US" sz="1200" dirty="0"/>
           </a:p>
           <a:p>
             <a:pPr indent="0" marL="0">
@@ -15283,7 +17263,7 @@
               <a:buNone/>
             </a:pPr>
             <a:r>
-              <a:rPr lang="en-US" sz="1100" dirty="0">
+              <a:rPr lang="en-US" sz="1400" dirty="0">
                 <a:solidFill>
                   <a:srgbClr val="E8EDF0"/>
                 </a:solidFill>
@@ -15291,9 +17271,9 @@
                 <a:ea typeface="Courier New" pitchFamily="34" charset="-122"/>
                 <a:cs typeface="Courier New" pitchFamily="34" charset="-120"/>
               </a:rPr>
-              <a:t>      creditHours: 3, semester: "Fall 2025" },</a:t>
-            </a:r>
-            <a:endParaRPr lang="en-US" sz="1100" dirty="0"/>
+              <a:t>    { courseCode: "CSC211" }</a:t>
+            </a:r>
+            <a:endParaRPr lang="en-US" sz="1200" dirty="0"/>
           </a:p>
           <a:p>
             <a:pPr indent="0" marL="0">
@@ -15303,7 +17283,7 @@
               <a:buNone/>
             </a:pPr>
             <a:r>
-              <a:rPr lang="en-US" sz="1100" dirty="0">
+              <a:rPr lang="en-US" sz="1400" dirty="0">
                 <a:solidFill>
                   <a:srgbClr val="E8EDF0"/>
                 </a:solidFill>
@@ -15311,9 +17291,9 @@
                 <a:ea typeface="Courier New" pitchFamily="34" charset="-122"/>
                 <a:cs typeface="Courier New" pitchFamily="34" charset="-120"/>
               </a:rPr>
-              <a:t>    { courseCode: "CSC211", title: "Algorithms and Data</a:t>
-            </a:r>
-            <a:endParaRPr lang="en-US" sz="1100" dirty="0"/>
+              <a:t>  ]</a:t>
+            </a:r>
+            <a:endParaRPr lang="en-US" sz="1200" dirty="0"/>
           </a:p>
           <a:p>
             <a:pPr indent="0" marL="0">
@@ -15323,7 +17303,7 @@
               <a:buNone/>
             </a:pPr>
             <a:r>
-              <a:rPr lang="en-US" sz="1100" dirty="0">
+              <a:rPr lang="en-US" sz="1400" dirty="0">
                 <a:solidFill>
                   <a:srgbClr val="E8EDF0"/>
                 </a:solidFill>
@@ -15331,49 +17311,9 @@
                 <a:ea typeface="Courier New" pitchFamily="34" charset="-122"/>
                 <a:cs typeface="Courier New" pitchFamily="34" charset="-120"/>
               </a:rPr>
-              <a:t>      Structures", creditHours: 3, semester: "Fall 2025" }</a:t>
-            </a:r>
-            <a:endParaRPr lang="en-US" sz="1100" dirty="0"/>
-          </a:p>
-          <a:p>
-            <a:pPr indent="0" marL="0">
-              <a:lnSpc>
-                <a:spcPct val="128000"/>
-              </a:lnSpc>
-              <a:buNone/>
-            </a:pPr>
-            <a:r>
-              <a:rPr lang="en-US" sz="1100" dirty="0">
-                <a:solidFill>
-                  <a:srgbClr val="E8EDF0"/>
-                </a:solidFill>
-                <a:latin typeface="Courier New" pitchFamily="34" charset="0"/>
-                <a:ea typeface="Courier New" pitchFamily="34" charset="-122"/>
-                <a:cs typeface="Courier New" pitchFamily="34" charset="-120"/>
-              </a:rPr>
-              <a:t>  ]</a:t>
-            </a:r>
-            <a:endParaRPr lang="en-US" sz="1100" dirty="0"/>
-          </a:p>
-          <a:p>
-            <a:pPr indent="0" marL="0">
-              <a:lnSpc>
-                <a:spcPct val="128000"/>
-              </a:lnSpc>
-              <a:buNone/>
-            </a:pPr>
-            <a:r>
-              <a:rPr lang="en-US" sz="1100" dirty="0">
-                <a:solidFill>
-                  <a:srgbClr val="E8EDF0"/>
-                </a:solidFill>
-                <a:latin typeface="Courier New" pitchFamily="34" charset="0"/>
-                <a:ea typeface="Courier New" pitchFamily="34" charset="-122"/>
-                <a:cs typeface="Courier New" pitchFamily="34" charset="-120"/>
-              </a:rPr>
               <a:t>});</a:t>
             </a:r>
-            <a:endParaRPr lang="en-US" sz="1100" dirty="0"/>
+            <a:endParaRPr lang="en-US" sz="1200" dirty="0"/>
           </a:p>
         </p:txBody>
       </p:sp>
@@ -15402,7 +17342,7 @@
               <a:buNone/>
             </a:pPr>
             <a:r>
-              <a:rPr lang="en-US" sz="1050" b="1" spc="100" kern="0" dirty="0">
+              <a:rPr lang="en-US" sz="1200" b="1" spc="100" kern="0" dirty="0">
                 <a:solidFill>
                   <a:srgbClr val="2FE6C4"/>
                 </a:solidFill>
@@ -15412,7 +17352,7 @@
               </a:rPr>
               <a:t>RELATIONAL (LECTURE 16)</a:t>
             </a:r>
-            <a:endParaRPr lang="en-US" sz="1050" dirty="0"/>
+            <a:endParaRPr lang="en-US" sz="1200" dirty="0"/>
           </a:p>
         </p:txBody>
       </p:sp>
@@ -15495,7 +17435,7 @@
               <a:buNone/>
             </a:pPr>
             <a:r>
-              <a:rPr lang="en-US" sz="1400" b="1" dirty="0">
+              <a:rPr lang="en-US" sz="1800" b="1" dirty="0">
                 <a:solidFill>
                   <a:srgbClr val="1F2429"/>
                 </a:solidFill>
@@ -15505,7 +17445,7 @@
               </a:rPr>
               <a:t>Student table</a:t>
             </a:r>
-            <a:endParaRPr lang="en-US" sz="1400" dirty="0"/>
+            <a:endParaRPr lang="en-US" sz="1800" dirty="0"/>
           </a:p>
         </p:txBody>
       </p:sp>
@@ -15517,7 +17457,7 @@
         </p:nvSpPr>
         <p:spPr>
           <a:xfrm>
-            <a:off x="7086600" y="1711391"/>
+            <a:off x="7086600" y="1781391"/>
             <a:ext cx="4343400" cy="325222"/>
           </a:xfrm>
           <a:prstGeom prst="rect">
@@ -15537,7 +17477,7 @@
               <a:buNone/>
             </a:pPr>
             <a:r>
-              <a:rPr lang="en-US" sz="1100" dirty="0">
+              <a:rPr lang="en-US" sz="1200" dirty="0">
                 <a:solidFill>
                   <a:srgbClr val="6B7480"/>
                 </a:solidFill>
@@ -15547,7 +17487,7 @@
               </a:rPr>
               <a:t>regNo, name, gpa</a:t>
             </a:r>
-            <a:endParaRPr lang="en-US" sz="1100" dirty="0"/>
+            <a:endParaRPr lang="en-US" sz="1200" dirty="0"/>
           </a:p>
         </p:txBody>
       </p:sp>
@@ -15654,7 +17594,7 @@
               <a:buNone/>
             </a:pPr>
             <a:r>
-              <a:rPr lang="en-US" sz="1400" b="1" dirty="0">
+              <a:rPr lang="en-US" sz="1800" b="1" dirty="0">
                 <a:solidFill>
                   <a:srgbClr val="1F2429"/>
                 </a:solidFill>
@@ -15664,7 +17604,7 @@
               </a:rPr>
               <a:t>Enrollment table</a:t>
             </a:r>
-            <a:endParaRPr lang="en-US" sz="1400" dirty="0"/>
+            <a:endParaRPr lang="en-US" sz="1800" dirty="0"/>
           </a:p>
         </p:txBody>
       </p:sp>
@@ -15676,7 +17616,7 @@
         </p:nvSpPr>
         <p:spPr>
           <a:xfrm>
-            <a:off x="7086600" y="2558735"/>
+            <a:off x="7086600" y="2628735"/>
             <a:ext cx="4343400" cy="325222"/>
           </a:xfrm>
           <a:prstGeom prst="rect">
@@ -15696,7 +17636,7 @@
               <a:buNone/>
             </a:pPr>
             <a:r>
-              <a:rPr lang="en-US" sz="1100" dirty="0">
+              <a:rPr lang="en-US" sz="1200" dirty="0">
                 <a:solidFill>
                   <a:srgbClr val="6B7480"/>
                 </a:solidFill>
@@ -15706,7 +17646,7 @@
               </a:rPr>
               <a:t>regNo (FK), courseCode (FK)</a:t>
             </a:r>
-            <a:endParaRPr lang="en-US" sz="1100" dirty="0"/>
+            <a:endParaRPr lang="en-US" sz="1200" dirty="0"/>
           </a:p>
         </p:txBody>
       </p:sp>
@@ -15813,7 +17753,7 @@
               <a:buNone/>
             </a:pPr>
             <a:r>
-              <a:rPr lang="en-US" sz="1400" b="1" dirty="0">
+              <a:rPr lang="en-US" sz="1800" b="1" dirty="0">
                 <a:solidFill>
                   <a:srgbClr val="1F2429"/>
                 </a:solidFill>
@@ -15823,7 +17763,7 @@
               </a:rPr>
               <a:t>Course table</a:t>
             </a:r>
-            <a:endParaRPr lang="en-US" sz="1400" dirty="0"/>
+            <a:endParaRPr lang="en-US" sz="1800" dirty="0"/>
           </a:p>
         </p:txBody>
       </p:sp>
@@ -15835,7 +17775,7 @@
         </p:nvSpPr>
         <p:spPr>
           <a:xfrm>
-            <a:off x="7086600" y="3406079"/>
+            <a:off x="7086600" y="3476079"/>
             <a:ext cx="4343400" cy="325222"/>
           </a:xfrm>
           <a:prstGeom prst="rect">
@@ -15855,7 +17795,7 @@
               <a:buNone/>
             </a:pPr>
             <a:r>
-              <a:rPr lang="en-US" sz="1100" dirty="0">
+              <a:rPr lang="en-US" sz="1200" dirty="0">
                 <a:solidFill>
                   <a:srgbClr val="6B7480"/>
                 </a:solidFill>
@@ -15865,7 +17805,7 @@
               </a:rPr>
               <a:t>courseCode, title, creditHours</a:t>
             </a:r>
-            <a:endParaRPr lang="en-US" sz="1100" dirty="0"/>
+            <a:endParaRPr lang="en-US" sz="1200" dirty="0"/>
           </a:p>
         </p:txBody>
       </p:sp>
@@ -15948,7 +17888,7 @@
               <a:buNone/>
             </a:pPr>
             <a:r>
-              <a:rPr lang="en-US" sz="1050" b="1" spc="100" kern="0" dirty="0">
+              <a:rPr lang="en-US" sz="1200" b="1" spc="100" kern="0" dirty="0">
                 <a:solidFill>
                   <a:srgbClr val="8B7FD9"/>
                 </a:solidFill>
@@ -15958,7 +17898,7 @@
               </a:rPr>
               <a:t>DOCUMENT APPROACH</a:t>
             </a:r>
-            <a:endParaRPr lang="en-US" sz="1050" dirty="0"/>
+            <a:endParaRPr lang="en-US" sz="1200" dirty="0"/>
           </a:p>
         </p:txBody>
       </p:sp>
